--- a/projects/TalmiEEG/slides.pptx
+++ b/projects/TalmiEEG/slides.pptx
@@ -5,31 +5,32 @@
     <p:sldMasterId id="2147483648" r:id="rId1"/>
   </p:sldMasterIdLst>
   <p:notesMasterIdLst>
-    <p:notesMasterId r:id="rId21"/>
+    <p:notesMasterId r:id="rId22"/>
   </p:notesMasterIdLst>
   <p:handoutMasterIdLst>
-    <p:handoutMasterId r:id="rId22"/>
+    <p:handoutMasterId r:id="rId23"/>
   </p:handoutMasterIdLst>
   <p:sldIdLst>
     <p:sldId id="256" r:id="rId2"/>
     <p:sldId id="271" r:id="rId3"/>
     <p:sldId id="259" r:id="rId4"/>
     <p:sldId id="274" r:id="rId5"/>
-    <p:sldId id="275" r:id="rId6"/>
-    <p:sldId id="277" r:id="rId7"/>
-    <p:sldId id="273" r:id="rId8"/>
-    <p:sldId id="278" r:id="rId9"/>
-    <p:sldId id="279" r:id="rId10"/>
-    <p:sldId id="280" r:id="rId11"/>
-    <p:sldId id="281" r:id="rId12"/>
-    <p:sldId id="282" r:id="rId13"/>
-    <p:sldId id="283" r:id="rId14"/>
-    <p:sldId id="284" r:id="rId15"/>
-    <p:sldId id="285" r:id="rId16"/>
-    <p:sldId id="286" r:id="rId17"/>
-    <p:sldId id="288" r:id="rId18"/>
-    <p:sldId id="287" r:id="rId19"/>
-    <p:sldId id="265" r:id="rId20"/>
+    <p:sldId id="289" r:id="rId6"/>
+    <p:sldId id="275" r:id="rId7"/>
+    <p:sldId id="277" r:id="rId8"/>
+    <p:sldId id="273" r:id="rId9"/>
+    <p:sldId id="278" r:id="rId10"/>
+    <p:sldId id="279" r:id="rId11"/>
+    <p:sldId id="280" r:id="rId12"/>
+    <p:sldId id="281" r:id="rId13"/>
+    <p:sldId id="282" r:id="rId14"/>
+    <p:sldId id="283" r:id="rId15"/>
+    <p:sldId id="284" r:id="rId16"/>
+    <p:sldId id="285" r:id="rId17"/>
+    <p:sldId id="286" r:id="rId18"/>
+    <p:sldId id="288" r:id="rId19"/>
+    <p:sldId id="287" r:id="rId20"/>
+    <p:sldId id="265" r:id="rId21"/>
   </p:sldIdLst>
   <p:sldSz cx="9144000" cy="6858000" type="screen4x3"/>
   <p:notesSz cx="6858000" cy="9144000"/>
@@ -1360,7 +1361,7 @@
             </a:r>
             <a:r>
               <a:rPr lang="en-US" dirty="0"/>
-              <a:t> relationships. From afar, cognitive modelling can look like opaque, overcomplicated exercise in parameter tuning that somehow always fits everything but clarifies very little. When brain data enters the picture, it can be even harder to see how neural signals relate to the mechanisms in the model.</a:t>
+              <a:t> relationships. From afar, cognitive modelling can look like an opaque, overcomplicated exercise in parameter tuning that somehow always fits everything but clarifies very little. When brain data enters the picture, it can be even harder to see how neural signals relate to the mechanisms in the model.</a:t>
             </a:r>
           </a:p>
           <a:p>
@@ -1428,48 +1429,13 @@
           <a:p>
             <a:r>
               <a:rPr lang="en-US" dirty="0"/>
-              <a:t>“In this dataset, we don’t have full recall sequences; we only know, for each list, which items were recalled.”</a:t>
-            </a:r>
-          </a:p>
-          <a:p>
-            <a:pPr marL="0" marR="0" lvl="0" indent="0" algn="l" defTabSz="914400" rtl="0" eaLnBrk="0" fontAlgn="base" latinLnBrk="0" hangingPunct="0">
-              <a:lnSpc>
-                <a:spcPct val="100000"/>
-              </a:lnSpc>
-              <a:spcBef>
-                <a:spcPct val="30000"/>
-              </a:spcBef>
-              <a:spcAft>
-                <a:spcPct val="0"/>
-              </a:spcAft>
-              <a:buClrTx/>
-              <a:buSzTx/>
-              <a:buFontTx/>
-              <a:buNone/>
-              <a:tabLst/>
-              <a:defRPr/>
-            </a:pPr>
-            <a:r>
-              <a:rPr lang="en-US" dirty="0"/>
-              <a:t>The question then becomes: how do we adapt the ideal sequence likelihood to this situation, where what we observe is just the set S sub t for each list?”</a:t>
-            </a:r>
-          </a:p>
-          <a:p>
-            <a:endParaRPr lang="en-US" dirty="0"/>
-          </a:p>
-          <a:p>
-            <a:r>
-              <a:rPr lang="en-US" dirty="0"/>
-              <a:t>“To adapt the idea of likelihood, we define a likelihood over sets. For each trial, we look at the sequences that would result in that recalled set – different orders, maybe repeats – and we aggregate their probabilities under the model.</a:t>
-            </a:r>
-          </a:p>
-          <a:p>
-            <a:endParaRPr lang="en-US" dirty="0"/>
-          </a:p>
-          <a:p>
-            <a:r>
-              <a:rPr lang="en-US" dirty="0"/>
-              <a:t>“In practice, we approximate that sum by sampling random permutations of the recalled set and averaging their sequence probabilities. It’s a Monte Carlo approximation, but it respects the generative structure and gives us a log likelihood for each trial and model.”</a:t>
+              <a:t>“If we did have full recall sequences, this is the sort of likelihood we’d like to compute. In the flow chart on the left, the model simulates study and then simulates the retrieval process one response at a time. At each step it assigns probabilities to all possible responses, including a STOP response, and we look up the probability of whatever the participant actually did – recalling ‘tree’, then ‘queen’, then ‘king’, and so on, as shown on the right.</a:t>
+            </a:r>
+          </a:p>
+          <a:p>
+            <a:r>
+              <a:rPr lang="en-US" dirty="0"/>
+              <a:t>By multiplying those probabilities across the whole sequence, we get the likelihood of that recall sequence under the current parameter setting. Fitting the model by likelihood would then mean adjusting the parameters so that the sequences we actually observed are as probable as possible under this generative process.”</a:t>
             </a:r>
           </a:p>
           <a:p>
@@ -1504,7 +1470,7 @@
     </p:spTree>
     <p:extLst>
       <p:ext uri="{BB962C8B-B14F-4D97-AF65-F5344CB8AC3E}">
-        <p14:creationId xmlns:p14="http://schemas.microsoft.com/office/powerpoint/2010/main" val="2297736142"/>
+        <p14:creationId xmlns:p14="http://schemas.microsoft.com/office/powerpoint/2010/main" val="452860400"/>
       </p:ext>
     </p:extLst>
   </p:cSld>
@@ -1560,41 +1526,48 @@
           <a:p>
             <a:r>
               <a:rPr lang="en-US" dirty="0"/>
-              <a:t>“So why go to the trouble of defining this set-based likelihood rather than just matching an SPC and an LPP–recall curve?”</a:t>
-            </a:r>
-          </a:p>
-          <a:p>
-            <a:r>
-              <a:rPr lang="en-US" dirty="0"/>
-              <a:t>“First, it means we are evaluating models on the full trial-level pattern of which items are recalled, not just on one or two summary curves we chose.”</a:t>
-            </a:r>
-          </a:p>
-          <a:p>
-            <a:r>
-              <a:rPr lang="en-US" dirty="0"/>
-              <a:t>“Second, it forces us to use the same encoding and retrieval parameters to both generate and score </a:t>
-            </a:r>
-            <a:r>
-              <a:rPr lang="en-US" dirty="0" err="1"/>
-              <a:t>behaviour</a:t>
-            </a:r>
-            <a:r>
-              <a:rPr lang="en-US" dirty="0"/>
-              <a:t>, which is important if we care about where in the process the effect lives.”</a:t>
-            </a:r>
-          </a:p>
-          <a:p>
-            <a:r>
-              <a:rPr lang="en-US" dirty="0"/>
-              <a:t>“Third, once we have these log likelihoods per subject and model, we can convert them into a simple model-comparison score that accounts for parameter count – AIC – which I’ll come back to later. That will let us say, in a principled way, which of our models are clearly ruled out by the </a:t>
-            </a:r>
-            <a:r>
-              <a:rPr lang="en-US" dirty="0" err="1"/>
-              <a:t>behaviour</a:t>
-            </a:r>
-            <a:r>
-              <a:rPr lang="en-US" dirty="0"/>
-              <a:t> and where two different process stories are effectively tied.”</a:t>
+              <a:t>“In this dataset, we don’t have full recall sequences; we only know, for each list, which items were recalled.”</a:t>
+            </a:r>
+          </a:p>
+          <a:p>
+            <a:pPr marL="0" marR="0" lvl="0" indent="0" algn="l" defTabSz="914400" rtl="0" eaLnBrk="0" fontAlgn="base" latinLnBrk="0" hangingPunct="0">
+              <a:lnSpc>
+                <a:spcPct val="100000"/>
+              </a:lnSpc>
+              <a:spcBef>
+                <a:spcPct val="30000"/>
+              </a:spcBef>
+              <a:spcAft>
+                <a:spcPct val="0"/>
+              </a:spcAft>
+              <a:buClrTx/>
+              <a:buSzTx/>
+              <a:buFontTx/>
+              <a:buNone/>
+              <a:tabLst/>
+              <a:defRPr/>
+            </a:pPr>
+            <a:r>
+              <a:rPr lang="en-US" dirty="0"/>
+              <a:t>The question then becomes: how do we adapt the ideal sequence likelihood to this situation, where what we observe is just the set S sub t for each list?”</a:t>
+            </a:r>
+          </a:p>
+          <a:p>
+            <a:endParaRPr lang="en-US" dirty="0"/>
+          </a:p>
+          <a:p>
+            <a:r>
+              <a:rPr lang="en-US" dirty="0"/>
+              <a:t>“To adapt the idea of likelihood, we define a likelihood over sets. For each trial, we look at the sequences that would result in that recalled set – different orders, maybe repeats – and we aggregate their probabilities under the model.</a:t>
+            </a:r>
+          </a:p>
+          <a:p>
+            <a:endParaRPr lang="en-US" dirty="0"/>
+          </a:p>
+          <a:p>
+            <a:r>
+              <a:rPr lang="en-US" dirty="0"/>
+              <a:t>“In practice, we approximate that sum by sampling random permutations of the recalled set and averaging their sequence probabilities. It’s a Monte Carlo approximation, but it respects the generative structure and gives us a log likelihood for each trial and model.”</a:t>
             </a:r>
           </a:p>
           <a:p>
@@ -1629,7 +1602,7 @@
     </p:spTree>
     <p:extLst>
       <p:ext uri="{BB962C8B-B14F-4D97-AF65-F5344CB8AC3E}">
-        <p14:creationId xmlns:p14="http://schemas.microsoft.com/office/powerpoint/2010/main" val="2987982840"/>
+        <p14:creationId xmlns:p14="http://schemas.microsoft.com/office/powerpoint/2010/main" val="2297736142"/>
       </p:ext>
     </p:extLst>
   </p:cSld>
@@ -1684,46 +1657,42 @@
           <a:lstStyle/>
           <a:p>
             <a:r>
-              <a:rPr lang="en-US" b="1" dirty="0"/>
-              <a:t>Objective</a:t>
-            </a:r>
-            <a:endParaRPr lang="en-US" dirty="0"/>
-          </a:p>
-          <a:p>
-            <a:r>
-              <a:rPr lang="en-US" dirty="0"/>
-              <a:t>Make Q3 concrete in words: show that there are at least two mechanistic ways to read the GLMM interaction, and that these will become your competing model variants.</a:t>
-            </a:r>
-          </a:p>
-          <a:p>
-            <a:r>
-              <a:rPr lang="en-US" b="1" dirty="0"/>
-              <a:t>Key things to say</a:t>
-            </a:r>
-            <a:endParaRPr lang="en-US" dirty="0"/>
-          </a:p>
-          <a:p>
-            <a:r>
-              <a:rPr lang="en-US" dirty="0"/>
-              <a:t>“The mixed model told us that recall depends on emotion, Early LPP, and their interaction: LPP is more strongly related to recall within negative items than within neutral items.”</a:t>
-            </a:r>
-          </a:p>
-          <a:p>
-            <a:r>
-              <a:rPr lang="en-US" dirty="0"/>
-              <a:t>“The natural story is to say: LPP must have a special, extra impact on the encoding of negative items. That’s Story B, the explicit encoding interaction story.”</a:t>
-            </a:r>
-          </a:p>
-          <a:p>
-            <a:r>
-              <a:rPr lang="en-US" dirty="0"/>
-              <a:t>“But there is another possibility. In Story A, emotion and LPP each add to encoding strength, and the way those strengths feed into a nonlinear competitive recall process creates an effective LPP × emotion interaction at the level of recall probabilities, even without an explicit interaction term in the learning rule.”</a:t>
-            </a:r>
-          </a:p>
-          <a:p>
-            <a:r>
-              <a:rPr lang="en-US" dirty="0"/>
-              <a:t>“Both stories are compatible with the GLMM. The modelling question is whether the full pattern of recall sets forces us towards one of them, or whether, for this dataset, they remain equally plausible.”</a:t>
+              <a:rPr lang="en-US" dirty="0"/>
+              <a:t>“So why go to the trouble of defining this set-based likelihood rather than just matching an SPC and an LPP–recall curve?”</a:t>
+            </a:r>
+          </a:p>
+          <a:p>
+            <a:r>
+              <a:rPr lang="en-US" dirty="0"/>
+              <a:t>“First, it means we are evaluating models on the full trial-level pattern of which items are recalled, not just on one or two summary curves we chose.”</a:t>
+            </a:r>
+          </a:p>
+          <a:p>
+            <a:r>
+              <a:rPr lang="en-US" dirty="0"/>
+              <a:t>“Second, it forces us to use the same encoding and retrieval parameters to both generate and score </a:t>
+            </a:r>
+            <a:r>
+              <a:rPr lang="en-US" dirty="0" err="1"/>
+              <a:t>behaviour</a:t>
+            </a:r>
+            <a:r>
+              <a:rPr lang="en-US" dirty="0"/>
+              <a:t>, which is important if we care about where in the process the effect lives.”</a:t>
+            </a:r>
+          </a:p>
+          <a:p>
+            <a:r>
+              <a:rPr lang="en-US" dirty="0"/>
+              <a:t>“Third, once we have these log likelihoods per subject and model, we can convert them into a simple model-comparison score that accounts for parameter count – AIC – which I’ll come back to later. That will let us say, in a principled way, which of our models are clearly ruled out by the </a:t>
+            </a:r>
+            <a:r>
+              <a:rPr lang="en-US" dirty="0" err="1"/>
+              <a:t>behaviour</a:t>
+            </a:r>
+            <a:r>
+              <a:rPr lang="en-US" dirty="0"/>
+              <a:t> and where two different process stories are effectively tied.”</a:t>
             </a:r>
           </a:p>
           <a:p>
@@ -1758,7 +1727,7 @@
     </p:spTree>
     <p:extLst>
       <p:ext uri="{BB962C8B-B14F-4D97-AF65-F5344CB8AC3E}">
-        <p14:creationId xmlns:p14="http://schemas.microsoft.com/office/powerpoint/2010/main" val="3375972357"/>
+        <p14:creationId xmlns:p14="http://schemas.microsoft.com/office/powerpoint/2010/main" val="2987982840"/>
       </p:ext>
     </p:extLst>
   </p:cSld>
@@ -1813,26 +1782,46 @@
           <a:lstStyle/>
           <a:p>
             <a:r>
-              <a:rPr lang="en-US" dirty="0"/>
-              <a:t>“To test these stories we embed them in a simple recall model with two main stages.”</a:t>
-            </a:r>
-          </a:p>
-          <a:p>
-            <a:r>
-              <a:rPr lang="en-US" dirty="0"/>
-              <a:t>“At study, items are encoded with a strength Sᵢ and linked to a context representation. At test, a cue drives a context state that activates items based on their similarity to the cue and their strength, and a competitive choice rule produces recalls or a STOP decision.”</a:t>
-            </a:r>
-          </a:p>
-          <a:p>
-            <a:r>
-              <a:rPr lang="en-US" dirty="0"/>
-              <a:t>“Across all the models I’ll show you, the retrieval stage – context dynamics, similarity, and competition – is the same.”</a:t>
-            </a:r>
-          </a:p>
-          <a:p>
-            <a:r>
-              <a:rPr lang="en-US" dirty="0"/>
-              <a:t>“What we’re going to manipulate is the encoding rule: how emotion and LPP are allowed to feed into the encoding strength Sᵢ.”</a:t>
+              <a:rPr lang="en-US" b="1" dirty="0"/>
+              <a:t>Objective</a:t>
+            </a:r>
+            <a:endParaRPr lang="en-US" dirty="0"/>
+          </a:p>
+          <a:p>
+            <a:r>
+              <a:rPr lang="en-US" dirty="0"/>
+              <a:t>Make Q3 concrete in words: show that there are at least two mechanistic ways to read the GLMM interaction, and that these will become your competing model variants.</a:t>
+            </a:r>
+          </a:p>
+          <a:p>
+            <a:r>
+              <a:rPr lang="en-US" b="1" dirty="0"/>
+              <a:t>Key things to say</a:t>
+            </a:r>
+            <a:endParaRPr lang="en-US" dirty="0"/>
+          </a:p>
+          <a:p>
+            <a:r>
+              <a:rPr lang="en-US" dirty="0"/>
+              <a:t>“The mixed model told us that recall depends on emotion, Early LPP, and their interaction: LPP is more strongly related to recall within negative items than within neutral items.”</a:t>
+            </a:r>
+          </a:p>
+          <a:p>
+            <a:r>
+              <a:rPr lang="en-US" dirty="0"/>
+              <a:t>“The natural story is to say: LPP must have a special, extra impact on the encoding of negative items. That’s Story B, the explicit encoding interaction story.”</a:t>
+            </a:r>
+          </a:p>
+          <a:p>
+            <a:r>
+              <a:rPr lang="en-US" dirty="0"/>
+              <a:t>“But there is another possibility. In Story A, emotion and LPP each add to encoding strength, and the way those strengths feed into a nonlinear competitive recall process creates an effective LPP × emotion interaction at the level of recall probabilities, even without an explicit interaction term in the learning rule.”</a:t>
+            </a:r>
+          </a:p>
+          <a:p>
+            <a:r>
+              <a:rPr lang="en-US" dirty="0"/>
+              <a:t>“Both stories are compatible with the GLMM. The modelling question is whether the full pattern of recall sets forces us towards one of them, or whether, for this dataset, they remain equally plausible.”</a:t>
             </a:r>
           </a:p>
           <a:p>
@@ -1867,7 +1856,7 @@
     </p:spTree>
     <p:extLst>
       <p:ext uri="{BB962C8B-B14F-4D97-AF65-F5344CB8AC3E}">
-        <p14:creationId xmlns:p14="http://schemas.microsoft.com/office/powerpoint/2010/main" val="1525732320"/>
+        <p14:creationId xmlns:p14="http://schemas.microsoft.com/office/powerpoint/2010/main" val="3375972357"/>
       </p:ext>
     </p:extLst>
   </p:cSld>
@@ -1923,25 +1912,25 @@
           <a:p>
             <a:r>
               <a:rPr lang="en-US" dirty="0"/>
-              <a:t>“The emotion-only model, Model 0, never sees LPP. It just implements a generic emotional boost at encoding plus the standard retrieval dynamics.”</a:t>
-            </a:r>
-          </a:p>
-          <a:p>
-            <a:r>
-              <a:rPr lang="en-US" dirty="0"/>
-              <a:t>“Model 1, the EEG main-effects model, lets emotion and LPP each influence encoding strength Sᵢ additively. In this model, any LPP × emotion interaction in recall has to come from the nonlinearity in the competitive retrieval process.”</a:t>
-            </a:r>
-          </a:p>
-          <a:p>
-            <a:r>
-              <a:rPr lang="en-US" dirty="0"/>
-              <a:t>“Model 2, the EEG interaction model, adds an explicit Emotion × LPP term in the encoding rule, so the interaction is literally in the trace: emotional items with high LPP get a special boost at encoding.”</a:t>
-            </a:r>
-          </a:p>
-          <a:p>
-            <a:r>
-              <a:rPr lang="en-US" dirty="0"/>
-              <a:t>“These three models are the formal counterparts of the stories we just outlined: emotion-only, main-effects plus competition, and explicit encoding interaction.”</a:t>
+              <a:t>“To test these stories we embed them in a simple recall model with two main stages.”</a:t>
+            </a:r>
+          </a:p>
+          <a:p>
+            <a:r>
+              <a:rPr lang="en-US" dirty="0"/>
+              <a:t>“At study, items are encoded with a strength Sᵢ and linked to a context representation. At test, a cue drives a context state that activates items based on their similarity to the cue and their strength, and a competitive choice rule produces recalls or a STOP decision.”</a:t>
+            </a:r>
+          </a:p>
+          <a:p>
+            <a:r>
+              <a:rPr lang="en-US" dirty="0"/>
+              <a:t>“Across all the models I’ll show you, the retrieval stage – context dynamics, similarity, and competition – is the same.”</a:t>
+            </a:r>
+          </a:p>
+          <a:p>
+            <a:r>
+              <a:rPr lang="en-US" dirty="0"/>
+              <a:t>“What we’re going to manipulate is the encoding rule: how emotion and LPP are allowed to feed into the encoding strength Sᵢ.”</a:t>
             </a:r>
           </a:p>
           <a:p>
@@ -1976,7 +1965,7 @@
     </p:spTree>
     <p:extLst>
       <p:ext uri="{BB962C8B-B14F-4D97-AF65-F5344CB8AC3E}">
-        <p14:creationId xmlns:p14="http://schemas.microsoft.com/office/powerpoint/2010/main" val="3073078463"/>
+        <p14:creationId xmlns:p14="http://schemas.microsoft.com/office/powerpoint/2010/main" val="1525732320"/>
       </p:ext>
     </p:extLst>
   </p:cSld>
@@ -2032,39 +2021,25 @@
           <a:p>
             <a:r>
               <a:rPr lang="en-US" dirty="0"/>
-              <a:t>“Stepping away from this dataset, what are some general rules of thumb for choosing models to compare?”</a:t>
-            </a:r>
-          </a:p>
-          <a:p>
-            <a:r>
-              <a:rPr lang="en-US" dirty="0"/>
-              <a:t>“First, you want models to differ in focused ways: ideally one mechanistic ingredient at a time. Here, the ingredient we’re playing with is where and how LPP and emotion enter the encoding rule.”</a:t>
-            </a:r>
-          </a:p>
-          <a:p>
-            <a:r>
-              <a:rPr lang="en-US" dirty="0"/>
-              <a:t>“Second, you want a baseline that is psychologically meaningful, not just an obviously bad model. In our case, an emotion-only recall model that never sees LPP is a reasonable baseline.”</a:t>
-            </a:r>
-          </a:p>
-          <a:p>
-            <a:r>
-              <a:rPr lang="en-US" dirty="0"/>
-              <a:t>“Third, you want each model to correspond to a verbal story you could explain to someone in a couple of sentences, because the point is to ask whether that story is clearly ruled out, clearly supported, or simply left underdetermined by the data.”</a:t>
-            </a:r>
-          </a:p>
-          <a:p>
-            <a:r>
-              <a:rPr lang="en-US" dirty="0"/>
-              <a:t>“In the rest of the talk, we’ll see one example of each: an emotion-only model that is clearly ruled out once we look at the fits, and two EEG-aware models where, for this dataset, the </a:t>
-            </a:r>
-            <a:r>
-              <a:rPr lang="en-US" dirty="0" err="1"/>
-              <a:t>behaviour</a:t>
-            </a:r>
-            <a:r>
-              <a:rPr lang="en-US" dirty="0"/>
-              <a:t> effectively ties them.”</a:t>
+              <a:t>“The emotion-only model, Model 0, never sees LPP. It just implements a generic emotional boost at encoding plus the standard retrieval dynamics.”</a:t>
+            </a:r>
+          </a:p>
+          <a:p>
+            <a:r>
+              <a:rPr lang="en-US" dirty="0"/>
+              <a:t>“Model 1, the EEG main-effects model, lets emotion and LPP each influence encoding strength Sᵢ additively. In this model, any LPP × emotion interaction in recall has to come from the nonlinearity in the competitive retrieval process.”</a:t>
+            </a:r>
+          </a:p>
+          <a:p>
+            <a:r>
+              <a:rPr lang="en-US" dirty="0"/>
+              <a:t>“Model 2, the EEG interaction model, adds an explicit Emotion × LPP term in the encoding rule, so the interaction is literally in the trace: emotional items with high LPP get a special boost at encoding.”</a:t>
+            </a:r>
+          </a:p>
+          <a:p>
+            <a:r>
+              <a:rPr lang="en-US" dirty="0"/>
+              <a:t>“These three models are the formal counterparts of the stories we just outlined: emotion-only, main-effects plus competition, and explicit encoding interaction.”</a:t>
             </a:r>
           </a:p>
           <a:p>
@@ -2099,7 +2074,7 @@
     </p:spTree>
     <p:extLst>
       <p:ext uri="{BB962C8B-B14F-4D97-AF65-F5344CB8AC3E}">
-        <p14:creationId xmlns:p14="http://schemas.microsoft.com/office/powerpoint/2010/main" val="3359169314"/>
+        <p14:creationId xmlns:p14="http://schemas.microsoft.com/office/powerpoint/2010/main" val="3073078463"/>
       </p:ext>
     </p:extLst>
   </p:cSld>
@@ -2154,49 +2129,44 @@
           <a:lstStyle/>
           <a:p>
             <a:r>
-              <a:rPr lang="en-US" b="1" dirty="0"/>
-              <a:t>Objective</a:t>
-            </a:r>
+              <a:rPr lang="en-US" dirty="0"/>
+              <a:t>“Stepping away from this dataset, what are some general rules of thumb for choosing models to compare?”</a:t>
+            </a:r>
+          </a:p>
+          <a:p>
+            <a:r>
+              <a:rPr lang="en-US" dirty="0"/>
+              <a:t>“First, you want models to differ in focused ways: ideally one mechanistic ingredient at a time. Here, the ingredient we’re playing with is where and how LPP and emotion enter the encoding rule.”</a:t>
+            </a:r>
+          </a:p>
+          <a:p>
+            <a:r>
+              <a:rPr lang="en-US" dirty="0"/>
+              <a:t>“Second, you want a baseline that is psychologically meaningful, not just an obviously bad model. In our case, an emotion-only recall model that never sees LPP is a reasonable baseline.”</a:t>
+            </a:r>
+          </a:p>
+          <a:p>
+            <a:r>
+              <a:rPr lang="en-US" dirty="0"/>
+              <a:t>“Third, you want each model to correspond to a verbal story you could explain to someone in a couple of sentences, because the point is to ask whether that story is clearly ruled out, clearly supported, or simply left underdetermined by the data.”</a:t>
+            </a:r>
+          </a:p>
+          <a:p>
+            <a:r>
+              <a:rPr lang="en-US" dirty="0"/>
+              <a:t>“In the rest of the talk, we’ll see one example of each: an emotion-only model that is clearly ruled out once we look at the fits, and two EEG-aware models where, for this dataset, the </a:t>
+            </a:r>
+            <a:r>
+              <a:rPr lang="en-US" dirty="0" err="1"/>
+              <a:t>behaviour</a:t>
+            </a:r>
+            <a:r>
+              <a:rPr lang="en-US" dirty="0"/>
+              <a:t> effectively ties them.”</a:t>
+            </a:r>
+          </a:p>
+          <a:p>
             <a:endParaRPr lang="en-US" dirty="0"/>
-          </a:p>
-          <a:p>
-            <a:r>
-              <a:rPr lang="en-US" dirty="0"/>
-              <a:t>Explain how you turn the log-likelihoods you just defined into a comparison score that accounts for parameter count. This answers Q4’s “how do we compare models?” at a high level.</a:t>
-            </a:r>
-          </a:p>
-          <a:p>
-            <a:r>
-              <a:rPr lang="en-US" b="1" dirty="0"/>
-              <a:t>What you say</a:t>
-            </a:r>
-            <a:endParaRPr lang="en-US" dirty="0"/>
-          </a:p>
-          <a:p>
-            <a:r>
-              <a:rPr lang="en-US" dirty="0"/>
-              <a:t>“For each participant and each model we have a log likelihood from the set-based fit: how probable their recall sets are under that model at its best-fitting parameters.”</a:t>
-            </a:r>
-          </a:p>
-          <a:p>
-            <a:r>
-              <a:rPr lang="en-US" dirty="0"/>
-              <a:t>“We use AIC to turn that into a model score. It rewards high log likelihood but </a:t>
-            </a:r>
-            <a:r>
-              <a:rPr lang="en-US" dirty="0" err="1"/>
-              <a:t>penalises</a:t>
-            </a:r>
-            <a:r>
-              <a:rPr lang="en-US" dirty="0"/>
-              <a:t> models with more free parameters.”</a:t>
-            </a:r>
-          </a:p>
-          <a:p>
-            <a:r>
-              <a:rPr lang="en-US" dirty="0"/>
-              <a:t>“Formally, AIC is 2 times the number of parameters minus 2 times the log likelihood; the important part is that lower AIC means better expected predictive performance for that participant, after accounting for model complexity.”</a:t>
-            </a:r>
           </a:p>
         </p:txBody>
       </p:sp>
@@ -2227,7 +2197,7 @@
     </p:spTree>
     <p:extLst>
       <p:ext uri="{BB962C8B-B14F-4D97-AF65-F5344CB8AC3E}">
-        <p14:creationId xmlns:p14="http://schemas.microsoft.com/office/powerpoint/2010/main" val="3251048532"/>
+        <p14:creationId xmlns:p14="http://schemas.microsoft.com/office/powerpoint/2010/main" val="3359169314"/>
       </p:ext>
     </p:extLst>
   </p:cSld>
@@ -2290,15 +2260,7 @@
           <a:p>
             <a:r>
               <a:rPr lang="en-US" dirty="0"/>
-              <a:t>Deliver the more nuanced conclusion: within the EEG-aware family, the data do </a:t>
-            </a:r>
-            <a:r>
-              <a:rPr lang="en-US" i="1" dirty="0"/>
-              <a:t>not</a:t>
-            </a:r>
-            <a:r>
-              <a:rPr lang="en-US" dirty="0"/>
-              <a:t> provide a clear preference for the explicit encoding interaction over the main-effects-only model. This is where you demonstrate “under-determination” explicitly.</a:t>
+              <a:t>Explain how you turn the log-likelihoods you just defined into a comparison score that accounts for parameter count. This answers Q4’s “how do we compare models?” at a high level.</a:t>
             </a:r>
           </a:p>
           <a:p>
@@ -2311,53 +2273,28 @@
           <a:p>
             <a:r>
               <a:rPr lang="en-US" dirty="0"/>
-              <a:t>“Now we look at the AIC difference between the EEG main-effects model and the explicit interaction model. Here </a:t>
-            </a:r>
-            <a:r>
-              <a:rPr lang="el-GR" dirty="0"/>
-              <a:t>Δ</a:t>
-            </a:r>
-            <a:r>
-              <a:rPr lang="en-US" dirty="0"/>
-              <a:t>AIC is AIC main-effects minus AIC interaction, so negative values would </a:t>
+              <a:t>“For each participant and each model we have a log likelihood from the set-based fit: how probable their recall sets are under that model at its best-fitting parameters.”</a:t>
+            </a:r>
+          </a:p>
+          <a:p>
+            <a:r>
+              <a:rPr lang="en-US" dirty="0"/>
+              <a:t>“We use AIC to turn that into a model score. It rewards high log likelihood but </a:t>
             </a:r>
             <a:r>
               <a:rPr lang="en-US" dirty="0" err="1"/>
-              <a:t>favour</a:t>
-            </a:r>
-            <a:r>
-              <a:rPr lang="en-US" dirty="0"/>
-              <a:t> the interaction model; positive values would </a:t>
-            </a:r>
-            <a:r>
-              <a:rPr lang="en-US" dirty="0" err="1"/>
-              <a:t>favour</a:t>
-            </a:r>
-            <a:r>
-              <a:rPr lang="en-US" dirty="0"/>
-              <a:t> the main-effects model.”</a:t>
-            </a:r>
-          </a:p>
-          <a:p>
-            <a:r>
-              <a:rPr lang="en-US" dirty="0"/>
-              <a:t>“On average, the interaction model has slightly lower AIC – about half a unit – but the confidence interval crosses zero and sits entirely inside our ±2-unit practical-equivalence band.”</a:t>
-            </a:r>
-          </a:p>
-          <a:p>
-            <a:r>
-              <a:rPr lang="en-US" dirty="0"/>
-              <a:t>“In other words, for this dataset, the two EEG-aware models are effectively tied in AIC terms. The current data do not justify a strong claim that the LPP × emotion effect has to be implemented as an explicit interaction in the learning rule rather than emerging from the nonlinear competition at retrieval.”</a:t>
-            </a:r>
-          </a:p>
-          <a:p>
-            <a:r>
-              <a:rPr lang="en-US" dirty="0"/>
-              <a:t>“From a mechanistic point of view, we’ve learned two things: EEG clearly matters beyond emotion labels, but the GLMM interaction does not uniquely pin down where in the process that effect lives. Both an explicit encoding interaction and a main-effects-plus-competition story are equally compatible with the recall patterns within this model class.”</a:t>
-            </a:r>
-          </a:p>
-          <a:p>
-            <a:endParaRPr lang="en-US" dirty="0"/>
+              <a:t>penalises</a:t>
+            </a:r>
+            <a:r>
+              <a:rPr lang="en-US" dirty="0"/>
+              <a:t> models with more free parameters.”</a:t>
+            </a:r>
+          </a:p>
+          <a:p>
+            <a:r>
+              <a:rPr lang="en-US" dirty="0"/>
+              <a:t>“Formally, AIC is 2 times the number of parameters minus 2 times the log likelihood; the important part is that lower AIC means better expected predictive performance for that participant, after accounting for model complexity.”</a:t>
+            </a:r>
           </a:p>
         </p:txBody>
       </p:sp>
@@ -2388,7 +2325,7 @@
     </p:spTree>
     <p:extLst>
       <p:ext uri="{BB962C8B-B14F-4D97-AF65-F5344CB8AC3E}">
-        <p14:creationId xmlns:p14="http://schemas.microsoft.com/office/powerpoint/2010/main" val="2377334693"/>
+        <p14:creationId xmlns:p14="http://schemas.microsoft.com/office/powerpoint/2010/main" val="3251048532"/>
       </p:ext>
     </p:extLst>
   </p:cSld>
@@ -2443,43 +2380,82 @@
           <a:lstStyle/>
           <a:p>
             <a:r>
-              <a:rPr lang="en-US" dirty="0"/>
-              <a:t>“Coming back to the four questions I started with, this example shows both what modelling can and cannot do for us.”</a:t>
-            </a:r>
-          </a:p>
-          <a:p>
-            <a:r>
-              <a:rPr lang="en-US" dirty="0"/>
-              <a:t>“First, it sharpened a regression result into a process-level statement: models that incorporate trial-wise LPP clearly outperform an emotion-only model, which we can now talk about in terms of encoding strength and competition in a recall model.”</a:t>
-            </a:r>
-          </a:p>
-          <a:p>
-            <a:r>
-              <a:rPr lang="en-US" dirty="0"/>
-              <a:t>“Second, it helped us see where our intuitions were not warranted. The GLMM interaction by itself does not tell us whether the effect lives in the learning rule or emerges from retrieval dynamics, because both implementations fit essentially equally well under a principled loss.”</a:t>
-            </a:r>
-          </a:p>
-          <a:p>
-            <a:r>
-              <a:rPr lang="en-US" dirty="0"/>
-              <a:t>“More generally, the modelling workflow we walked through – pick a generative model, choose a loss that matches it to the data, </a:t>
+              <a:rPr lang="en-US" b="1" dirty="0"/>
+              <a:t>Objective</a:t>
+            </a:r>
+            <a:endParaRPr lang="en-US" dirty="0"/>
+          </a:p>
+          <a:p>
+            <a:r>
+              <a:rPr lang="en-US" dirty="0"/>
+              <a:t>Deliver the more nuanced conclusion: within the EEG-aware family, the data do </a:t>
+            </a:r>
+            <a:r>
+              <a:rPr lang="en-US" i="1" dirty="0"/>
+              <a:t>not</a:t>
+            </a:r>
+            <a:r>
+              <a:rPr lang="en-US" dirty="0"/>
+              <a:t> provide a clear preference for the explicit encoding interaction over the main-effects-only model. This is where you demonstrate “under-determination” explicitly.</a:t>
+            </a:r>
+          </a:p>
+          <a:p>
+            <a:r>
+              <a:rPr lang="en-US" b="1" dirty="0"/>
+              <a:t>What you say</a:t>
+            </a:r>
+            <a:endParaRPr lang="en-US" dirty="0"/>
+          </a:p>
+          <a:p>
+            <a:r>
+              <a:rPr lang="en-US" dirty="0"/>
+              <a:t>“Now we look at the AIC difference between the EEG main-effects model and the explicit interaction model. Here </a:t>
+            </a:r>
+            <a:r>
+              <a:rPr lang="el-GR" dirty="0"/>
+              <a:t>Δ</a:t>
+            </a:r>
+            <a:r>
+              <a:rPr lang="en-US" dirty="0"/>
+              <a:t>AIC is AIC main-effects minus AIC interaction, so negative values would </a:t>
             </a:r>
             <a:r>
               <a:rPr lang="en-US" dirty="0" err="1"/>
-              <a:t>formalise</a:t>
-            </a:r>
-            <a:r>
-              <a:rPr lang="en-US" dirty="0"/>
-              <a:t> competing mechanistic stories as model variants, and compare them carefully – is something you can apply in other tasks and with other signals to see which aspects of your </a:t>
+              <a:t>favour</a:t>
+            </a:r>
+            <a:r>
+              <a:rPr lang="en-US" dirty="0"/>
+              <a:t> the interaction model; positive values would </a:t>
             </a:r>
             <a:r>
               <a:rPr lang="en-US" dirty="0" err="1"/>
-              <a:t>favourite</a:t>
-            </a:r>
-            <a:r>
-              <a:rPr lang="en-US" dirty="0"/>
-              <a:t> stories are actually constrained, and which remain underdetermined.”</a:t>
-            </a:r>
+              <a:t>favour</a:t>
+            </a:r>
+            <a:r>
+              <a:rPr lang="en-US" dirty="0"/>
+              <a:t> the main-effects model.”</a:t>
+            </a:r>
+          </a:p>
+          <a:p>
+            <a:r>
+              <a:rPr lang="en-US" dirty="0"/>
+              <a:t>“On average, the interaction model has slightly lower AIC – about half a unit – but the confidence interval crosses zero and sits entirely inside our ±2-unit practical-equivalence band.”</a:t>
+            </a:r>
+          </a:p>
+          <a:p>
+            <a:r>
+              <a:rPr lang="en-US" dirty="0"/>
+              <a:t>“In other words, for this dataset, the two EEG-aware models are effectively tied in AIC terms. The current data do not justify a strong claim that the LPP × emotion effect has to be implemented as an explicit interaction in the learning rule rather than emerging from the nonlinear competition at retrieval.”</a:t>
+            </a:r>
+          </a:p>
+          <a:p>
+            <a:r>
+              <a:rPr lang="en-US" dirty="0"/>
+              <a:t>“From a mechanistic point of view, we’ve learned two things: EEG clearly matters beyond emotion labels, but the GLMM interaction does not uniquely pin down where in the process that effect lives. Both an explicit encoding interaction and a main-effects-plus-competition story are equally compatible with the recall patterns within this model class.”</a:t>
+            </a:r>
+          </a:p>
+          <a:p>
+            <a:endParaRPr lang="en-US" dirty="0"/>
           </a:p>
         </p:txBody>
       </p:sp>
@@ -2510,7 +2486,7 @@
     </p:spTree>
     <p:extLst>
       <p:ext uri="{BB962C8B-B14F-4D97-AF65-F5344CB8AC3E}">
-        <p14:creationId xmlns:p14="http://schemas.microsoft.com/office/powerpoint/2010/main" val="3129698994"/>
+        <p14:creationId xmlns:p14="http://schemas.microsoft.com/office/powerpoint/2010/main" val="2377334693"/>
       </p:ext>
     </p:extLst>
   </p:cSld>
@@ -2564,6 +2540,265 @@
           <a:bodyPr/>
           <a:lstStyle/>
           <a:p>
+            <a:r>
+              <a:rPr lang="en-US" dirty="0"/>
+              <a:t>“Coming back to the four questions I started with, this example shows both what modelling can and cannot do for us.”</a:t>
+            </a:r>
+          </a:p>
+          <a:p>
+            <a:r>
+              <a:rPr lang="en-US" dirty="0"/>
+              <a:t>“First, it sharpened a regression result into a process-level statement: models that incorporate trial-wise LPP clearly outperform an emotion-only model, which we can now talk about in terms of encoding strength and competition in a recall model.”</a:t>
+            </a:r>
+          </a:p>
+          <a:p>
+            <a:r>
+              <a:rPr lang="en-US" dirty="0"/>
+              <a:t>“Second, it helped us see where our intuitions were not warranted. The GLMM interaction by itself does not tell us whether the effect lives in the learning rule or emerges from retrieval dynamics, because both implementations fit essentially equally well under a principled loss.”</a:t>
+            </a:r>
+          </a:p>
+          <a:p>
+            <a:r>
+              <a:rPr lang="en-US" dirty="0"/>
+              <a:t>“More generally, the modelling workflow we walked through – pick a generative model, choose a loss that matches it to the data, </a:t>
+            </a:r>
+            <a:r>
+              <a:rPr lang="en-US" dirty="0" err="1"/>
+              <a:t>formalise</a:t>
+            </a:r>
+            <a:r>
+              <a:rPr lang="en-US" dirty="0"/>
+              <a:t> competing mechanistic stories as model variants, and compare them carefully – is something you can apply in other tasks and with other signals to see which aspects of your </a:t>
+            </a:r>
+            <a:r>
+              <a:rPr lang="en-US" dirty="0" err="1"/>
+              <a:t>favourite</a:t>
+            </a:r>
+            <a:r>
+              <a:rPr lang="en-US" dirty="0"/>
+              <a:t> stories are actually constrained, and which remain underdetermined.”</a:t>
+            </a:r>
+          </a:p>
+        </p:txBody>
+      </p:sp>
+      <p:sp>
+        <p:nvSpPr>
+          <p:cNvPr id="4" name="Slide Number Placeholder 3"/>
+          <p:cNvSpPr>
+            <a:spLocks noGrp="1"/>
+          </p:cNvSpPr>
+          <p:nvPr>
+            <p:ph type="sldNum" sz="quarter" idx="5"/>
+          </p:nvPr>
+        </p:nvSpPr>
+        <p:spPr/>
+        <p:txBody>
+          <a:bodyPr/>
+          <a:lstStyle/>
+          <a:p>
+            <a:fld id="{CEA5AD2E-89E1-4370-8739-344D4E353C41}" type="slidenum">
+              <a:rPr lang="en-GB" altLang="en-US" smtClean="0"/>
+              <a:pPr/>
+              <a:t>19</a:t>
+            </a:fld>
+            <a:endParaRPr lang="en-GB" altLang="en-US"/>
+          </a:p>
+        </p:txBody>
+      </p:sp>
+    </p:spTree>
+    <p:extLst>
+      <p:ext uri="{BB962C8B-B14F-4D97-AF65-F5344CB8AC3E}">
+        <p14:creationId xmlns:p14="http://schemas.microsoft.com/office/powerpoint/2010/main" val="3129698994"/>
+      </p:ext>
+    </p:extLst>
+  </p:cSld>
+  <p:clrMapOvr>
+    <a:masterClrMapping/>
+  </p:clrMapOvr>
+</p:notes>
+</file>
+
+<file path=ppt/notesSlides/notesSlide2.xml><?xml version="1.0" encoding="utf-8"?>
+<p:notes xmlns:a="http://schemas.openxmlformats.org/drawingml/2006/main" xmlns:r="http://schemas.openxmlformats.org/officeDocument/2006/relationships" xmlns:p="http://schemas.openxmlformats.org/presentationml/2006/main">
+  <p:cSld>
+    <p:spTree>
+      <p:nvGrpSpPr>
+        <p:cNvPr id="1" name=""/>
+        <p:cNvGrpSpPr/>
+        <p:nvPr/>
+      </p:nvGrpSpPr>
+      <p:grpSpPr>
+        <a:xfrm>
+          <a:off x="0" y="0"/>
+          <a:ext cx="0" cy="0"/>
+          <a:chOff x="0" y="0"/>
+          <a:chExt cx="0" cy="0"/>
+        </a:xfrm>
+      </p:grpSpPr>
+      <p:sp>
+        <p:nvSpPr>
+          <p:cNvPr id="2" name="Slide Image Placeholder 1"/>
+          <p:cNvSpPr>
+            <a:spLocks noGrp="1" noRot="1" noChangeAspect="1"/>
+          </p:cNvSpPr>
+          <p:nvPr>
+            <p:ph type="sldImg"/>
+          </p:nvPr>
+        </p:nvSpPr>
+        <p:spPr/>
+      </p:sp>
+      <p:sp>
+        <p:nvSpPr>
+          <p:cNvPr id="3" name="Notes Placeholder 2"/>
+          <p:cNvSpPr>
+            <a:spLocks noGrp="1"/>
+          </p:cNvSpPr>
+          <p:nvPr>
+            <p:ph type="body" idx="1"/>
+          </p:nvPr>
+        </p:nvSpPr>
+        <p:spPr/>
+        <p:txBody>
+          <a:bodyPr/>
+          <a:lstStyle/>
+          <a:p>
+            <a:r>
+              <a:rPr lang="en-US" dirty="0"/>
+              <a:t>“There are four things I’m hoping you’ll take away.”</a:t>
+            </a:r>
+          </a:p>
+          <a:p>
+            <a:r>
+              <a:rPr lang="en-US" dirty="0"/>
+              <a:t>“First, why we sometimes want cognitive models in addition to statistical models. Regressions are great for telling us that a neural signal or other factor predicts some behavioral outcome, but they don’t tell us where in the process that effect lives. Models give us a place to put those ideas.”</a:t>
+            </a:r>
+          </a:p>
+          <a:p>
+            <a:r>
+              <a:rPr lang="en-US" dirty="0"/>
+              <a:t>“Second, what it actually means to fit a model by likelihood. I’ll show you how we treat the model as a generator of trial-by-trial </a:t>
+            </a:r>
+            <a:r>
+              <a:rPr lang="en-US" dirty="0" err="1"/>
+              <a:t>behaviour</a:t>
+            </a:r>
+            <a:r>
+              <a:rPr lang="en-US" dirty="0"/>
+              <a:t> and use that to define a loss function, and why that’s more informative than just making one summary curve line up.”</a:t>
+            </a:r>
+          </a:p>
+          <a:p>
+            <a:r>
+              <a:rPr lang="en-US" dirty="0"/>
+              <a:t>“Third, how to go from vague hypotheses like ‘maybe the EEG signal is boosting encoding’ to a small set of explicit models that embody different stories. We’ll see that </a:t>
+            </a:r>
+            <a:r>
+              <a:rPr lang="en-US" dirty="0" err="1"/>
+              <a:t>formalising</a:t>
+            </a:r>
+            <a:r>
+              <a:rPr lang="en-US" dirty="0"/>
+              <a:t> those stories is already informative.”</a:t>
+            </a:r>
+          </a:p>
+          <a:p>
+            <a:r>
+              <a:rPr lang="en-US" dirty="0"/>
+              <a:t>“And fourth, how to compare those models in a way that lets us say which stories are clearly ruled out, which are supported, and where the data simply don’t distinguish between them. That, in my mind, is one of the key reasons to do cognitive modelling.”</a:t>
+            </a:r>
+          </a:p>
+          <a:p>
+            <a:r>
+              <a:rPr lang="en-US" dirty="0"/>
+              <a:t>“I’ll use one emotional memory EEG dataset as a running example so we’re not talking in the abstract, but I’ll keep circling back to these four questions rather than the specifics of that experiment.”</a:t>
+            </a:r>
+          </a:p>
+          <a:p>
+            <a:endParaRPr lang="en-US" dirty="0"/>
+          </a:p>
+        </p:txBody>
+      </p:sp>
+      <p:sp>
+        <p:nvSpPr>
+          <p:cNvPr id="4" name="Slide Number Placeholder 3"/>
+          <p:cNvSpPr>
+            <a:spLocks noGrp="1"/>
+          </p:cNvSpPr>
+          <p:nvPr>
+            <p:ph type="sldNum" sz="quarter" idx="5"/>
+          </p:nvPr>
+        </p:nvSpPr>
+        <p:spPr/>
+        <p:txBody>
+          <a:bodyPr/>
+          <a:lstStyle/>
+          <a:p>
+            <a:fld id="{CEA5AD2E-89E1-4370-8739-344D4E353C41}" type="slidenum">
+              <a:rPr lang="en-GB" altLang="en-US" smtClean="0"/>
+              <a:pPr/>
+              <a:t>2</a:t>
+            </a:fld>
+            <a:endParaRPr lang="en-GB" altLang="en-US"/>
+          </a:p>
+        </p:txBody>
+      </p:sp>
+    </p:spTree>
+    <p:extLst>
+      <p:ext uri="{BB962C8B-B14F-4D97-AF65-F5344CB8AC3E}">
+        <p14:creationId xmlns:p14="http://schemas.microsoft.com/office/powerpoint/2010/main" val="1671032477"/>
+      </p:ext>
+    </p:extLst>
+  </p:cSld>
+  <p:clrMapOvr>
+    <a:masterClrMapping/>
+  </p:clrMapOvr>
+</p:notes>
+</file>
+
+<file path=ppt/notesSlides/notesSlide20.xml><?xml version="1.0" encoding="utf-8"?>
+<p:notes xmlns:a="http://schemas.openxmlformats.org/drawingml/2006/main" xmlns:r="http://schemas.openxmlformats.org/officeDocument/2006/relationships" xmlns:p="http://schemas.openxmlformats.org/presentationml/2006/main">
+  <p:cSld>
+    <p:spTree>
+      <p:nvGrpSpPr>
+        <p:cNvPr id="1" name=""/>
+        <p:cNvGrpSpPr/>
+        <p:nvPr/>
+      </p:nvGrpSpPr>
+      <p:grpSpPr>
+        <a:xfrm>
+          <a:off x="0" y="0"/>
+          <a:ext cx="0" cy="0"/>
+          <a:chOff x="0" y="0"/>
+          <a:chExt cx="0" cy="0"/>
+        </a:xfrm>
+      </p:grpSpPr>
+      <p:sp>
+        <p:nvSpPr>
+          <p:cNvPr id="2" name="Slide Image Placeholder 1"/>
+          <p:cNvSpPr>
+            <a:spLocks noGrp="1" noRot="1" noChangeAspect="1"/>
+          </p:cNvSpPr>
+          <p:nvPr>
+            <p:ph type="sldImg"/>
+          </p:nvPr>
+        </p:nvSpPr>
+        <p:spPr/>
+      </p:sp>
+      <p:sp>
+        <p:nvSpPr>
+          <p:cNvPr id="3" name="Notes Placeholder 2"/>
+          <p:cNvSpPr>
+            <a:spLocks noGrp="1"/>
+          </p:cNvSpPr>
+          <p:nvPr>
+            <p:ph type="body" idx="1"/>
+          </p:nvPr>
+        </p:nvSpPr>
+        <p:spPr/>
+        <p:txBody>
+          <a:bodyPr/>
+          <a:lstStyle/>
+          <a:p>
             <a:pPr marL="0" marR="0" lvl="0" indent="0" algn="l" defTabSz="914400" rtl="0" eaLnBrk="0" fontAlgn="base" latinLnBrk="0" hangingPunct="0">
               <a:lnSpc>
                 <a:spcPct val="100000"/>
@@ -3043,7 +3278,7 @@
             <a:fld id="{CEA5AD2E-89E1-4370-8739-344D4E353C41}" type="slidenum">
               <a:rPr lang="en-GB" altLang="en-US" smtClean="0"/>
               <a:pPr/>
-              <a:t>19</a:t>
+              <a:t>20</a:t>
             </a:fld>
             <a:endParaRPr lang="en-GB" altLang="en-US"/>
           </a:p>
@@ -3053,143 +3288,6 @@
     <p:extLst>
       <p:ext uri="{BB962C8B-B14F-4D97-AF65-F5344CB8AC3E}">
         <p14:creationId xmlns:p14="http://schemas.microsoft.com/office/powerpoint/2010/main" val="3709087954"/>
-      </p:ext>
-    </p:extLst>
-  </p:cSld>
-  <p:clrMapOvr>
-    <a:masterClrMapping/>
-  </p:clrMapOvr>
-</p:notes>
-</file>
-
-<file path=ppt/notesSlides/notesSlide2.xml><?xml version="1.0" encoding="utf-8"?>
-<p:notes xmlns:a="http://schemas.openxmlformats.org/drawingml/2006/main" xmlns:r="http://schemas.openxmlformats.org/officeDocument/2006/relationships" xmlns:p="http://schemas.openxmlformats.org/presentationml/2006/main">
-  <p:cSld>
-    <p:spTree>
-      <p:nvGrpSpPr>
-        <p:cNvPr id="1" name=""/>
-        <p:cNvGrpSpPr/>
-        <p:nvPr/>
-      </p:nvGrpSpPr>
-      <p:grpSpPr>
-        <a:xfrm>
-          <a:off x="0" y="0"/>
-          <a:ext cx="0" cy="0"/>
-          <a:chOff x="0" y="0"/>
-          <a:chExt cx="0" cy="0"/>
-        </a:xfrm>
-      </p:grpSpPr>
-      <p:sp>
-        <p:nvSpPr>
-          <p:cNvPr id="2" name="Slide Image Placeholder 1"/>
-          <p:cNvSpPr>
-            <a:spLocks noGrp="1" noRot="1" noChangeAspect="1"/>
-          </p:cNvSpPr>
-          <p:nvPr>
-            <p:ph type="sldImg"/>
-          </p:nvPr>
-        </p:nvSpPr>
-        <p:spPr/>
-      </p:sp>
-      <p:sp>
-        <p:nvSpPr>
-          <p:cNvPr id="3" name="Notes Placeholder 2"/>
-          <p:cNvSpPr>
-            <a:spLocks noGrp="1"/>
-          </p:cNvSpPr>
-          <p:nvPr>
-            <p:ph type="body" idx="1"/>
-          </p:nvPr>
-        </p:nvSpPr>
-        <p:spPr/>
-        <p:txBody>
-          <a:bodyPr/>
-          <a:lstStyle/>
-          <a:p>
-            <a:r>
-              <a:rPr lang="en-US" dirty="0"/>
-              <a:t>“There are four things I’m hoping you’ll take away.”</a:t>
-            </a:r>
-          </a:p>
-          <a:p>
-            <a:r>
-              <a:rPr lang="en-US" dirty="0"/>
-              <a:t>“First, why we sometimes want cognitive models in addition to statistical models. Regressions are great for telling us that a neural signal or other factor predicts some behavioral outcome, but they don’t tell us where in the process that effect lives. Models give us a place to put those ideas.”</a:t>
-            </a:r>
-          </a:p>
-          <a:p>
-            <a:r>
-              <a:rPr lang="en-US" dirty="0"/>
-              <a:t>“Second, what it actually means to fit a model by likelihood. I’ll show you how we treat the model as a generator of trial-by-trial </a:t>
-            </a:r>
-            <a:r>
-              <a:rPr lang="en-US" dirty="0" err="1"/>
-              <a:t>behaviour</a:t>
-            </a:r>
-            <a:r>
-              <a:rPr lang="en-US" dirty="0"/>
-              <a:t> and use that to define a loss function, and why that’s more informative than just making one summary curve line up.”</a:t>
-            </a:r>
-          </a:p>
-          <a:p>
-            <a:r>
-              <a:rPr lang="en-US" dirty="0"/>
-              <a:t>“Third, how to go from vague hypotheses like ‘maybe the EEG signal is boosting encoding’ to a small set of explicit models that embody different stories. We’ll see that </a:t>
-            </a:r>
-            <a:r>
-              <a:rPr lang="en-US" dirty="0" err="1"/>
-              <a:t>formalising</a:t>
-            </a:r>
-            <a:r>
-              <a:rPr lang="en-US" dirty="0"/>
-              <a:t> those stories is already informative.”</a:t>
-            </a:r>
-          </a:p>
-          <a:p>
-            <a:r>
-              <a:rPr lang="en-US" dirty="0"/>
-              <a:t>“And fourth, how to compare those models in a way that lets us say which stories are clearly ruled out, which are supported, and where the data simply don’t distinguish between them. That, in my mind, is one of the key reasons to do cognitive modelling.”</a:t>
-            </a:r>
-          </a:p>
-          <a:p>
-            <a:r>
-              <a:rPr lang="en-US" dirty="0"/>
-              <a:t>“I’ll use one emotional memory EEG dataset as a running example so we’re not talking in the abstract, but I’ll keep circling back to these four questions rather than the specifics of that experiment.”</a:t>
-            </a:r>
-          </a:p>
-          <a:p>
-            <a:endParaRPr lang="en-US" dirty="0"/>
-          </a:p>
-        </p:txBody>
-      </p:sp>
-      <p:sp>
-        <p:nvSpPr>
-          <p:cNvPr id="4" name="Slide Number Placeholder 3"/>
-          <p:cNvSpPr>
-            <a:spLocks noGrp="1"/>
-          </p:cNvSpPr>
-          <p:nvPr>
-            <p:ph type="sldNum" sz="quarter" idx="5"/>
-          </p:nvPr>
-        </p:nvSpPr>
-        <p:spPr/>
-        <p:txBody>
-          <a:bodyPr/>
-          <a:lstStyle/>
-          <a:p>
-            <a:fld id="{CEA5AD2E-89E1-4370-8739-344D4E353C41}" type="slidenum">
-              <a:rPr lang="en-GB" altLang="en-US" smtClean="0"/>
-              <a:pPr/>
-              <a:t>2</a:t>
-            </a:fld>
-            <a:endParaRPr lang="en-GB" altLang="en-US"/>
-          </a:p>
-        </p:txBody>
-      </p:sp>
-    </p:spTree>
-    <p:extLst>
-      <p:ext uri="{BB962C8B-B14F-4D97-AF65-F5344CB8AC3E}">
-        <p14:creationId xmlns:p14="http://schemas.microsoft.com/office/powerpoint/2010/main" val="1671032477"/>
       </p:ext>
     </p:extLst>
   </p:cSld>
@@ -3411,6 +3509,132 @@
   <p:cSld>
     <p:spTree>
       <p:nvGrpSpPr>
+        <p:cNvPr id="1" name="">
+          <a:extLst>
+            <a:ext uri="{FF2B5EF4-FFF2-40B4-BE49-F238E27FC236}">
+              <a16:creationId xmlns:a16="http://schemas.microsoft.com/office/drawing/2014/main" id="{02BDF731-7E1B-E7AD-1688-4DFD016620F1}"/>
+            </a:ext>
+          </a:extLst>
+        </p:cNvPr>
+        <p:cNvGrpSpPr/>
+        <p:nvPr/>
+      </p:nvGrpSpPr>
+      <p:grpSpPr>
+        <a:xfrm>
+          <a:off x="0" y="0"/>
+          <a:ext cx="0" cy="0"/>
+          <a:chOff x="0" y="0"/>
+          <a:chExt cx="0" cy="0"/>
+        </a:xfrm>
+      </p:grpSpPr>
+      <p:sp>
+        <p:nvSpPr>
+          <p:cNvPr id="2" name="Slide Image Placeholder 1">
+            <a:extLst>
+              <a:ext uri="{FF2B5EF4-FFF2-40B4-BE49-F238E27FC236}">
+                <a16:creationId xmlns:a16="http://schemas.microsoft.com/office/drawing/2014/main" id="{31F18366-8130-D914-1676-6ABF9458569A}"/>
+              </a:ext>
+            </a:extLst>
+          </p:cNvPr>
+          <p:cNvSpPr>
+            <a:spLocks noGrp="1" noRot="1" noChangeAspect="1"/>
+          </p:cNvSpPr>
+          <p:nvPr>
+            <p:ph type="sldImg"/>
+          </p:nvPr>
+        </p:nvSpPr>
+        <p:spPr/>
+      </p:sp>
+      <p:sp>
+        <p:nvSpPr>
+          <p:cNvPr id="3" name="Notes Placeholder 2">
+            <a:extLst>
+              <a:ext uri="{FF2B5EF4-FFF2-40B4-BE49-F238E27FC236}">
+                <a16:creationId xmlns:a16="http://schemas.microsoft.com/office/drawing/2014/main" id="{B319C97A-83D0-DA93-2FFE-1FEE8D9FD89B}"/>
+              </a:ext>
+            </a:extLst>
+          </p:cNvPr>
+          <p:cNvSpPr>
+            <a:spLocks noGrp="1"/>
+          </p:cNvSpPr>
+          <p:nvPr>
+            <p:ph type="body" idx="1"/>
+          </p:nvPr>
+        </p:nvSpPr>
+        <p:spPr/>
+        <p:txBody>
+          <a:bodyPr/>
+          <a:lstStyle/>
+          <a:p>
+            <a:r>
+              <a:rPr lang="en-US" dirty="0"/>
+              <a:t>“</a:t>
+            </a:r>
+            <a:r>
+              <a:rPr lang="en-US" dirty="0" err="1"/>
+              <a:t>Behaviourally</a:t>
+            </a:r>
+            <a:r>
+              <a:rPr lang="en-US" dirty="0"/>
+              <a:t> in this dataset, we see the familiar emotional enhancement of memory: negative items are more likely to be recalled than neutral ones across serial position.”</a:t>
+            </a:r>
+          </a:p>
+          <a:p>
+            <a:r>
+              <a:rPr lang="en-US" dirty="0"/>
+              <a:t>“Any model we use later will at least have to capture this basic pattern.</a:t>
+            </a:r>
+          </a:p>
+        </p:txBody>
+      </p:sp>
+      <p:sp>
+        <p:nvSpPr>
+          <p:cNvPr id="4" name="Slide Number Placeholder 3">
+            <a:extLst>
+              <a:ext uri="{FF2B5EF4-FFF2-40B4-BE49-F238E27FC236}">
+                <a16:creationId xmlns:a16="http://schemas.microsoft.com/office/drawing/2014/main" id="{2D090522-C77F-56DD-2ADD-8D5B0977962C}"/>
+              </a:ext>
+            </a:extLst>
+          </p:cNvPr>
+          <p:cNvSpPr>
+            <a:spLocks noGrp="1"/>
+          </p:cNvSpPr>
+          <p:nvPr>
+            <p:ph type="sldNum" sz="quarter" idx="5"/>
+          </p:nvPr>
+        </p:nvSpPr>
+        <p:spPr/>
+        <p:txBody>
+          <a:bodyPr/>
+          <a:lstStyle/>
+          <a:p>
+            <a:fld id="{CEA5AD2E-89E1-4370-8739-344D4E353C41}" type="slidenum">
+              <a:rPr lang="en-GB" altLang="en-US" smtClean="0"/>
+              <a:pPr/>
+              <a:t>5</a:t>
+            </a:fld>
+            <a:endParaRPr lang="en-GB" altLang="en-US"/>
+          </a:p>
+        </p:txBody>
+      </p:sp>
+    </p:spTree>
+    <p:extLst>
+      <p:ext uri="{BB962C8B-B14F-4D97-AF65-F5344CB8AC3E}">
+        <p14:creationId xmlns:p14="http://schemas.microsoft.com/office/powerpoint/2010/main" val="3032170448"/>
+      </p:ext>
+    </p:extLst>
+  </p:cSld>
+  <p:clrMapOvr>
+    <a:masterClrMapping/>
+  </p:clrMapOvr>
+</p:notes>
+</file>
+
+<file path=ppt/notesSlides/notesSlide6.xml><?xml version="1.0" encoding="utf-8"?>
+<p:notes xmlns:a="http://schemas.openxmlformats.org/drawingml/2006/main" xmlns:r="http://schemas.openxmlformats.org/officeDocument/2006/relationships" xmlns:p="http://schemas.openxmlformats.org/presentationml/2006/main">
+  <p:cSld>
+    <p:spTree>
+      <p:nvGrpSpPr>
         <p:cNvPr id="1" name=""/>
         <p:cNvGrpSpPr/>
         <p:nvPr/>
@@ -3490,7 +3714,7 @@
             <a:fld id="{CEA5AD2E-89E1-4370-8739-344D4E353C41}" type="slidenum">
               <a:rPr lang="en-GB" altLang="en-US" smtClean="0"/>
               <a:pPr/>
-              <a:t>5</a:t>
+              <a:t>6</a:t>
             </a:fld>
             <a:endParaRPr lang="en-GB" altLang="en-US"/>
           </a:p>
@@ -3509,7 +3733,7 @@
 </p:notes>
 </file>
 
-<file path=ppt/notesSlides/notesSlide6.xml><?xml version="1.0" encoding="utf-8"?>
+<file path=ppt/notesSlides/notesSlide7.xml><?xml version="1.0" encoding="utf-8"?>
 <p:notes xmlns:a="http://schemas.openxmlformats.org/drawingml/2006/main" xmlns:r="http://schemas.openxmlformats.org/officeDocument/2006/relationships" xmlns:p="http://schemas.openxmlformats.org/presentationml/2006/main">
   <p:cSld>
     <p:spTree>
@@ -3611,7 +3835,7 @@
             <a:fld id="{CEA5AD2E-89E1-4370-8739-344D4E353C41}" type="slidenum">
               <a:rPr lang="en-GB" altLang="en-US" smtClean="0"/>
               <a:pPr/>
-              <a:t>6</a:t>
+              <a:t>7</a:t>
             </a:fld>
             <a:endParaRPr lang="en-GB" altLang="en-US"/>
           </a:p>
@@ -3621,123 +3845,6 @@
     <p:extLst>
       <p:ext uri="{BB962C8B-B14F-4D97-AF65-F5344CB8AC3E}">
         <p14:creationId xmlns:p14="http://schemas.microsoft.com/office/powerpoint/2010/main" val="87433008"/>
-      </p:ext>
-    </p:extLst>
-  </p:cSld>
-  <p:clrMapOvr>
-    <a:masterClrMapping/>
-  </p:clrMapOvr>
-</p:notes>
-</file>
-
-<file path=ppt/notesSlides/notesSlide7.xml><?xml version="1.0" encoding="utf-8"?>
-<p:notes xmlns:a="http://schemas.openxmlformats.org/drawingml/2006/main" xmlns:r="http://schemas.openxmlformats.org/officeDocument/2006/relationships" xmlns:p="http://schemas.openxmlformats.org/presentationml/2006/main">
-  <p:cSld>
-    <p:spTree>
-      <p:nvGrpSpPr>
-        <p:cNvPr id="1" name=""/>
-        <p:cNvGrpSpPr/>
-        <p:nvPr/>
-      </p:nvGrpSpPr>
-      <p:grpSpPr>
-        <a:xfrm>
-          <a:off x="0" y="0"/>
-          <a:ext cx="0" cy="0"/>
-          <a:chOff x="0" y="0"/>
-          <a:chExt cx="0" cy="0"/>
-        </a:xfrm>
-      </p:grpSpPr>
-      <p:sp>
-        <p:nvSpPr>
-          <p:cNvPr id="2" name="Slide Image Placeholder 1"/>
-          <p:cNvSpPr>
-            <a:spLocks noGrp="1" noRot="1" noChangeAspect="1"/>
-          </p:cNvSpPr>
-          <p:nvPr>
-            <p:ph type="sldImg"/>
-          </p:nvPr>
-        </p:nvSpPr>
-        <p:spPr/>
-      </p:sp>
-      <p:sp>
-        <p:nvSpPr>
-          <p:cNvPr id="3" name="Notes Placeholder 2"/>
-          <p:cNvSpPr>
-            <a:spLocks noGrp="1"/>
-          </p:cNvSpPr>
-          <p:nvPr>
-            <p:ph type="body" idx="1"/>
-          </p:nvPr>
-        </p:nvSpPr>
-        <p:spPr/>
-        <p:txBody>
-          <a:bodyPr/>
-          <a:lstStyle/>
-          <a:p>
-            <a:r>
-              <a:rPr lang="en-US" dirty="0"/>
-              <a:t>“We can </a:t>
-            </a:r>
-            <a:r>
-              <a:rPr lang="en-US" dirty="0" err="1"/>
-              <a:t>formalise</a:t>
-            </a:r>
-            <a:r>
-              <a:rPr lang="en-US" dirty="0"/>
-              <a:t> the descriptive patterns with a logistic mixed model that predicts recall from emotion, Early LPP, and their interaction.”</a:t>
-            </a:r>
-          </a:p>
-          <a:p>
-            <a:r>
-              <a:rPr lang="en-US" dirty="0"/>
-              <a:t>“All three terms are significant: negative items are recalled more often than neutral ones; higher LPP is associated with higher recall probability; and the LPP–recall slope is steeper within negative items than within neutral ones.”</a:t>
-            </a:r>
-          </a:p>
-          <a:p>
-            <a:r>
-              <a:rPr lang="en-US" dirty="0"/>
-              <a:t>“It’s very natural to read this as ‘LPP has a special, extra impact on the encoding of negative items; the learning rule must have an explicit emotion-by-LPP interaction’.”</a:t>
-            </a:r>
-          </a:p>
-          <a:p>
-            <a:r>
-              <a:rPr lang="en-US" dirty="0"/>
-              <a:t>“The modelling part of the talk is going to ask a more careful question: given this regression result, how many different process-level stories are actually compatible with it? Can we, for example, rule out a simpler story where LPP and emotion have purely additive effects at encoding and the interaction in recall emerges downstream from the way items compete during retrieval?”</a:t>
-            </a:r>
-          </a:p>
-          <a:p>
-            <a:endParaRPr lang="en-US" dirty="0"/>
-          </a:p>
-        </p:txBody>
-      </p:sp>
-      <p:sp>
-        <p:nvSpPr>
-          <p:cNvPr id="4" name="Slide Number Placeholder 3"/>
-          <p:cNvSpPr>
-            <a:spLocks noGrp="1"/>
-          </p:cNvSpPr>
-          <p:nvPr>
-            <p:ph type="sldNum" sz="quarter" idx="5"/>
-          </p:nvPr>
-        </p:nvSpPr>
-        <p:spPr/>
-        <p:txBody>
-          <a:bodyPr/>
-          <a:lstStyle/>
-          <a:p>
-            <a:fld id="{CEA5AD2E-89E1-4370-8739-344D4E353C41}" type="slidenum">
-              <a:rPr lang="en-GB" altLang="en-US" smtClean="0"/>
-              <a:pPr/>
-              <a:t>7</a:t>
-            </a:fld>
-            <a:endParaRPr lang="en-GB" altLang="en-US"/>
-          </a:p>
-        </p:txBody>
-      </p:sp>
-    </p:spTree>
-    <p:extLst>
-      <p:ext uri="{BB962C8B-B14F-4D97-AF65-F5344CB8AC3E}">
-        <p14:creationId xmlns:p14="http://schemas.microsoft.com/office/powerpoint/2010/main" val="473124144"/>
       </p:ext>
     </p:extLst>
   </p:cSld>
@@ -3793,19 +3900,33 @@
           <a:p>
             <a:r>
               <a:rPr lang="en-US" dirty="0"/>
-              <a:t>“One way to connect a model to data is to pick a few summary curves – a serial-position curve, maybe a binned LPP–recall curve – and tune parameters so those curves line up.”</a:t>
-            </a:r>
-          </a:p>
-          <a:p>
-            <a:r>
-              <a:rPr lang="en-US" dirty="0"/>
-              <a:t>“That approach is very common and often useful, but it forces you to choose which summaries matter and how to weight them, and it ignores a lot of the trial-by-trial structure the model actually predicts.”</a:t>
-            </a:r>
-          </a:p>
-          <a:p>
-            <a:r>
-              <a:rPr lang="en-US" dirty="0"/>
-              <a:t>“Because we care about relatively subtle differences between models in how they treat LPP, we’re going to use a likelihood-based approach instead: treat the model as a generator of recall sets and ask, for each parameter setting, how probable the actually observed recall sets are.”</a:t>
+              <a:t>“We can </a:t>
+            </a:r>
+            <a:r>
+              <a:rPr lang="en-US" dirty="0" err="1"/>
+              <a:t>formalise</a:t>
+            </a:r>
+            <a:r>
+              <a:rPr lang="en-US" dirty="0"/>
+              <a:t> the descriptive patterns with a logistic mixed model that predicts recall from emotion, Early LPP, and their interaction.”</a:t>
+            </a:r>
+          </a:p>
+          <a:p>
+            <a:r>
+              <a:rPr lang="en-US" dirty="0"/>
+              <a:t>“All three terms are significant: negative items are recalled more often than neutral ones; higher LPP is associated with higher recall probability; and the LPP–recall slope is steeper within negative items than within neutral ones.”</a:t>
+            </a:r>
+          </a:p>
+          <a:p>
+            <a:r>
+              <a:rPr lang="en-US" dirty="0"/>
+              <a:t>“It’s very natural to read this as ‘LPP has a special, extra impact on the encoding of negative items; the learning rule must have an explicit emotion-by-LPP interaction’.”</a:t>
+            </a:r>
+          </a:p>
+          <a:p>
+            <a:r>
+              <a:rPr lang="en-US" dirty="0"/>
+              <a:t>“The modelling part of the talk is going to ask a more careful question: given this regression result, how many different process-level stories are actually compatible with it? Can we, for example, rule out a simpler story where LPP and emotion have purely additive effects at encoding and the interaction in recall emerges downstream from the way items compete during retrieval?”</a:t>
             </a:r>
           </a:p>
           <a:p>
@@ -3840,7 +3961,7 @@
     </p:spTree>
     <p:extLst>
       <p:ext uri="{BB962C8B-B14F-4D97-AF65-F5344CB8AC3E}">
-        <p14:creationId xmlns:p14="http://schemas.microsoft.com/office/powerpoint/2010/main" val="1813700039"/>
+        <p14:creationId xmlns:p14="http://schemas.microsoft.com/office/powerpoint/2010/main" val="473124144"/>
       </p:ext>
     </p:extLst>
   </p:cSld>
@@ -3896,13 +4017,19 @@
           <a:p>
             <a:r>
               <a:rPr lang="en-US" dirty="0"/>
-              <a:t>“If we did have full recall sequences, this is the sort of likelihood we’d like to compute. In the flow chart on the left, the model simulates study and then simulates the retrieval process one response at a time. At each step it assigns probabilities to all possible responses, including a STOP response, and we look up the probability of whatever the participant actually did – recalling ‘tree’, then ‘queen’, then ‘king’, and so on, as shown on the right.</a:t>
-            </a:r>
-          </a:p>
-          <a:p>
-            <a:r>
-              <a:rPr lang="en-US" dirty="0"/>
-              <a:t>By multiplying those probabilities across the whole sequence, we get the likelihood of that recall sequence under the current parameter setting. Fitting the model by likelihood would then mean adjusting the parameters so that the sequences we actually observed are as probable as possible under this generative process.”</a:t>
+              <a:t>“One way to connect a model to data is to pick a few summary curves – a serial-position curve, maybe a binned LPP–recall curve – and tune parameters so those curves line up.”</a:t>
+            </a:r>
+          </a:p>
+          <a:p>
+            <a:r>
+              <a:rPr lang="en-US" dirty="0"/>
+              <a:t>“That approach is very common and often useful, but it forces you to choose which summaries matter and how to weight them, and it ignores a lot of the trial-by-trial structure the model actually predicts.”</a:t>
+            </a:r>
+          </a:p>
+          <a:p>
+            <a:r>
+              <a:rPr lang="en-US" dirty="0"/>
+              <a:t>“Because we care about relatively subtle differences between models in how they treat LPP, we’re going to use a likelihood-based approach instead: treat the model as a generator of recall sets and ask, for each parameter setting, how probable the actually observed recall sets are.”</a:t>
             </a:r>
           </a:p>
           <a:p>
@@ -3937,7 +4064,7 @@
     </p:spTree>
     <p:extLst>
       <p:ext uri="{BB962C8B-B14F-4D97-AF65-F5344CB8AC3E}">
-        <p14:creationId xmlns:p14="http://schemas.microsoft.com/office/powerpoint/2010/main" val="452860400"/>
+        <p14:creationId xmlns:p14="http://schemas.microsoft.com/office/powerpoint/2010/main" val="1813700039"/>
       </p:ext>
     </p:extLst>
   </p:cSld>
@@ -7225,10 +7352,10 @@
       </p:grpSpPr>
       <p:sp>
         <p:nvSpPr>
-          <p:cNvPr id="2" name="Title 1">
+          <p:cNvPr id="7" name="Title 6">
             <a:extLst>
               <a:ext uri="{FF2B5EF4-FFF2-40B4-BE49-F238E27FC236}">
-                <a16:creationId xmlns:a16="http://schemas.microsoft.com/office/drawing/2014/main" id="{F4EE32EF-0559-B1FB-8D27-0B93F9363143}"/>
+                <a16:creationId xmlns:a16="http://schemas.microsoft.com/office/drawing/2014/main" id="{BB183D5A-9958-655B-9EBA-ACC2FAD2BAD2}"/>
               </a:ext>
             </a:extLst>
           </p:cNvPr>
@@ -7239,98 +7366,249 @@
             <p:ph type="title"/>
           </p:nvPr>
         </p:nvSpPr>
-        <p:spPr/>
+        <p:spPr>
+          <a:xfrm>
+            <a:off x="251520" y="225904"/>
+            <a:ext cx="8375650" cy="423862"/>
+          </a:xfrm>
+        </p:spPr>
         <p:txBody>
           <a:bodyPr/>
           <a:lstStyle/>
           <a:p>
             <a:r>
               <a:rPr lang="en-US" dirty="0"/>
-              <a:t>Our data: recall sets, not sequences</a:t>
-            </a:r>
-          </a:p>
-        </p:txBody>
-      </p:sp>
-      <p:sp>
-        <p:nvSpPr>
-          <p:cNvPr id="3" name="Content Placeholder 2">
+              <a:t>Ideal likelihood if we had full recall sequences:</a:t>
+            </a:r>
+            <a:br>
+              <a:rPr lang="en-US" dirty="0"/>
+            </a:br>
+            <a:r>
+              <a:rPr lang="en-US" dirty="0"/>
+              <a:t>p(</a:t>
+            </a:r>
+            <a:r>
+              <a:rPr lang="en-US" dirty="0" err="1"/>
+              <a:t>sequence_t</a:t>
+            </a:r>
+            <a:r>
+              <a:rPr lang="en-US" dirty="0"/>
+              <a:t> | model, </a:t>
+            </a:r>
+            <a:r>
+              <a:rPr lang="el-GR" dirty="0"/>
+              <a:t>θ) </a:t>
+            </a:r>
+            <a:r>
+              <a:rPr lang="en-US" dirty="0"/>
+              <a:t>per trial.</a:t>
+            </a:r>
+          </a:p>
+        </p:txBody>
+      </p:sp>
+      <p:pic>
+        <p:nvPicPr>
+          <p:cNvPr id="10" name="Picture 9">
             <a:extLst>
               <a:ext uri="{FF2B5EF4-FFF2-40B4-BE49-F238E27FC236}">
-                <a16:creationId xmlns:a16="http://schemas.microsoft.com/office/drawing/2014/main" id="{C52911A3-A185-5574-9D33-770E8B176582}"/>
+                <a16:creationId xmlns:a16="http://schemas.microsoft.com/office/drawing/2014/main" id="{56235337-7E3C-717E-6D32-1A0231F9045A}"/>
               </a:ext>
             </a:extLst>
           </p:cNvPr>
-          <p:cNvSpPr>
-            <a:spLocks noGrp="1"/>
-          </p:cNvSpPr>
-          <p:nvPr>
-            <p:ph idx="1"/>
-          </p:nvPr>
-        </p:nvSpPr>
-        <p:spPr/>
-        <p:txBody>
-          <a:bodyPr/>
-          <a:lstStyle/>
-          <a:p>
-            <a:r>
-              <a:rPr lang="en-US" dirty="0"/>
-              <a:t>In Zarubin et al., for each </a:t>
-            </a:r>
-            <a:r>
-              <a:rPr lang="en-US" b="1" dirty="0"/>
-              <a:t>list</a:t>
-            </a:r>
-            <a:r>
-              <a:rPr lang="en-US" dirty="0"/>
-              <a:t> we know, for each </a:t>
-            </a:r>
-            <a:r>
-              <a:rPr lang="en-US" b="1" dirty="0"/>
-              <a:t>item</a:t>
-            </a:r>
-            <a:r>
-              <a:rPr lang="en-US" dirty="0"/>
-              <a:t>: emotion label, Early LPP at encoding, and whether it was recalled.</a:t>
-            </a:r>
-          </a:p>
-          <a:p>
-            <a:r>
-              <a:rPr lang="en-US" dirty="0"/>
-              <a:t>We do </a:t>
-            </a:r>
-            <a:r>
-              <a:rPr lang="en-US" b="1" dirty="0"/>
-              <a:t>not</a:t>
-            </a:r>
-            <a:r>
-              <a:rPr lang="en-US" dirty="0"/>
-              <a:t> know the order of recalls, and buffer items are dropped.</a:t>
-            </a:r>
-          </a:p>
-          <a:p>
-            <a:r>
-              <a:rPr lang="en-US" dirty="0"/>
-              <a:t>So for modelling, each trial is a 20-item list with a recalled </a:t>
-            </a:r>
-            <a:r>
-              <a:rPr lang="en-US" b="1" dirty="0"/>
-              <a:t>set</a:t>
-            </a:r>
-            <a:r>
-              <a:rPr lang="en-US" dirty="0"/>
-              <a:t> Sₜ, not a full recall sequence.</a:t>
-            </a:r>
-          </a:p>
-          <a:p>
-            <a:r>
-              <a:rPr lang="en-US" dirty="0"/>
-              <a:t>We look at all the sequences that would result in that recalled set – different orders – and we aggregate their probabilities under the model</a:t>
-            </a:r>
-          </a:p>
-          <a:p>
-            <a:r>
-              <a:rPr lang="en-US" dirty="0"/>
-              <a:t>In practice, Monte Carlo approximation</a:t>
+          <p:cNvPicPr>
+            <a:picLocks noChangeAspect="1"/>
+          </p:cNvPicPr>
+          <p:nvPr/>
+        </p:nvPicPr>
+        <p:blipFill>
+          <a:blip r:embed="rId3"/>
+          <a:stretch>
+            <a:fillRect/>
+          </a:stretch>
+        </p:blipFill>
+        <p:spPr>
+          <a:xfrm>
+            <a:off x="685800" y="1484784"/>
+            <a:ext cx="7772400" cy="4723450"/>
+          </a:xfrm>
+          <a:prstGeom prst="rect">
+            <a:avLst/>
+          </a:prstGeom>
+        </p:spPr>
+      </p:pic>
+      <p:sp>
+        <p:nvSpPr>
+          <p:cNvPr id="11" name="Rectangle 4">
+            <a:extLst>
+              <a:ext uri="{FF2B5EF4-FFF2-40B4-BE49-F238E27FC236}">
+                <a16:creationId xmlns:a16="http://schemas.microsoft.com/office/drawing/2014/main" id="{90867A8B-95A8-C57E-579E-5F5954FD2581}"/>
+              </a:ext>
+            </a:extLst>
+          </p:cNvPr>
+          <p:cNvSpPr>
+            <a:spLocks noChangeArrowheads="1"/>
+          </p:cNvSpPr>
+          <p:nvPr/>
+        </p:nvSpPr>
+        <p:spPr bwMode="auto">
+          <a:xfrm>
+            <a:off x="2195736" y="6267828"/>
+            <a:ext cx="8374063" cy="261937"/>
+          </a:xfrm>
+          <a:prstGeom prst="rect">
+            <a:avLst/>
+          </a:prstGeom>
+          <a:noFill/>
+          <a:ln>
+            <a:noFill/>
+          </a:ln>
+          <a:effectLst/>
+          <a:extLst>
+            <a:ext uri="{909E8E84-426E-40DD-AFC4-6F175D3DCCD1}">
+              <a14:hiddenFill xmlns:a14="http://schemas.microsoft.com/office/drawing/2010/main">
+                <a:solidFill>
+                  <a:schemeClr val="accent1"/>
+                </a:solidFill>
+              </a14:hiddenFill>
+            </a:ext>
+            <a:ext uri="{91240B29-F687-4F45-9708-019B960494DF}">
+              <a14:hiddenLine xmlns:a14="http://schemas.microsoft.com/office/drawing/2010/main" w="127">
+                <a:solidFill>
+                  <a:schemeClr val="tx1"/>
+                </a:solidFill>
+                <a:miter lim="800000"/>
+                <a:headEnd/>
+                <a:tailEnd/>
+              </a14:hiddenLine>
+            </a:ext>
+            <a:ext uri="{AF507438-7753-43E0-B8FC-AC1667EBCBE1}">
+              <a14:hiddenEffects xmlns:a14="http://schemas.microsoft.com/office/drawing/2010/main">
+                <a:effectLst>
+                  <a:outerShdw dist="35921" dir="2700000" algn="ctr" rotWithShape="0">
+                    <a:schemeClr val="bg2"/>
+                  </a:outerShdw>
+                </a:effectLst>
+              </a14:hiddenEffects>
+            </a:ext>
+          </a:extLst>
+        </p:spPr>
+        <p:txBody>
+          <a:bodyPr wrap="none" lIns="0" tIns="0" rIns="0" bIns="0"/>
+          <a:lstStyle>
+            <a:lvl1pPr eaLnBrk="0" hangingPunct="0">
+              <a:defRPr>
+                <a:solidFill>
+                  <a:schemeClr val="tx1"/>
+                </a:solidFill>
+                <a:latin typeface="Arial" panose="020B0604020202020204" pitchFamily="34" charset="0"/>
+              </a:defRPr>
+            </a:lvl1pPr>
+            <a:lvl2pPr marL="742950" indent="-285750" eaLnBrk="0" hangingPunct="0">
+              <a:defRPr>
+                <a:solidFill>
+                  <a:schemeClr val="tx1"/>
+                </a:solidFill>
+                <a:latin typeface="Arial" panose="020B0604020202020204" pitchFamily="34" charset="0"/>
+              </a:defRPr>
+            </a:lvl2pPr>
+            <a:lvl3pPr marL="1143000" indent="-228600" eaLnBrk="0" hangingPunct="0">
+              <a:defRPr>
+                <a:solidFill>
+                  <a:schemeClr val="tx1"/>
+                </a:solidFill>
+                <a:latin typeface="Arial" panose="020B0604020202020204" pitchFamily="34" charset="0"/>
+              </a:defRPr>
+            </a:lvl3pPr>
+            <a:lvl4pPr marL="1600200" indent="-228600" eaLnBrk="0" hangingPunct="0">
+              <a:defRPr>
+                <a:solidFill>
+                  <a:schemeClr val="tx1"/>
+                </a:solidFill>
+                <a:latin typeface="Arial" panose="020B0604020202020204" pitchFamily="34" charset="0"/>
+              </a:defRPr>
+            </a:lvl4pPr>
+            <a:lvl5pPr marL="2057400" indent="-228600" eaLnBrk="0" hangingPunct="0">
+              <a:defRPr>
+                <a:solidFill>
+                  <a:schemeClr val="tx1"/>
+                </a:solidFill>
+                <a:latin typeface="Arial" panose="020B0604020202020204" pitchFamily="34" charset="0"/>
+              </a:defRPr>
+            </a:lvl5pPr>
+            <a:lvl6pPr marL="2514600" indent="-228600" eaLnBrk="0" fontAlgn="base" hangingPunct="0">
+              <a:spcBef>
+                <a:spcPct val="0"/>
+              </a:spcBef>
+              <a:spcAft>
+                <a:spcPct val="0"/>
+              </a:spcAft>
+              <a:defRPr>
+                <a:solidFill>
+                  <a:schemeClr val="tx1"/>
+                </a:solidFill>
+                <a:latin typeface="Arial" panose="020B0604020202020204" pitchFamily="34" charset="0"/>
+              </a:defRPr>
+            </a:lvl6pPr>
+            <a:lvl7pPr marL="2971800" indent="-228600" eaLnBrk="0" fontAlgn="base" hangingPunct="0">
+              <a:spcBef>
+                <a:spcPct val="0"/>
+              </a:spcBef>
+              <a:spcAft>
+                <a:spcPct val="0"/>
+              </a:spcAft>
+              <a:defRPr>
+                <a:solidFill>
+                  <a:schemeClr val="tx1"/>
+                </a:solidFill>
+                <a:latin typeface="Arial" panose="020B0604020202020204" pitchFamily="34" charset="0"/>
+              </a:defRPr>
+            </a:lvl7pPr>
+            <a:lvl8pPr marL="3429000" indent="-228600" eaLnBrk="0" fontAlgn="base" hangingPunct="0">
+              <a:spcBef>
+                <a:spcPct val="0"/>
+              </a:spcBef>
+              <a:spcAft>
+                <a:spcPct val="0"/>
+              </a:spcAft>
+              <a:defRPr>
+                <a:solidFill>
+                  <a:schemeClr val="tx1"/>
+                </a:solidFill>
+                <a:latin typeface="Arial" panose="020B0604020202020204" pitchFamily="34" charset="0"/>
+              </a:defRPr>
+            </a:lvl8pPr>
+            <a:lvl9pPr marL="3886200" indent="-228600" eaLnBrk="0" fontAlgn="base" hangingPunct="0">
+              <a:spcBef>
+                <a:spcPct val="0"/>
+              </a:spcBef>
+              <a:spcAft>
+                <a:spcPct val="0"/>
+              </a:spcAft>
+              <a:defRPr>
+                <a:solidFill>
+                  <a:schemeClr val="tx1"/>
+                </a:solidFill>
+                <a:latin typeface="Arial" panose="020B0604020202020204" pitchFamily="34" charset="0"/>
+              </a:defRPr>
+            </a:lvl9pPr>
+          </a:lstStyle>
+          <a:p>
+            <a:pPr eaLnBrk="1" hangingPunct="1"/>
+            <a:r>
+              <a:rPr lang="en-GB" altLang="en-US" sz="1600" b="1" dirty="0">
+                <a:solidFill>
+                  <a:schemeClr val="tx2"/>
+                </a:solidFill>
+              </a:rPr>
+              <a:t>Morton &amp; Polyn, 2016. </a:t>
+            </a:r>
+            <a:r>
+              <a:rPr lang="en-GB" altLang="en-US" sz="1600" b="1" i="1" dirty="0">
+                <a:solidFill>
+                  <a:schemeClr val="tx2"/>
+                </a:solidFill>
+              </a:rPr>
+              <a:t>Journal of memory and language.</a:t>
             </a:r>
           </a:p>
         </p:txBody>
@@ -7338,7 +7616,7 @@
     </p:spTree>
     <p:extLst>
       <p:ext uri="{BB962C8B-B14F-4D97-AF65-F5344CB8AC3E}">
-        <p14:creationId xmlns:p14="http://schemas.microsoft.com/office/powerpoint/2010/main" val="3282952546"/>
+        <p14:creationId xmlns:p14="http://schemas.microsoft.com/office/powerpoint/2010/main" val="3416592595"/>
       </p:ext>
     </p:extLst>
   </p:cSld>
@@ -7370,7 +7648,7 @@
           <p:cNvPr id="2" name="Title 1">
             <a:extLst>
               <a:ext uri="{FF2B5EF4-FFF2-40B4-BE49-F238E27FC236}">
-                <a16:creationId xmlns:a16="http://schemas.microsoft.com/office/drawing/2014/main" id="{F2BEA8F9-F8B3-A6DF-784C-79D54526D75D}"/>
+                <a16:creationId xmlns:a16="http://schemas.microsoft.com/office/drawing/2014/main" id="{F4EE32EF-0559-B1FB-8D27-0B93F9363143}"/>
               </a:ext>
             </a:extLst>
           </p:cNvPr>
@@ -7388,11 +7666,7 @@
           <a:p>
             <a:r>
               <a:rPr lang="en-US" dirty="0"/>
-              <a:t>Why we chose </a:t>
-            </a:r>
-            <a:r>
-              <a:rPr lang="en-US" i="1" dirty="0"/>
-              <a:t>likelihood</a:t>
+              <a:t>Our data: recall sets, not sequences</a:t>
             </a:r>
           </a:p>
         </p:txBody>
@@ -7402,7 +7676,7 @@
           <p:cNvPr id="3" name="Content Placeholder 2">
             <a:extLst>
               <a:ext uri="{FF2B5EF4-FFF2-40B4-BE49-F238E27FC236}">
-                <a16:creationId xmlns:a16="http://schemas.microsoft.com/office/drawing/2014/main" id="{F5C594B1-2C57-1937-FCE6-140347B6BCC7}"/>
+                <a16:creationId xmlns:a16="http://schemas.microsoft.com/office/drawing/2014/main" id="{C52911A3-A185-5574-9D33-770E8B176582}"/>
               </a:ext>
             </a:extLst>
           </p:cNvPr>
@@ -7420,27 +7694,63 @@
           <a:p>
             <a:r>
               <a:rPr lang="en-US" dirty="0"/>
-              <a:t>Uses all the information in which items are recalled on which lists, not just averages or one curve.</a:t>
-            </a:r>
-          </a:p>
-          <a:p>
-            <a:r>
-              <a:rPr lang="en-US" dirty="0"/>
-              <a:t>Respects the encoding + retrieval structure: same parameters generate and score </a:t>
-            </a:r>
-            <a:r>
-              <a:rPr lang="en-US" dirty="0" err="1"/>
-              <a:t>behaviour</a:t>
-            </a:r>
-            <a:r>
-              <a:rPr lang="en-US" dirty="0"/>
-              <a:t>.</a:t>
-            </a:r>
-          </a:p>
-          <a:p>
-            <a:r>
-              <a:rPr lang="en-US" dirty="0"/>
-              <a:t>Gives a principled log-likelihood we can later turn into a model-comparison score (AIC), rather than eyeballing.</a:t>
+              <a:t>In Zarubin et al., for each </a:t>
+            </a:r>
+            <a:r>
+              <a:rPr lang="en-US" b="1" dirty="0"/>
+              <a:t>list</a:t>
+            </a:r>
+            <a:r>
+              <a:rPr lang="en-US" dirty="0"/>
+              <a:t> we know, for each </a:t>
+            </a:r>
+            <a:r>
+              <a:rPr lang="en-US" b="1" dirty="0"/>
+              <a:t>item</a:t>
+            </a:r>
+            <a:r>
+              <a:rPr lang="en-US" dirty="0"/>
+              <a:t>: emotion label, Early LPP at encoding, and whether it was recalled.</a:t>
+            </a:r>
+          </a:p>
+          <a:p>
+            <a:r>
+              <a:rPr lang="en-US" dirty="0"/>
+              <a:t>We do </a:t>
+            </a:r>
+            <a:r>
+              <a:rPr lang="en-US" b="1" dirty="0"/>
+              <a:t>not</a:t>
+            </a:r>
+            <a:r>
+              <a:rPr lang="en-US" dirty="0"/>
+              <a:t> know the order of recalls, and buffer items are dropped.</a:t>
+            </a:r>
+          </a:p>
+          <a:p>
+            <a:r>
+              <a:rPr lang="en-US" dirty="0"/>
+              <a:t>So for modelling, each trial is a 20-item list with a recalled </a:t>
+            </a:r>
+            <a:r>
+              <a:rPr lang="en-US" b="1" dirty="0"/>
+              <a:t>set</a:t>
+            </a:r>
+            <a:r>
+              <a:rPr lang="en-US" dirty="0"/>
+              <a:t> Sₜ, not a full recall sequence.</a:t>
+            </a:r>
+          </a:p>
+          <a:p>
+            <a:r>
+              <a:rPr lang="en-US" dirty="0"/>
+              <a:t>We look at all the sequences that would result in that recalled set – different orders – and we aggregate their probabilities under the model</a:t>
+            </a:r>
+          </a:p>
+          <a:p>
+            <a:r>
+              <a:rPr lang="en-US" dirty="0"/>
+              <a:t>In practice, Monte Carlo approximation</a:t>
             </a:r>
           </a:p>
         </p:txBody>
@@ -7448,7 +7758,7 @@
     </p:spTree>
     <p:extLst>
       <p:ext uri="{BB962C8B-B14F-4D97-AF65-F5344CB8AC3E}">
-        <p14:creationId xmlns:p14="http://schemas.microsoft.com/office/powerpoint/2010/main" val="1671416055"/>
+        <p14:creationId xmlns:p14="http://schemas.microsoft.com/office/powerpoint/2010/main" val="3282952546"/>
       </p:ext>
     </p:extLst>
   </p:cSld>
@@ -7480,6 +7790,116 @@
           <p:cNvPr id="2" name="Title 1">
             <a:extLst>
               <a:ext uri="{FF2B5EF4-FFF2-40B4-BE49-F238E27FC236}">
+                <a16:creationId xmlns:a16="http://schemas.microsoft.com/office/drawing/2014/main" id="{F2BEA8F9-F8B3-A6DF-784C-79D54526D75D}"/>
+              </a:ext>
+            </a:extLst>
+          </p:cNvPr>
+          <p:cNvSpPr>
+            <a:spLocks noGrp="1"/>
+          </p:cNvSpPr>
+          <p:nvPr>
+            <p:ph type="title"/>
+          </p:nvPr>
+        </p:nvSpPr>
+        <p:spPr/>
+        <p:txBody>
+          <a:bodyPr/>
+          <a:lstStyle/>
+          <a:p>
+            <a:r>
+              <a:rPr lang="en-US" dirty="0"/>
+              <a:t>Why we chose </a:t>
+            </a:r>
+            <a:r>
+              <a:rPr lang="en-US" i="1" dirty="0"/>
+              <a:t>likelihood</a:t>
+            </a:r>
+          </a:p>
+        </p:txBody>
+      </p:sp>
+      <p:sp>
+        <p:nvSpPr>
+          <p:cNvPr id="3" name="Content Placeholder 2">
+            <a:extLst>
+              <a:ext uri="{FF2B5EF4-FFF2-40B4-BE49-F238E27FC236}">
+                <a16:creationId xmlns:a16="http://schemas.microsoft.com/office/drawing/2014/main" id="{F5C594B1-2C57-1937-FCE6-140347B6BCC7}"/>
+              </a:ext>
+            </a:extLst>
+          </p:cNvPr>
+          <p:cNvSpPr>
+            <a:spLocks noGrp="1"/>
+          </p:cNvSpPr>
+          <p:nvPr>
+            <p:ph idx="1"/>
+          </p:nvPr>
+        </p:nvSpPr>
+        <p:spPr/>
+        <p:txBody>
+          <a:bodyPr/>
+          <a:lstStyle/>
+          <a:p>
+            <a:r>
+              <a:rPr lang="en-US" dirty="0"/>
+              <a:t>Uses all the information in which items are recalled on which lists, not just averages or one curve.</a:t>
+            </a:r>
+          </a:p>
+          <a:p>
+            <a:r>
+              <a:rPr lang="en-US" dirty="0"/>
+              <a:t>Respects the encoding + retrieval structure: same parameters generate and score </a:t>
+            </a:r>
+            <a:r>
+              <a:rPr lang="en-US" dirty="0" err="1"/>
+              <a:t>behaviour</a:t>
+            </a:r>
+            <a:r>
+              <a:rPr lang="en-US" dirty="0"/>
+              <a:t>.</a:t>
+            </a:r>
+          </a:p>
+          <a:p>
+            <a:r>
+              <a:rPr lang="en-US" dirty="0"/>
+              <a:t>Gives a principled log-likelihood we can later turn into a model-comparison score (AIC), rather than eyeballing.</a:t>
+            </a:r>
+          </a:p>
+        </p:txBody>
+      </p:sp>
+    </p:spTree>
+    <p:extLst>
+      <p:ext uri="{BB962C8B-B14F-4D97-AF65-F5344CB8AC3E}">
+        <p14:creationId xmlns:p14="http://schemas.microsoft.com/office/powerpoint/2010/main" val="1671416055"/>
+      </p:ext>
+    </p:extLst>
+  </p:cSld>
+  <p:clrMapOvr>
+    <a:masterClrMapping/>
+  </p:clrMapOvr>
+</p:sld>
+</file>
+
+<file path=ppt/slides/slide13.xml><?xml version="1.0" encoding="utf-8"?>
+<p:sld xmlns:a="http://schemas.openxmlformats.org/drawingml/2006/main" xmlns:r="http://schemas.openxmlformats.org/officeDocument/2006/relationships" xmlns:p="http://schemas.openxmlformats.org/presentationml/2006/main">
+  <p:cSld>
+    <p:spTree>
+      <p:nvGrpSpPr>
+        <p:cNvPr id="1" name=""/>
+        <p:cNvGrpSpPr/>
+        <p:nvPr/>
+      </p:nvGrpSpPr>
+      <p:grpSpPr>
+        <a:xfrm>
+          <a:off x="0" y="0"/>
+          <a:ext cx="0" cy="0"/>
+          <a:chOff x="0" y="0"/>
+          <a:chExt cx="0" cy="0"/>
+        </a:xfrm>
+      </p:grpSpPr>
+      <p:sp>
+        <p:nvSpPr>
+          <p:cNvPr id="2" name="Title 1">
+            <a:extLst>
+              <a:ext uri="{FF2B5EF4-FFF2-40B4-BE49-F238E27FC236}">
                 <a16:creationId xmlns:a16="http://schemas.microsoft.com/office/drawing/2014/main" id="{9302793A-6973-82EA-F358-150B476BD30C}"/>
               </a:ext>
             </a:extLst>
@@ -7590,7 +8010,7 @@
 </p:sld>
 </file>
 
-<file path=ppt/slides/slide13.xml><?xml version="1.0" encoding="utf-8"?>
+<file path=ppt/slides/slide14.xml><?xml version="1.0" encoding="utf-8"?>
 <p:sld xmlns:a="http://schemas.openxmlformats.org/drawingml/2006/main" xmlns:r="http://schemas.openxmlformats.org/officeDocument/2006/relationships" xmlns:p="http://schemas.openxmlformats.org/presentationml/2006/main">
   <p:cSld>
     <p:spTree>
@@ -8404,209 +8824,6 @@
 </p:sld>
 </file>
 
-<file path=ppt/slides/slide14.xml><?xml version="1.0" encoding="utf-8"?>
-<p:sld xmlns:a="http://schemas.openxmlformats.org/drawingml/2006/main" xmlns:r="http://schemas.openxmlformats.org/officeDocument/2006/relationships" xmlns:p="http://schemas.openxmlformats.org/presentationml/2006/main">
-  <p:cSld>
-    <p:spTree>
-      <p:nvGrpSpPr>
-        <p:cNvPr id="1" name=""/>
-        <p:cNvGrpSpPr/>
-        <p:nvPr/>
-      </p:nvGrpSpPr>
-      <p:grpSpPr>
-        <a:xfrm>
-          <a:off x="0" y="0"/>
-          <a:ext cx="0" cy="0"/>
-          <a:chOff x="0" y="0"/>
-          <a:chExt cx="0" cy="0"/>
-        </a:xfrm>
-      </p:grpSpPr>
-      <p:sp>
-        <p:nvSpPr>
-          <p:cNvPr id="2" name="Title 1">
-            <a:extLst>
-              <a:ext uri="{FF2B5EF4-FFF2-40B4-BE49-F238E27FC236}">
-                <a16:creationId xmlns:a16="http://schemas.microsoft.com/office/drawing/2014/main" id="{AAED3A36-B4BA-EA4C-FAA1-67DC60300172}"/>
-              </a:ext>
-            </a:extLst>
-          </p:cNvPr>
-          <p:cNvSpPr>
-            <a:spLocks noGrp="1"/>
-          </p:cNvSpPr>
-          <p:nvPr>
-            <p:ph type="title"/>
-          </p:nvPr>
-        </p:nvSpPr>
-        <p:spPr>
-          <a:xfrm>
-            <a:off x="353726" y="260648"/>
-            <a:ext cx="8375650" cy="423862"/>
-          </a:xfrm>
-        </p:spPr>
-        <p:txBody>
-          <a:bodyPr/>
-          <a:lstStyle/>
-          <a:p>
-            <a:r>
-              <a:rPr lang="en-US" dirty="0"/>
-              <a:t>Three models: emotion-only, EEG main effects, EEG interaction</a:t>
-            </a:r>
-          </a:p>
-        </p:txBody>
-      </p:sp>
-      <p:sp>
-        <p:nvSpPr>
-          <p:cNvPr id="3" name="Content Placeholder 2">
-            <a:extLst>
-              <a:ext uri="{FF2B5EF4-FFF2-40B4-BE49-F238E27FC236}">
-                <a16:creationId xmlns:a16="http://schemas.microsoft.com/office/drawing/2014/main" id="{1EBA6170-CADA-4996-FD26-2BBD5701E5C5}"/>
-              </a:ext>
-            </a:extLst>
-          </p:cNvPr>
-          <p:cNvSpPr>
-            <a:spLocks noGrp="1"/>
-          </p:cNvSpPr>
-          <p:nvPr>
-            <p:ph idx="1"/>
-          </p:nvPr>
-        </p:nvSpPr>
-        <p:spPr/>
-        <p:txBody>
-          <a:bodyPr/>
-          <a:lstStyle/>
-          <a:p>
-            <a:pPr>
-              <a:spcAft>
-                <a:spcPts val="0"/>
-              </a:spcAft>
-            </a:pPr>
-            <a:r>
-              <a:rPr lang="en-US" b="1" dirty="0"/>
-              <a:t>Model 0 – Emotion-only</a:t>
-            </a:r>
-            <a:endParaRPr lang="en-US" dirty="0"/>
-          </a:p>
-          <a:p>
-            <a:pPr lvl="1">
-              <a:spcAft>
-                <a:spcPts val="0"/>
-              </a:spcAft>
-            </a:pPr>
-            <a:r>
-              <a:rPr lang="en-US" dirty="0"/>
-              <a:t>Encoding: Sᵢ depends on emotion label only (neg vs neutral); LPP is ignored.</a:t>
-            </a:r>
-          </a:p>
-          <a:p>
-            <a:pPr lvl="1">
-              <a:spcAft>
-                <a:spcPts val="0"/>
-              </a:spcAft>
-            </a:pPr>
-            <a:r>
-              <a:rPr lang="en-US" dirty="0"/>
-              <a:t>Retrieval: as in Slide 2.</a:t>
-            </a:r>
-          </a:p>
-          <a:p>
-            <a:pPr>
-              <a:spcAft>
-                <a:spcPts val="0"/>
-              </a:spcAft>
-            </a:pPr>
-            <a:r>
-              <a:rPr lang="en-US" b="1" dirty="0"/>
-              <a:t>Model 1 – EEG main-effects</a:t>
-            </a:r>
-            <a:endParaRPr lang="en-US" dirty="0"/>
-          </a:p>
-          <a:p>
-            <a:pPr lvl="1">
-              <a:spcAft>
-                <a:spcPts val="0"/>
-              </a:spcAft>
-            </a:pPr>
-            <a:r>
-              <a:rPr lang="en-US" dirty="0"/>
-              <a:t>Encoding: Sᵢ = f(emotion, LPP) with additive contributions (no explicit Emotion × LPP term).</a:t>
-            </a:r>
-          </a:p>
-          <a:p>
-            <a:pPr lvl="1">
-              <a:spcAft>
-                <a:spcPts val="0"/>
-              </a:spcAft>
-            </a:pPr>
-            <a:r>
-              <a:rPr lang="en-US" b="1" dirty="0"/>
-              <a:t>Story</a:t>
-            </a:r>
-            <a:r>
-              <a:rPr lang="en-US" dirty="0"/>
-              <a:t>: any LPP × emotion interaction in recall must emerge from the retrieval competition (Story A).</a:t>
-            </a:r>
-          </a:p>
-          <a:p>
-            <a:pPr>
-              <a:spcAft>
-                <a:spcPts val="0"/>
-              </a:spcAft>
-            </a:pPr>
-            <a:r>
-              <a:rPr lang="en-US" b="1" dirty="0"/>
-              <a:t>Model 2 – EEG interaction</a:t>
-            </a:r>
-            <a:endParaRPr lang="en-US" dirty="0"/>
-          </a:p>
-          <a:p>
-            <a:pPr lvl="1">
-              <a:spcAft>
-                <a:spcPts val="0"/>
-              </a:spcAft>
-            </a:pPr>
-            <a:r>
-              <a:rPr lang="en-US" dirty="0"/>
-              <a:t>Encoding: Sᵢ = f(emotion, LPP, emotion × LPP); explicit interaction term.</a:t>
-            </a:r>
-          </a:p>
-          <a:p>
-            <a:pPr lvl="1">
-              <a:spcAft>
-                <a:spcPts val="0"/>
-              </a:spcAft>
-            </a:pPr>
-            <a:r>
-              <a:rPr lang="en-US" b="1" dirty="0"/>
-              <a:t>Story</a:t>
-            </a:r>
-            <a:r>
-              <a:rPr lang="en-US" dirty="0"/>
-              <a:t>: the interaction is present in the learning rule itself (Story B).</a:t>
-            </a:r>
-          </a:p>
-          <a:p>
-            <a:pPr>
-              <a:spcAft>
-                <a:spcPts val="0"/>
-              </a:spcAft>
-            </a:pPr>
-            <a:endParaRPr lang="en-US" dirty="0"/>
-          </a:p>
-        </p:txBody>
-      </p:sp>
-    </p:spTree>
-    <p:extLst>
-      <p:ext uri="{BB962C8B-B14F-4D97-AF65-F5344CB8AC3E}">
-        <p14:creationId xmlns:p14="http://schemas.microsoft.com/office/powerpoint/2010/main" val="1223163322"/>
-      </p:ext>
-    </p:extLst>
-  </p:cSld>
-  <p:clrMapOvr>
-    <a:masterClrMapping/>
-  </p:clrMapOvr>
-</p:sld>
-</file>
-
 <file path=ppt/slides/slide15.xml><?xml version="1.0" encoding="utf-8"?>
 <p:sld xmlns:a="http://schemas.openxmlformats.org/drawingml/2006/main" xmlns:r="http://schemas.openxmlformats.org/officeDocument/2006/relationships" xmlns:p="http://schemas.openxmlformats.org/presentationml/2006/main">
   <p:cSld>
@@ -8629,7 +8846,7 @@
           <p:cNvPr id="2" name="Title 1">
             <a:extLst>
               <a:ext uri="{FF2B5EF4-FFF2-40B4-BE49-F238E27FC236}">
-                <a16:creationId xmlns:a16="http://schemas.microsoft.com/office/drawing/2014/main" id="{5A48283D-F1A4-2844-0580-5439D7DA6E23}"/>
+                <a16:creationId xmlns:a16="http://schemas.microsoft.com/office/drawing/2014/main" id="{AAED3A36-B4BA-EA4C-FAA1-67DC60300172}"/>
               </a:ext>
             </a:extLst>
           </p:cNvPr>
@@ -8640,14 +8857,19 @@
             <p:ph type="title"/>
           </p:nvPr>
         </p:nvSpPr>
-        <p:spPr/>
+        <p:spPr>
+          <a:xfrm>
+            <a:off x="353726" y="260648"/>
+            <a:ext cx="8375650" cy="423862"/>
+          </a:xfrm>
+        </p:spPr>
         <p:txBody>
           <a:bodyPr/>
           <a:lstStyle/>
           <a:p>
             <a:r>
               <a:rPr lang="en-US" dirty="0"/>
-              <a:t>Choosing models: general principles</a:t>
+              <a:t>Three models: emotion-only, EEG main effects, EEG interaction</a:t>
             </a:r>
           </a:p>
         </p:txBody>
@@ -8657,7 +8879,7 @@
           <p:cNvPr id="3" name="Content Placeholder 2">
             <a:extLst>
               <a:ext uri="{FF2B5EF4-FFF2-40B4-BE49-F238E27FC236}">
-                <a16:creationId xmlns:a16="http://schemas.microsoft.com/office/drawing/2014/main" id="{011B9901-D3E5-4DDC-A5B9-0A564BD3FC72}"/>
+                <a16:creationId xmlns:a16="http://schemas.microsoft.com/office/drawing/2014/main" id="{1EBA6170-CADA-4996-FD26-2BBD5701E5C5}"/>
               </a:ext>
             </a:extLst>
           </p:cNvPr>
@@ -8673,35 +8895,129 @@
           <a:bodyPr/>
           <a:lstStyle/>
           <a:p>
-            <a:r>
-              <a:rPr lang="en-US" dirty="0"/>
-              <a:t>Change one mechanistic ingredient at a time (here: how LPP and emotion enter encoding).</a:t>
-            </a:r>
-          </a:p>
-          <a:p>
-            <a:r>
-              <a:rPr lang="en-US" dirty="0"/>
-              <a:t>Include a psychologically meaningful baseline (here: an emotion-only model).</a:t>
-            </a:r>
-          </a:p>
-          <a:p>
-            <a:r>
-              <a:rPr lang="en-US" dirty="0"/>
-              <a:t>Ensure each model corresponds to a verbal story you can explain in a couple of sentences.</a:t>
-            </a:r>
-          </a:p>
-          <a:p>
-            <a:r>
-              <a:rPr lang="en-US" dirty="0"/>
-              <a:t>Aim to ask whether the data clearly disfavor a given ingredient, clearly favor it, or leave it underdetermined.</a:t>
-            </a:r>
+            <a:pPr>
+              <a:spcAft>
+                <a:spcPts val="0"/>
+              </a:spcAft>
+            </a:pPr>
+            <a:r>
+              <a:rPr lang="en-US" b="1" dirty="0"/>
+              <a:t>Model 0 – Emotion-only</a:t>
+            </a:r>
+            <a:endParaRPr lang="en-US" dirty="0"/>
+          </a:p>
+          <a:p>
+            <a:pPr lvl="1">
+              <a:spcAft>
+                <a:spcPts val="0"/>
+              </a:spcAft>
+            </a:pPr>
+            <a:r>
+              <a:rPr lang="en-US" dirty="0"/>
+              <a:t>Encoding: Sᵢ depends on emotion label only (neg vs neutral); LPP is ignored.</a:t>
+            </a:r>
+          </a:p>
+          <a:p>
+            <a:pPr lvl="1">
+              <a:spcAft>
+                <a:spcPts val="0"/>
+              </a:spcAft>
+            </a:pPr>
+            <a:r>
+              <a:rPr lang="en-US" dirty="0"/>
+              <a:t>Retrieval: as in Slide 2.</a:t>
+            </a:r>
+          </a:p>
+          <a:p>
+            <a:pPr>
+              <a:spcAft>
+                <a:spcPts val="0"/>
+              </a:spcAft>
+            </a:pPr>
+            <a:r>
+              <a:rPr lang="en-US" b="1" dirty="0"/>
+              <a:t>Model 1 – EEG main-effects</a:t>
+            </a:r>
+            <a:endParaRPr lang="en-US" dirty="0"/>
+          </a:p>
+          <a:p>
+            <a:pPr lvl="1">
+              <a:spcAft>
+                <a:spcPts val="0"/>
+              </a:spcAft>
+            </a:pPr>
+            <a:r>
+              <a:rPr lang="en-US" dirty="0"/>
+              <a:t>Encoding: Sᵢ = f(emotion, LPP) with additive contributions (no explicit Emotion × LPP term).</a:t>
+            </a:r>
+          </a:p>
+          <a:p>
+            <a:pPr lvl="1">
+              <a:spcAft>
+                <a:spcPts val="0"/>
+              </a:spcAft>
+            </a:pPr>
+            <a:r>
+              <a:rPr lang="en-US" b="1" dirty="0"/>
+              <a:t>Story</a:t>
+            </a:r>
+            <a:r>
+              <a:rPr lang="en-US" dirty="0"/>
+              <a:t>: any LPP × emotion interaction in recall must emerge from the retrieval competition (Story A).</a:t>
+            </a:r>
+          </a:p>
+          <a:p>
+            <a:pPr>
+              <a:spcAft>
+                <a:spcPts val="0"/>
+              </a:spcAft>
+            </a:pPr>
+            <a:r>
+              <a:rPr lang="en-US" b="1" dirty="0"/>
+              <a:t>Model 2 – EEG interaction</a:t>
+            </a:r>
+            <a:endParaRPr lang="en-US" dirty="0"/>
+          </a:p>
+          <a:p>
+            <a:pPr lvl="1">
+              <a:spcAft>
+                <a:spcPts val="0"/>
+              </a:spcAft>
+            </a:pPr>
+            <a:r>
+              <a:rPr lang="en-US" dirty="0"/>
+              <a:t>Encoding: Sᵢ = f(emotion, LPP, emotion × LPP); explicit interaction term.</a:t>
+            </a:r>
+          </a:p>
+          <a:p>
+            <a:pPr lvl="1">
+              <a:spcAft>
+                <a:spcPts val="0"/>
+              </a:spcAft>
+            </a:pPr>
+            <a:r>
+              <a:rPr lang="en-US" b="1" dirty="0"/>
+              <a:t>Story</a:t>
+            </a:r>
+            <a:r>
+              <a:rPr lang="en-US" dirty="0"/>
+              <a:t>: the interaction is present in the learning rule itself (Story B).</a:t>
+            </a:r>
+          </a:p>
+          <a:p>
+            <a:pPr>
+              <a:spcAft>
+                <a:spcPts val="0"/>
+              </a:spcAft>
+            </a:pPr>
+            <a:endParaRPr lang="en-US" dirty="0"/>
           </a:p>
         </p:txBody>
       </p:sp>
     </p:spTree>
     <p:extLst>
       <p:ext uri="{BB962C8B-B14F-4D97-AF65-F5344CB8AC3E}">
-        <p14:creationId xmlns:p14="http://schemas.microsoft.com/office/powerpoint/2010/main" val="581430304"/>
+        <p14:creationId xmlns:p14="http://schemas.microsoft.com/office/powerpoint/2010/main" val="1223163322"/>
       </p:ext>
     </p:extLst>
   </p:cSld>
@@ -8733,7 +9049,7 @@
           <p:cNvPr id="2" name="Title 1">
             <a:extLst>
               <a:ext uri="{FF2B5EF4-FFF2-40B4-BE49-F238E27FC236}">
-                <a16:creationId xmlns:a16="http://schemas.microsoft.com/office/drawing/2014/main" id="{FA0FE729-354A-F490-7806-3F9A90D45325}"/>
+                <a16:creationId xmlns:a16="http://schemas.microsoft.com/office/drawing/2014/main" id="{5A48283D-F1A4-2844-0580-5439D7DA6E23}"/>
               </a:ext>
             </a:extLst>
           </p:cNvPr>
@@ -8751,7 +9067,7 @@
           <a:p>
             <a:r>
               <a:rPr lang="en-US" dirty="0"/>
-              <a:t>From likelihood to AIC: scoring models</a:t>
+              <a:t>Choosing models: general principles</a:t>
             </a:r>
           </a:p>
         </p:txBody>
@@ -8761,7 +9077,7 @@
           <p:cNvPr id="3" name="Content Placeholder 2">
             <a:extLst>
               <a:ext uri="{FF2B5EF4-FFF2-40B4-BE49-F238E27FC236}">
-                <a16:creationId xmlns:a16="http://schemas.microsoft.com/office/drawing/2014/main" id="{A8AB0891-B856-1C5F-EE0A-63EE524BC82C}"/>
+                <a16:creationId xmlns:a16="http://schemas.microsoft.com/office/drawing/2014/main" id="{011B9901-D3E5-4DDC-A5B9-0A564BD3FC72}"/>
               </a:ext>
             </a:extLst>
           </p:cNvPr>
@@ -8779,64 +9095,33 @@
           <a:p>
             <a:r>
               <a:rPr lang="en-US" dirty="0"/>
-              <a:t>Set-based log likelihood per subject and model -&gt; </a:t>
-            </a:r>
-            <a:r>
-              <a:rPr lang="en-US" dirty="0" err="1"/>
-              <a:t>AIC</a:t>
-            </a:r>
-            <a:r>
-              <a:rPr lang="en-US" baseline="-25000" dirty="0" err="1"/>
-              <a:t>s,m</a:t>
-            </a:r>
-            <a:endParaRPr lang="en-US" baseline="-25000" dirty="0"/>
-          </a:p>
-          <a:p>
-            <a:r>
-              <a:rPr lang="en-US" dirty="0" err="1"/>
-              <a:t>AIC</a:t>
-            </a:r>
-            <a:r>
-              <a:rPr lang="en-US" baseline="-25000" dirty="0" err="1"/>
-              <a:t>s,m</a:t>
-            </a:r>
-            <a:r>
-              <a:rPr lang="en-US" dirty="0"/>
-              <a:t> = 2 * k</a:t>
-            </a:r>
-            <a:r>
-              <a:rPr lang="en-US" baseline="-25000" dirty="0"/>
-              <a:t>m</a:t>
-            </a:r>
-            <a:r>
-              <a:rPr lang="en-US" dirty="0"/>
-              <a:t> - 2 * </a:t>
-            </a:r>
-            <a:r>
-              <a:rPr lang="en-US" dirty="0" err="1"/>
-              <a:t>logL</a:t>
-            </a:r>
-            <a:r>
-              <a:rPr lang="en-US" baseline="-25000" dirty="0" err="1"/>
-              <a:t>s,m</a:t>
-            </a:r>
-            <a:endParaRPr lang="en-US" baseline="-25000" dirty="0"/>
-          </a:p>
-          <a:p>
-            <a:r>
-              <a:rPr lang="en-US" dirty="0"/>
-              <a:t>Lower AIC ~ better expected predictive performance for that subject (fit - complexity penalty).</a:t>
-            </a:r>
-          </a:p>
-          <a:p>
-            <a:endParaRPr lang="en-US" dirty="0"/>
+              <a:t>Change one mechanistic ingredient at a time (here: how LPP and emotion enter encoding).</a:t>
+            </a:r>
+          </a:p>
+          <a:p>
+            <a:r>
+              <a:rPr lang="en-US" dirty="0"/>
+              <a:t>Include a psychologically meaningful baseline (here: an emotion-only model).</a:t>
+            </a:r>
+          </a:p>
+          <a:p>
+            <a:r>
+              <a:rPr lang="en-US" dirty="0"/>
+              <a:t>Ensure each model corresponds to a verbal story you can explain in a couple of sentences.</a:t>
+            </a:r>
+          </a:p>
+          <a:p>
+            <a:r>
+              <a:rPr lang="en-US" dirty="0"/>
+              <a:t>Aim to ask whether the data clearly disfavor a given ingredient, clearly favor it, or leave it underdetermined.</a:t>
+            </a:r>
           </a:p>
         </p:txBody>
       </p:sp>
     </p:spTree>
     <p:extLst>
       <p:ext uri="{BB962C8B-B14F-4D97-AF65-F5344CB8AC3E}">
-        <p14:creationId xmlns:p14="http://schemas.microsoft.com/office/powerpoint/2010/main" val="3073377082"/>
+        <p14:creationId xmlns:p14="http://schemas.microsoft.com/office/powerpoint/2010/main" val="581430304"/>
       </p:ext>
     </p:extLst>
   </p:cSld>
@@ -8868,7 +9153,7 @@
           <p:cNvPr id="2" name="Title 1">
             <a:extLst>
               <a:ext uri="{FF2B5EF4-FFF2-40B4-BE49-F238E27FC236}">
-                <a16:creationId xmlns:a16="http://schemas.microsoft.com/office/drawing/2014/main" id="{48BD755F-309C-592A-6317-A3E277609616}"/>
+                <a16:creationId xmlns:a16="http://schemas.microsoft.com/office/drawing/2014/main" id="{FA0FE729-354A-F490-7806-3F9A90D45325}"/>
               </a:ext>
             </a:extLst>
           </p:cNvPr>
@@ -8879,19 +9164,14 @@
             <p:ph type="title"/>
           </p:nvPr>
         </p:nvSpPr>
-        <p:spPr>
-          <a:xfrm>
-            <a:off x="381167" y="332656"/>
-            <a:ext cx="8375650" cy="423862"/>
-          </a:xfrm>
-        </p:spPr>
+        <p:spPr/>
         <p:txBody>
           <a:bodyPr/>
           <a:lstStyle/>
           <a:p>
             <a:r>
               <a:rPr lang="en-US" dirty="0"/>
-              <a:t>Main-effects vs interaction: effectively tied on this dataset</a:t>
+              <a:t>From likelihood to AIC: scoring models</a:t>
             </a:r>
           </a:p>
         </p:txBody>
@@ -8901,7 +9181,7 @@
           <p:cNvPr id="3" name="Content Placeholder 2">
             <a:extLst>
               <a:ext uri="{FF2B5EF4-FFF2-40B4-BE49-F238E27FC236}">
-                <a16:creationId xmlns:a16="http://schemas.microsoft.com/office/drawing/2014/main" id="{B42A9853-A4C2-E090-C97F-8D56594AE56A}"/>
+                <a16:creationId xmlns:a16="http://schemas.microsoft.com/office/drawing/2014/main" id="{A8AB0891-B856-1C5F-EE0A-63EE524BC82C}"/>
               </a:ext>
             </a:extLst>
           </p:cNvPr>
@@ -8919,45 +9199,53 @@
           <a:p>
             <a:r>
               <a:rPr lang="en-US" dirty="0"/>
-              <a:t>Comparison	Mean </a:t>
-            </a:r>
-            <a:r>
-              <a:rPr lang="el-GR" dirty="0"/>
-              <a:t>Δ</a:t>
-            </a:r>
-            <a:r>
-              <a:rPr lang="en-US" dirty="0"/>
-              <a:t>AIC [95% CI]</a:t>
-            </a:r>
-          </a:p>
-          <a:p>
-            <a:r>
-              <a:rPr lang="en-US" dirty="0"/>
-              <a:t>Emotion-only minus EEG main-effects	: 2.22 [1.17, 3.27]</a:t>
-            </a:r>
-          </a:p>
-          <a:p>
-            <a:r>
-              <a:rPr lang="en-US" dirty="0"/>
-              <a:t>Emotion-only minus EEG interaction:	2.73 [1.56, 3.89]</a:t>
-            </a:r>
-          </a:p>
-          <a:p>
-            <a:r>
-              <a:rPr lang="en-US" dirty="0"/>
-              <a:t>EEG main-effects minus EEG interaction:  0.51 [-0.43, 1.44]</a:t>
-            </a:r>
-          </a:p>
-          <a:p>
-            <a:endParaRPr lang="en-US" dirty="0"/>
-          </a:p>
-          <a:p>
-            <a:pPr marL="0" indent="0">
-              <a:buNone/>
-            </a:pPr>
-            <a:r>
-              <a:rPr lang="en-US" dirty="0"/>
-              <a:t>Point plot? </a:t>
+              <a:t>Set-based log likelihood per subject and model -&gt; </a:t>
+            </a:r>
+            <a:r>
+              <a:rPr lang="en-US" dirty="0" err="1"/>
+              <a:t>AIC</a:t>
+            </a:r>
+            <a:r>
+              <a:rPr lang="en-US" baseline="-25000" dirty="0" err="1"/>
+              <a:t>s,m</a:t>
+            </a:r>
+            <a:endParaRPr lang="en-US" baseline="-25000" dirty="0"/>
+          </a:p>
+          <a:p>
+            <a:r>
+              <a:rPr lang="en-US" dirty="0" err="1"/>
+              <a:t>AIC</a:t>
+            </a:r>
+            <a:r>
+              <a:rPr lang="en-US" baseline="-25000" dirty="0" err="1"/>
+              <a:t>s,m</a:t>
+            </a:r>
+            <a:r>
+              <a:rPr lang="en-US" dirty="0"/>
+              <a:t> = 2 * k</a:t>
+            </a:r>
+            <a:r>
+              <a:rPr lang="en-US" baseline="-25000" dirty="0"/>
+              <a:t>m</a:t>
+            </a:r>
+            <a:r>
+              <a:rPr lang="en-US" dirty="0"/>
+              <a:t> - 2 * </a:t>
+            </a:r>
+            <a:r>
+              <a:rPr lang="en-US" dirty="0" err="1"/>
+              <a:t>logL</a:t>
+            </a:r>
+            <a:r>
+              <a:rPr lang="en-US" baseline="-25000" dirty="0" err="1"/>
+              <a:t>s,m</a:t>
+            </a:r>
+            <a:endParaRPr lang="en-US" baseline="-25000" dirty="0"/>
+          </a:p>
+          <a:p>
+            <a:r>
+              <a:rPr lang="en-US" dirty="0"/>
+              <a:t>Lower AIC ~ better expected predictive performance for that subject (fit - complexity penalty).</a:t>
             </a:r>
           </a:p>
           <a:p>
@@ -8968,7 +9256,7 @@
     </p:spTree>
     <p:extLst>
       <p:ext uri="{BB962C8B-B14F-4D97-AF65-F5344CB8AC3E}">
-        <p14:creationId xmlns:p14="http://schemas.microsoft.com/office/powerpoint/2010/main" val="1835109715"/>
+        <p14:creationId xmlns:p14="http://schemas.microsoft.com/office/powerpoint/2010/main" val="3073377082"/>
       </p:ext>
     </p:extLst>
   </p:cSld>
@@ -9000,7 +9288,7 @@
           <p:cNvPr id="2" name="Title 1">
             <a:extLst>
               <a:ext uri="{FF2B5EF4-FFF2-40B4-BE49-F238E27FC236}">
-                <a16:creationId xmlns:a16="http://schemas.microsoft.com/office/drawing/2014/main" id="{EA3A6BCC-B5DA-0EAF-F690-399ABCC314EA}"/>
+                <a16:creationId xmlns:a16="http://schemas.microsoft.com/office/drawing/2014/main" id="{48BD755F-309C-592A-6317-A3E277609616}"/>
               </a:ext>
             </a:extLst>
           </p:cNvPr>
@@ -9011,14 +9299,19 @@
             <p:ph type="title"/>
           </p:nvPr>
         </p:nvSpPr>
-        <p:spPr/>
+        <p:spPr>
+          <a:xfrm>
+            <a:off x="381167" y="332656"/>
+            <a:ext cx="8375650" cy="423862"/>
+          </a:xfrm>
+        </p:spPr>
         <p:txBody>
           <a:bodyPr/>
           <a:lstStyle/>
           <a:p>
             <a:r>
               <a:rPr lang="en-US" dirty="0"/>
-              <a:t>What modelling bought us (and what it didn’t)</a:t>
+              <a:t>Main-effects vs interaction: effectively tied on this dataset</a:t>
             </a:r>
           </a:p>
         </p:txBody>
@@ -9028,7 +9321,7 @@
           <p:cNvPr id="3" name="Content Placeholder 2">
             <a:extLst>
               <a:ext uri="{FF2B5EF4-FFF2-40B4-BE49-F238E27FC236}">
-                <a16:creationId xmlns:a16="http://schemas.microsoft.com/office/drawing/2014/main" id="{9B771251-185C-D710-D7A2-38B7C8C3122F}"/>
+                <a16:creationId xmlns:a16="http://schemas.microsoft.com/office/drawing/2014/main" id="{B42A9853-A4C2-E090-C97F-8D56594AE56A}"/>
               </a:ext>
             </a:extLst>
           </p:cNvPr>
@@ -9039,76 +9332,63 @@
             <p:ph idx="1"/>
           </p:nvPr>
         </p:nvSpPr>
-        <p:spPr>
-          <a:xfrm>
-            <a:off x="362042" y="1395412"/>
-            <a:ext cx="8374063" cy="4067175"/>
-          </a:xfrm>
-        </p:spPr>
+        <p:spPr/>
         <p:txBody>
           <a:bodyPr/>
           <a:lstStyle/>
           <a:p>
             <a:r>
-              <a:rPr lang="en-US" sz="1600" b="1" dirty="0"/>
-              <a:t>Why cognitive models vs stats?</a:t>
-            </a:r>
-            <a:br>
-              <a:rPr lang="en-US" sz="1600" dirty="0"/>
-            </a:br>
-            <a:r>
-              <a:rPr lang="en-US" sz="1600" dirty="0"/>
-              <a:t>The GLMM told us there is an Emotion x LPP interaction in recall; the models showed that an emotion-only process is inadequate, but also that multiple process-level stories are consistent with that interaction.</a:t>
-            </a:r>
-          </a:p>
-          <a:p>
-            <a:r>
-              <a:rPr lang="en-US" sz="1600" b="1" dirty="0"/>
-              <a:t>What does likelihood-based fitting mean and why bother?</a:t>
-            </a:r>
-            <a:br>
-              <a:rPr lang="en-US" sz="1600" b="1" dirty="0"/>
-            </a:br>
-            <a:r>
-              <a:rPr lang="en-US" sz="1600" dirty="0"/>
-              <a:t>We used a set-based likelihood over recall sets to evaluate models on the full trial-level pattern, then converted that into AIC scores per subject that balance fit and complexity.</a:t>
-            </a:r>
-          </a:p>
-          <a:p>
-            <a:r>
-              <a:rPr lang="en-US" sz="1600" b="1" dirty="0"/>
-              <a:t>How did we choose models?</a:t>
-            </a:r>
-            <a:br>
-              <a:rPr lang="en-US" sz="1600" dirty="0"/>
-            </a:br>
-            <a:r>
-              <a:rPr lang="en-US" sz="1600" dirty="0"/>
-              <a:t>We built an emotion-only baseline and two EEG-aware models that differed only in where they put the LPP x emotion structure: additive encoding plus competition versus explicit encoding interaction.</a:t>
-            </a:r>
-          </a:p>
-          <a:p>
-            <a:r>
-              <a:rPr lang="en-US" sz="1600" b="1" dirty="0"/>
-              <a:t>How did we compare them and what did we learn?</a:t>
-            </a:r>
-            <a:br>
-              <a:rPr lang="en-US" sz="1600" dirty="0"/>
-            </a:br>
-            <a:r>
-              <a:rPr lang="en-US" sz="1600" dirty="0"/>
-              <a:t>AIC differences showed that adding EEG clearly improves the model over emotion-only, and that within the EEG models the extra interaction term does not buy enough improvement to be clearly preferred; that aspect remains underdetermined by these data.</a:t>
-            </a:r>
-          </a:p>
-          <a:p>
-            <a:endParaRPr lang="en-US" sz="1600" dirty="0"/>
+              <a:rPr lang="en-US" dirty="0"/>
+              <a:t>Comparison	Mean </a:t>
+            </a:r>
+            <a:r>
+              <a:rPr lang="el-GR" dirty="0"/>
+              <a:t>Δ</a:t>
+            </a:r>
+            <a:r>
+              <a:rPr lang="en-US" dirty="0"/>
+              <a:t>AIC [95% CI]</a:t>
+            </a:r>
+          </a:p>
+          <a:p>
+            <a:r>
+              <a:rPr lang="en-US" dirty="0"/>
+              <a:t>Emotion-only minus EEG main-effects	: 2.22 [1.17, 3.27]</a:t>
+            </a:r>
+          </a:p>
+          <a:p>
+            <a:r>
+              <a:rPr lang="en-US" dirty="0"/>
+              <a:t>Emotion-only minus EEG interaction:	2.73 [1.56, 3.89]</a:t>
+            </a:r>
+          </a:p>
+          <a:p>
+            <a:r>
+              <a:rPr lang="en-US" dirty="0"/>
+              <a:t>EEG main-effects minus EEG interaction:  0.51 [-0.43, 1.44]</a:t>
+            </a:r>
+          </a:p>
+          <a:p>
+            <a:endParaRPr lang="en-US" dirty="0"/>
+          </a:p>
+          <a:p>
+            <a:pPr marL="0" indent="0">
+              <a:buNone/>
+            </a:pPr>
+            <a:r>
+              <a:rPr lang="en-US" dirty="0"/>
+              <a:t>Point plot? </a:t>
+            </a:r>
+          </a:p>
+          <a:p>
+            <a:endParaRPr lang="en-US" dirty="0"/>
           </a:p>
         </p:txBody>
       </p:sp>
     </p:spTree>
     <p:extLst>
       <p:ext uri="{BB962C8B-B14F-4D97-AF65-F5344CB8AC3E}">
-        <p14:creationId xmlns:p14="http://schemas.microsoft.com/office/powerpoint/2010/main" val="1058899191"/>
+        <p14:creationId xmlns:p14="http://schemas.microsoft.com/office/powerpoint/2010/main" val="1835109715"/>
       </p:ext>
     </p:extLst>
   </p:cSld>
@@ -9137,15 +9417,15 @@
       </p:grpSpPr>
       <p:sp>
         <p:nvSpPr>
-          <p:cNvPr id="4098" name="Rectangle 4">
+          <p:cNvPr id="2" name="Title 1">
             <a:extLst>
               <a:ext uri="{FF2B5EF4-FFF2-40B4-BE49-F238E27FC236}">
-                <a16:creationId xmlns:a16="http://schemas.microsoft.com/office/drawing/2014/main" id="{BB2DE326-59F2-4945-9535-0AF48B41A394}"/>
+                <a16:creationId xmlns:a16="http://schemas.microsoft.com/office/drawing/2014/main" id="{EA3A6BCC-B5DA-0EAF-F690-399ABCC314EA}"/>
               </a:ext>
             </a:extLst>
           </p:cNvPr>
           <p:cNvSpPr>
-            <a:spLocks noGrp="1" noChangeArrowheads="1"/>
+            <a:spLocks noGrp="1"/>
           </p:cNvSpPr>
           <p:nvPr>
             <p:ph type="title"/>
@@ -9156,191 +9436,105 @@
           <a:bodyPr/>
           <a:lstStyle/>
           <a:p>
-            <a:pPr eaLnBrk="1" hangingPunct="1"/>
-            <a:r>
-              <a:rPr lang="en-US" altLang="en-US" dirty="0"/>
-              <a:t>Thanks!!</a:t>
-            </a:r>
-          </a:p>
-        </p:txBody>
-      </p:sp>
-      <p:sp>
-        <p:nvSpPr>
-          <p:cNvPr id="4099" name="Rectangle 5">
+            <a:r>
+              <a:rPr lang="en-US" dirty="0"/>
+              <a:t>What modelling bought us (and what it didn’t)</a:t>
+            </a:r>
+          </a:p>
+        </p:txBody>
+      </p:sp>
+      <p:sp>
+        <p:nvSpPr>
+          <p:cNvPr id="3" name="Content Placeholder 2">
             <a:extLst>
               <a:ext uri="{FF2B5EF4-FFF2-40B4-BE49-F238E27FC236}">
-                <a16:creationId xmlns:a16="http://schemas.microsoft.com/office/drawing/2014/main" id="{A869C384-EAEC-447D-BE1A-AEAD569499E4}"/>
+                <a16:creationId xmlns:a16="http://schemas.microsoft.com/office/drawing/2014/main" id="{9B771251-185C-D710-D7A2-38B7C8C3122F}"/>
               </a:ext>
             </a:extLst>
           </p:cNvPr>
           <p:cNvSpPr>
-            <a:spLocks noGrp="1" noChangeArrowheads="1"/>
+            <a:spLocks noGrp="1"/>
           </p:cNvSpPr>
           <p:nvPr>
             <p:ph idx="1"/>
           </p:nvPr>
         </p:nvSpPr>
-        <p:spPr/>
+        <p:spPr>
+          <a:xfrm>
+            <a:off x="362042" y="1395412"/>
+            <a:ext cx="8374063" cy="4067175"/>
+          </a:xfrm>
+        </p:spPr>
         <p:txBody>
           <a:bodyPr/>
           <a:lstStyle/>
           <a:p>
-            <a:pPr eaLnBrk="1" hangingPunct="1"/>
-            <a:r>
-              <a:rPr lang="en-GB" kern="1200" dirty="0">
-                <a:solidFill>
-                  <a:srgbClr val="050808"/>
-                </a:solidFill>
-                <a:latin typeface="Arial" charset="0"/>
-              </a:rPr>
-              <a:t>Robin Hellerstedt, </a:t>
-            </a:r>
-            <a:r>
-              <a:rPr lang="en-US" dirty="0">
-                <a:solidFill>
-                  <a:srgbClr val="050808"/>
-                </a:solidFill>
-              </a:rPr>
-              <a:t>Universidad </a:t>
-            </a:r>
-            <a:r>
-              <a:rPr lang="en-US" dirty="0" err="1">
-                <a:solidFill>
-                  <a:srgbClr val="050808"/>
-                </a:solidFill>
-              </a:rPr>
-              <a:t>Politecnica</a:t>
-            </a:r>
-            <a:r>
-              <a:rPr lang="en-US" dirty="0">
-                <a:solidFill>
-                  <a:srgbClr val="050808"/>
-                </a:solidFill>
-              </a:rPr>
-              <a:t> de Madrid</a:t>
-            </a:r>
-            <a:endParaRPr lang="en-US" altLang="en-US" dirty="0">
-              <a:solidFill>
-                <a:srgbClr val="050808"/>
-              </a:solidFill>
-            </a:endParaRPr>
-          </a:p>
-          <a:p>
-            <a:pPr eaLnBrk="1" hangingPunct="1"/>
-            <a:r>
-              <a:rPr lang="en-US" altLang="en-US" dirty="0">
-                <a:solidFill>
-                  <a:srgbClr val="050808"/>
-                </a:solidFill>
-              </a:rPr>
-              <a:t>Vanessa Zarubin, Northwestern University</a:t>
-            </a:r>
-          </a:p>
-          <a:p>
-            <a:pPr eaLnBrk="1" hangingPunct="1"/>
-            <a:r>
-              <a:rPr lang="en-US" altLang="en-US" dirty="0">
-                <a:solidFill>
-                  <a:srgbClr val="050808"/>
-                </a:solidFill>
-              </a:rPr>
-              <a:t>Katherine R. </a:t>
-            </a:r>
-            <a:r>
-              <a:rPr lang="en-US" altLang="en-US" dirty="0" err="1">
-                <a:solidFill>
-                  <a:srgbClr val="050808"/>
-                </a:solidFill>
-              </a:rPr>
-              <a:t>Mickley</a:t>
-            </a:r>
-            <a:r>
-              <a:rPr lang="en-US" altLang="en-US" dirty="0">
-                <a:solidFill>
-                  <a:srgbClr val="050808"/>
-                </a:solidFill>
-              </a:rPr>
-              <a:t> Steinmetz, Wofford College</a:t>
-            </a:r>
-          </a:p>
-          <a:p>
-            <a:pPr eaLnBrk="1" hangingPunct="1"/>
-            <a:r>
-              <a:rPr lang="en-US" altLang="en-US" dirty="0">
-                <a:solidFill>
-                  <a:srgbClr val="050808"/>
-                </a:solidFill>
-              </a:rPr>
-              <a:t>Nathaniel D. </a:t>
-            </a:r>
-            <a:r>
-              <a:rPr lang="en-US" altLang="en-US" dirty="0" err="1">
-                <a:solidFill>
-                  <a:srgbClr val="050808"/>
-                </a:solidFill>
-              </a:rPr>
-              <a:t>Daw</a:t>
-            </a:r>
-            <a:r>
-              <a:rPr lang="en-US" altLang="en-US" dirty="0">
-                <a:solidFill>
-                  <a:srgbClr val="050808"/>
-                </a:solidFill>
-              </a:rPr>
-              <a:t>, Princeton University</a:t>
-            </a:r>
-          </a:p>
-          <a:p>
-            <a:pPr eaLnBrk="1" hangingPunct="1"/>
-            <a:r>
-              <a:rPr lang="en-US" altLang="en-US" dirty="0">
-                <a:solidFill>
-                  <a:srgbClr val="050808"/>
-                </a:solidFill>
-              </a:rPr>
-              <a:t>Deborah </a:t>
-            </a:r>
-            <a:r>
-              <a:rPr lang="en-US" altLang="en-US" dirty="0" err="1">
-                <a:solidFill>
-                  <a:srgbClr val="050808"/>
-                </a:solidFill>
-              </a:rPr>
-              <a:t>Talmi</a:t>
-            </a:r>
-            <a:r>
-              <a:rPr lang="en-US" altLang="en-US" dirty="0">
-                <a:solidFill>
-                  <a:srgbClr val="050808"/>
-                </a:solidFill>
-              </a:rPr>
-              <a:t>, University of Cambridge</a:t>
-            </a:r>
-          </a:p>
-          <a:p>
-            <a:pPr eaLnBrk="1" hangingPunct="1"/>
-            <a:endParaRPr lang="en-US" altLang="en-US" dirty="0"/>
+            <a:r>
+              <a:rPr lang="en-US" sz="1600" b="1" dirty="0"/>
+              <a:t>Why cognitive models vs stats?</a:t>
+            </a:r>
+            <a:br>
+              <a:rPr lang="en-US" sz="1600" dirty="0"/>
+            </a:br>
+            <a:r>
+              <a:rPr lang="en-US" sz="1600" dirty="0"/>
+              <a:t>The GLMM told us there is an Emotion x LPP interaction in recall; the models showed that an emotion-only process is inadequate, but also that multiple process-level stories are consistent with that interaction.</a:t>
+            </a:r>
+          </a:p>
+          <a:p>
+            <a:r>
+              <a:rPr lang="en-US" sz="1600" b="1" dirty="0"/>
+              <a:t>What does likelihood-based fitting mean and why bother?</a:t>
+            </a:r>
+            <a:br>
+              <a:rPr lang="en-US" sz="1600" b="1" dirty="0"/>
+            </a:br>
+            <a:r>
+              <a:rPr lang="en-US" sz="1600" dirty="0"/>
+              <a:t>We used a set-based likelihood over recall sets to evaluate models on the full trial-level pattern, then converted that into AIC scores per subject that balance fit and complexity.</a:t>
+            </a:r>
+          </a:p>
+          <a:p>
+            <a:r>
+              <a:rPr lang="en-US" sz="1600" b="1" dirty="0"/>
+              <a:t>How did we choose models?</a:t>
+            </a:r>
+            <a:br>
+              <a:rPr lang="en-US" sz="1600" dirty="0"/>
+            </a:br>
+            <a:r>
+              <a:rPr lang="en-US" sz="1600" dirty="0"/>
+              <a:t>We built an emotion-only baseline and two EEG-aware models that differed only in where they put the LPP x emotion structure: additive encoding plus competition versus explicit encoding interaction.</a:t>
+            </a:r>
+          </a:p>
+          <a:p>
+            <a:r>
+              <a:rPr lang="en-US" sz="1600" b="1" dirty="0"/>
+              <a:t>How did we compare them and what did we learn?</a:t>
+            </a:r>
+            <a:br>
+              <a:rPr lang="en-US" sz="1600" dirty="0"/>
+            </a:br>
+            <a:r>
+              <a:rPr lang="en-US" sz="1600" dirty="0"/>
+              <a:t>AIC differences showed that adding EEG clearly improves the model over emotion-only, and that within the EEG models the extra interaction term does not buy enough improvement to be clearly preferred; that aspect remains underdetermined by these data.</a:t>
+            </a:r>
+          </a:p>
+          <a:p>
+            <a:endParaRPr lang="en-US" sz="1600" dirty="0"/>
           </a:p>
         </p:txBody>
       </p:sp>
     </p:spTree>
     <p:extLst>
       <p:ext uri="{BB962C8B-B14F-4D97-AF65-F5344CB8AC3E}">
-        <p14:creationId xmlns:p14="http://schemas.microsoft.com/office/powerpoint/2010/main" val="3081911339"/>
+        <p14:creationId xmlns:p14="http://schemas.microsoft.com/office/powerpoint/2010/main" val="1058899191"/>
       </p:ext>
     </p:extLst>
   </p:cSld>
   <p:clrMapOvr>
     <a:masterClrMapping/>
   </p:clrMapOvr>
-  <mc:AlternateContent xmlns:mc="http://schemas.openxmlformats.org/markup-compatibility/2006" xmlns:p14="http://schemas.microsoft.com/office/powerpoint/2010/main">
-    <mc:Choice Requires="p14">
-      <p:transition spd="slow" p14:dur="2000" advTm="12112"/>
-    </mc:Choice>
-    <mc:Fallback xmlns="">
-      <p:transition spd="slow" advTm="12112"/>
-    </mc:Fallback>
-  </mc:AlternateContent>
 </p:sld>
 </file>
 
@@ -9506,6 +9700,232 @@
   <p:clrMapOvr>
     <a:masterClrMapping/>
   </p:clrMapOvr>
+</p:sld>
+</file>
+
+<file path=ppt/slides/slide20.xml><?xml version="1.0" encoding="utf-8"?>
+<p:sld xmlns:a="http://schemas.openxmlformats.org/drawingml/2006/main" xmlns:r="http://schemas.openxmlformats.org/officeDocument/2006/relationships" xmlns:p="http://schemas.openxmlformats.org/presentationml/2006/main">
+  <p:cSld>
+    <p:spTree>
+      <p:nvGrpSpPr>
+        <p:cNvPr id="1" name=""/>
+        <p:cNvGrpSpPr/>
+        <p:nvPr/>
+      </p:nvGrpSpPr>
+      <p:grpSpPr>
+        <a:xfrm>
+          <a:off x="0" y="0"/>
+          <a:ext cx="0" cy="0"/>
+          <a:chOff x="0" y="0"/>
+          <a:chExt cx="0" cy="0"/>
+        </a:xfrm>
+      </p:grpSpPr>
+      <p:sp>
+        <p:nvSpPr>
+          <p:cNvPr id="4098" name="Rectangle 4">
+            <a:extLst>
+              <a:ext uri="{FF2B5EF4-FFF2-40B4-BE49-F238E27FC236}">
+                <a16:creationId xmlns:a16="http://schemas.microsoft.com/office/drawing/2014/main" id="{BB2DE326-59F2-4945-9535-0AF48B41A394}"/>
+              </a:ext>
+            </a:extLst>
+          </p:cNvPr>
+          <p:cNvSpPr>
+            <a:spLocks noGrp="1" noChangeArrowheads="1"/>
+          </p:cNvSpPr>
+          <p:nvPr>
+            <p:ph type="title"/>
+          </p:nvPr>
+        </p:nvSpPr>
+        <p:spPr/>
+        <p:txBody>
+          <a:bodyPr/>
+          <a:lstStyle/>
+          <a:p>
+            <a:pPr eaLnBrk="1" hangingPunct="1"/>
+            <a:r>
+              <a:rPr lang="en-US" altLang="en-US" dirty="0"/>
+              <a:t>Thanks!!</a:t>
+            </a:r>
+          </a:p>
+        </p:txBody>
+      </p:sp>
+      <p:sp>
+        <p:nvSpPr>
+          <p:cNvPr id="4099" name="Rectangle 5">
+            <a:extLst>
+              <a:ext uri="{FF2B5EF4-FFF2-40B4-BE49-F238E27FC236}">
+                <a16:creationId xmlns:a16="http://schemas.microsoft.com/office/drawing/2014/main" id="{A869C384-EAEC-447D-BE1A-AEAD569499E4}"/>
+              </a:ext>
+            </a:extLst>
+          </p:cNvPr>
+          <p:cNvSpPr>
+            <a:spLocks noGrp="1" noChangeArrowheads="1"/>
+          </p:cNvSpPr>
+          <p:nvPr>
+            <p:ph idx="1"/>
+          </p:nvPr>
+        </p:nvSpPr>
+        <p:spPr/>
+        <p:txBody>
+          <a:bodyPr/>
+          <a:lstStyle/>
+          <a:p>
+            <a:pPr eaLnBrk="1" hangingPunct="1"/>
+            <a:r>
+              <a:rPr lang="en-GB" kern="1200" dirty="0">
+                <a:solidFill>
+                  <a:srgbClr val="050808"/>
+                </a:solidFill>
+                <a:latin typeface="Arial" charset="0"/>
+              </a:rPr>
+              <a:t>Robin Hellerstedt, </a:t>
+            </a:r>
+            <a:r>
+              <a:rPr lang="en-US" dirty="0">
+                <a:solidFill>
+                  <a:srgbClr val="050808"/>
+                </a:solidFill>
+              </a:rPr>
+              <a:t>Universidad </a:t>
+            </a:r>
+            <a:r>
+              <a:rPr lang="en-US" dirty="0" err="1">
+                <a:solidFill>
+                  <a:srgbClr val="050808"/>
+                </a:solidFill>
+              </a:rPr>
+              <a:t>Politecnica</a:t>
+            </a:r>
+            <a:r>
+              <a:rPr lang="en-US" dirty="0">
+                <a:solidFill>
+                  <a:srgbClr val="050808"/>
+                </a:solidFill>
+              </a:rPr>
+              <a:t> de Madrid</a:t>
+            </a:r>
+            <a:endParaRPr lang="en-US" altLang="en-US" dirty="0">
+              <a:solidFill>
+                <a:srgbClr val="050808"/>
+              </a:solidFill>
+            </a:endParaRPr>
+          </a:p>
+          <a:p>
+            <a:pPr eaLnBrk="1" hangingPunct="1"/>
+            <a:r>
+              <a:rPr lang="en-US" altLang="en-US" dirty="0">
+                <a:solidFill>
+                  <a:srgbClr val="050808"/>
+                </a:solidFill>
+              </a:rPr>
+              <a:t>Vanessa Zarubin, Northwestern University</a:t>
+            </a:r>
+          </a:p>
+          <a:p>
+            <a:pPr eaLnBrk="1" hangingPunct="1"/>
+            <a:r>
+              <a:rPr lang="en-US" altLang="en-US" dirty="0">
+                <a:solidFill>
+                  <a:srgbClr val="050808"/>
+                </a:solidFill>
+              </a:rPr>
+              <a:t>Katherine R. </a:t>
+            </a:r>
+            <a:r>
+              <a:rPr lang="en-US" altLang="en-US" dirty="0" err="1">
+                <a:solidFill>
+                  <a:srgbClr val="050808"/>
+                </a:solidFill>
+              </a:rPr>
+              <a:t>Mickley</a:t>
+            </a:r>
+            <a:r>
+              <a:rPr lang="en-US" altLang="en-US" dirty="0">
+                <a:solidFill>
+                  <a:srgbClr val="050808"/>
+                </a:solidFill>
+              </a:rPr>
+              <a:t> Steinmetz, Wofford College</a:t>
+            </a:r>
+          </a:p>
+          <a:p>
+            <a:pPr eaLnBrk="1" hangingPunct="1"/>
+            <a:r>
+              <a:rPr lang="en-US" altLang="en-US" dirty="0">
+                <a:solidFill>
+                  <a:srgbClr val="050808"/>
+                </a:solidFill>
+              </a:rPr>
+              <a:t>Nathaniel D. </a:t>
+            </a:r>
+            <a:r>
+              <a:rPr lang="en-US" altLang="en-US" dirty="0" err="1">
+                <a:solidFill>
+                  <a:srgbClr val="050808"/>
+                </a:solidFill>
+              </a:rPr>
+              <a:t>Daw</a:t>
+            </a:r>
+            <a:r>
+              <a:rPr lang="en-US" altLang="en-US" dirty="0">
+                <a:solidFill>
+                  <a:srgbClr val="050808"/>
+                </a:solidFill>
+              </a:rPr>
+              <a:t>, Princeton University</a:t>
+            </a:r>
+          </a:p>
+          <a:p>
+            <a:pPr eaLnBrk="1" hangingPunct="1"/>
+            <a:r>
+              <a:rPr lang="en-US" altLang="en-US" dirty="0">
+                <a:solidFill>
+                  <a:srgbClr val="050808"/>
+                </a:solidFill>
+              </a:rPr>
+              <a:t>Deborah </a:t>
+            </a:r>
+            <a:r>
+              <a:rPr lang="en-US" altLang="en-US" dirty="0" err="1">
+                <a:solidFill>
+                  <a:srgbClr val="050808"/>
+                </a:solidFill>
+              </a:rPr>
+              <a:t>Talmi</a:t>
+            </a:r>
+            <a:r>
+              <a:rPr lang="en-US" altLang="en-US" dirty="0">
+                <a:solidFill>
+                  <a:srgbClr val="050808"/>
+                </a:solidFill>
+              </a:rPr>
+              <a:t>, University of Cambridge</a:t>
+            </a:r>
+          </a:p>
+          <a:p>
+            <a:pPr eaLnBrk="1" hangingPunct="1"/>
+            <a:endParaRPr lang="en-US" altLang="en-US" dirty="0"/>
+          </a:p>
+        </p:txBody>
+      </p:sp>
+    </p:spTree>
+    <p:extLst>
+      <p:ext uri="{BB962C8B-B14F-4D97-AF65-F5344CB8AC3E}">
+        <p14:creationId xmlns:p14="http://schemas.microsoft.com/office/powerpoint/2010/main" val="3081911339"/>
+      </p:ext>
+    </p:extLst>
+  </p:cSld>
+  <p:clrMapOvr>
+    <a:masterClrMapping/>
+  </p:clrMapOvr>
+  <mc:AlternateContent xmlns:mc="http://schemas.openxmlformats.org/markup-compatibility/2006" xmlns:p14="http://schemas.microsoft.com/office/powerpoint/2010/main">
+    <mc:Choice Requires="p14">
+      <p:transition spd="slow" p14:dur="2000" advTm="12112"/>
+    </mc:Choice>
+    <mc:Fallback xmlns="">
+      <p:transition spd="slow" advTm="12112"/>
+    </mc:Fallback>
+  </mc:AlternateContent>
 </p:sld>
 </file>
 
@@ -10404,6 +10824,165 @@
   <p:cSld>
     <p:spTree>
       <p:nvGrpSpPr>
+        <p:cNvPr id="1" name="">
+          <a:extLst>
+            <a:ext uri="{FF2B5EF4-FFF2-40B4-BE49-F238E27FC236}">
+              <a16:creationId xmlns:a16="http://schemas.microsoft.com/office/drawing/2014/main" id="{E9F97CF0-ECC8-77CB-BB59-01F824EC9822}"/>
+            </a:ext>
+          </a:extLst>
+        </p:cNvPr>
+        <p:cNvGrpSpPr/>
+        <p:nvPr/>
+      </p:nvGrpSpPr>
+      <p:grpSpPr>
+        <a:xfrm>
+          <a:off x="0" y="0"/>
+          <a:ext cx="0" cy="0"/>
+          <a:chOff x="0" y="0"/>
+          <a:chExt cx="0" cy="0"/>
+        </a:xfrm>
+      </p:grpSpPr>
+      <p:sp>
+        <p:nvSpPr>
+          <p:cNvPr id="2" name="Title 1">
+            <a:extLst>
+              <a:ext uri="{FF2B5EF4-FFF2-40B4-BE49-F238E27FC236}">
+                <a16:creationId xmlns:a16="http://schemas.microsoft.com/office/drawing/2014/main" id="{064FA92D-B59E-C463-8E9E-670E7A2D9836}"/>
+              </a:ext>
+            </a:extLst>
+          </p:cNvPr>
+          <p:cNvSpPr>
+            <a:spLocks noGrp="1"/>
+          </p:cNvSpPr>
+          <p:nvPr>
+            <p:ph type="title"/>
+          </p:nvPr>
+        </p:nvSpPr>
+        <p:spPr>
+          <a:xfrm>
+            <a:off x="382588" y="260648"/>
+            <a:ext cx="8375650" cy="423862"/>
+          </a:xfrm>
+        </p:spPr>
+        <p:txBody>
+          <a:bodyPr/>
+          <a:lstStyle/>
+          <a:p>
+            <a:r>
+              <a:rPr lang="en-US" dirty="0"/>
+              <a:t>Key Behavioral Result: </a:t>
+            </a:r>
+            <a:br>
+              <a:rPr lang="en-US" dirty="0"/>
+            </a:br>
+            <a:r>
+              <a:rPr lang="en-US" dirty="0"/>
+              <a:t>The Emotional Enhancement of LPP</a:t>
+            </a:r>
+          </a:p>
+        </p:txBody>
+      </p:sp>
+      <p:sp>
+        <p:nvSpPr>
+          <p:cNvPr id="3" name="Content Placeholder 2">
+            <a:extLst>
+              <a:ext uri="{FF2B5EF4-FFF2-40B4-BE49-F238E27FC236}">
+                <a16:creationId xmlns:a16="http://schemas.microsoft.com/office/drawing/2014/main" id="{B192B03C-E9D7-EA24-6887-DEDCFB54187F}"/>
+              </a:ext>
+            </a:extLst>
+          </p:cNvPr>
+          <p:cNvSpPr>
+            <a:spLocks noGrp="1"/>
+          </p:cNvSpPr>
+          <p:nvPr>
+            <p:ph idx="1"/>
+          </p:nvPr>
+        </p:nvSpPr>
+        <p:spPr>
+          <a:xfrm>
+            <a:off x="382588" y="2568575"/>
+            <a:ext cx="2232248" cy="1720850"/>
+          </a:xfrm>
+        </p:spPr>
+        <p:txBody>
+          <a:bodyPr/>
+          <a:lstStyle/>
+          <a:p>
+            <a:pPr marL="0" indent="0">
+              <a:buNone/>
+            </a:pPr>
+            <a:r>
+              <a:rPr lang="en-US" dirty="0"/>
+              <a:t>Negative items are recalled more often than neutral items across positions.</a:t>
+            </a:r>
+          </a:p>
+        </p:txBody>
+      </p:sp>
+      <p:pic>
+        <p:nvPicPr>
+          <p:cNvPr id="3074" name="Picture 2">
+            <a:extLst>
+              <a:ext uri="{FF2B5EF4-FFF2-40B4-BE49-F238E27FC236}">
+                <a16:creationId xmlns:a16="http://schemas.microsoft.com/office/drawing/2014/main" id="{218DA8AE-0C24-069C-84B8-54F6FE018FEC}"/>
+              </a:ext>
+            </a:extLst>
+          </p:cNvPr>
+          <p:cNvPicPr>
+            <a:picLocks noChangeAspect="1" noChangeArrowheads="1"/>
+          </p:cNvPicPr>
+          <p:nvPr/>
+        </p:nvPicPr>
+        <p:blipFill>
+          <a:blip r:embed="rId3">
+            <a:extLst>
+              <a:ext uri="{28A0092B-C50C-407E-A947-70E740481C1C}">
+                <a14:useLocalDpi xmlns:a14="http://schemas.microsoft.com/office/drawing/2010/main" val="0"/>
+              </a:ext>
+            </a:extLst>
+          </a:blip>
+          <a:srcRect/>
+          <a:stretch>
+            <a:fillRect/>
+          </a:stretch>
+        </p:blipFill>
+        <p:spPr bwMode="auto">
+          <a:xfrm>
+            <a:off x="2722346" y="1412776"/>
+            <a:ext cx="6119829" cy="4749849"/>
+          </a:xfrm>
+          <a:prstGeom prst="rect">
+            <a:avLst/>
+          </a:prstGeom>
+          <a:noFill/>
+          <a:extLst>
+            <a:ext uri="{909E8E84-426E-40DD-AFC4-6F175D3DCCD1}">
+              <a14:hiddenFill xmlns:a14="http://schemas.microsoft.com/office/drawing/2010/main">
+                <a:solidFill>
+                  <a:srgbClr val="FFFFFF"/>
+                </a:solidFill>
+              </a14:hiddenFill>
+            </a:ext>
+          </a:extLst>
+        </p:spPr>
+      </p:pic>
+    </p:spTree>
+    <p:extLst>
+      <p:ext uri="{BB962C8B-B14F-4D97-AF65-F5344CB8AC3E}">
+        <p14:creationId xmlns:p14="http://schemas.microsoft.com/office/powerpoint/2010/main" val="825638848"/>
+      </p:ext>
+    </p:extLst>
+  </p:cSld>
+  <p:clrMapOvr>
+    <a:masterClrMapping/>
+  </p:clrMapOvr>
+</p:sld>
+</file>
+
+<file path=ppt/slides/slide6.xml><?xml version="1.0" encoding="utf-8"?>
+<p:sld xmlns:a="http://schemas.openxmlformats.org/drawingml/2006/main" xmlns:r="http://schemas.openxmlformats.org/officeDocument/2006/relationships" xmlns:p="http://schemas.openxmlformats.org/presentationml/2006/main">
+  <p:cSld>
+    <p:spTree>
+      <p:nvGrpSpPr>
         <p:cNvPr id="1" name=""/>
         <p:cNvGrpSpPr/>
         <p:nvPr/>
@@ -10628,7 +11207,7 @@
 </p:sld>
 </file>
 
-<file path=ppt/slides/slide6.xml><?xml version="1.0" encoding="utf-8"?>
+<file path=ppt/slides/slide7.xml><?xml version="1.0" encoding="utf-8"?>
 <p:sld xmlns:a="http://schemas.openxmlformats.org/drawingml/2006/main" xmlns:r="http://schemas.openxmlformats.org/officeDocument/2006/relationships" xmlns:p="http://schemas.openxmlformats.org/presentationml/2006/main">
   <p:cSld>
     <p:spTree>
@@ -10715,7 +11294,14 @@
             <a:pPr algn="ctr"/>
             <a:r>
               <a:rPr lang="en-US" dirty="0"/>
-              <a:t>Early LPP by recall status and item type. CIs omitted for clarity; data pooled across participants.</a:t>
+              <a:t>Early LPP by recall status and item type. </a:t>
+            </a:r>
+          </a:p>
+          <a:p>
+            <a:pPr algn="ctr"/>
+            <a:r>
+              <a:rPr lang="en-US" dirty="0"/>
+              <a:t>CIs omitted for clarity; data pooled across participants.</a:t>
             </a:r>
             <a:endParaRPr lang="en-US" dirty="0">
               <a:solidFill>
@@ -10786,7 +11372,7 @@
 </p:sld>
 </file>
 
-<file path=ppt/slides/slide7.xml><?xml version="1.0" encoding="utf-8"?>
+<file path=ppt/slides/slide8.xml><?xml version="1.0" encoding="utf-8"?>
 <p:sld xmlns:a="http://schemas.openxmlformats.org/drawingml/2006/main" xmlns:r="http://schemas.openxmlformats.org/officeDocument/2006/relationships" xmlns:p="http://schemas.openxmlformats.org/presentationml/2006/main">
   <p:cSld>
     <p:spTree>
@@ -10876,7 +11462,7 @@
           <a:p>
             <a:pPr>
               <a:spcAft>
-                <a:spcPts val="0"/>
+                <a:spcPts val="600"/>
               </a:spcAft>
             </a:pPr>
             <a:r>
@@ -10968,7 +11554,7 @@
 </p:sld>
 </file>
 
-<file path=ppt/slides/slide8.xml><?xml version="1.0" encoding="utf-8"?>
+<file path=ppt/slides/slide9.xml><?xml version="1.0" encoding="utf-8"?>
 <p:sld xmlns:a="http://schemas.openxmlformats.org/drawingml/2006/main" xmlns:r="http://schemas.openxmlformats.org/officeDocument/2006/relationships" xmlns:p="http://schemas.openxmlformats.org/presentationml/2006/main">
   <p:cSld>
     <p:spTree>
@@ -11418,7 +12004,7 @@
         </p:nvSpPr>
         <p:spPr>
           <a:xfrm rot="10800000">
-            <a:off x="6012159" y="3626250"/>
+            <a:off x="5923895" y="3811038"/>
             <a:ext cx="2494938" cy="598989"/>
           </a:xfrm>
           <a:prstGeom prst="curvedUpArrow">
@@ -11466,7 +12052,7 @@
         </p:nvSpPr>
         <p:spPr>
           <a:xfrm>
-            <a:off x="6017764" y="4777491"/>
+            <a:off x="6052745" y="5071077"/>
             <a:ext cx="770081" cy="591207"/>
           </a:xfrm>
           <a:prstGeom prst="rightArrow">
@@ -11510,7 +12096,7 @@
         </p:nvSpPr>
         <p:spPr>
           <a:xfrm>
-            <a:off x="6264362" y="4842206"/>
+            <a:off x="6201436" y="5149138"/>
             <a:ext cx="472698" cy="400110"/>
           </a:xfrm>
           <a:prstGeom prst="rect">
@@ -11545,7 +12131,7 @@
         </p:nvSpPr>
         <p:spPr>
           <a:xfrm>
-            <a:off x="4355699" y="4036493"/>
+            <a:off x="4221074" y="4327647"/>
             <a:ext cx="3124610" cy="923330"/>
           </a:xfrm>
           <a:prstGeom prst="rect">
@@ -11705,295 +12291,37 @@
           </a:extLst>
         </p:spPr>
       </p:pic>
-    </p:spTree>
-    <p:extLst>
-      <p:ext uri="{BB962C8B-B14F-4D97-AF65-F5344CB8AC3E}">
-        <p14:creationId xmlns:p14="http://schemas.microsoft.com/office/powerpoint/2010/main" val="856096487"/>
-      </p:ext>
-    </p:extLst>
-  </p:cSld>
-  <p:clrMapOvr>
-    <a:masterClrMapping/>
-  </p:clrMapOvr>
-</p:sld>
-</file>
-
-<file path=ppt/slides/slide9.xml><?xml version="1.0" encoding="utf-8"?>
-<p:sld xmlns:a="http://schemas.openxmlformats.org/drawingml/2006/main" xmlns:r="http://schemas.openxmlformats.org/officeDocument/2006/relationships" xmlns:p="http://schemas.openxmlformats.org/presentationml/2006/main">
-  <p:cSld>
-    <p:spTree>
-      <p:nvGrpSpPr>
-        <p:cNvPr id="1" name=""/>
-        <p:cNvGrpSpPr/>
-        <p:nvPr/>
-      </p:nvGrpSpPr>
-      <p:grpSpPr>
-        <a:xfrm>
-          <a:off x="0" y="0"/>
-          <a:ext cx="0" cy="0"/>
-          <a:chOff x="0" y="0"/>
-          <a:chExt cx="0" cy="0"/>
-        </a:xfrm>
-      </p:grpSpPr>
-      <p:sp>
-        <p:nvSpPr>
-          <p:cNvPr id="7" name="Title 6">
+      <p:sp>
+        <p:nvSpPr>
+          <p:cNvPr id="2" name="TextBox 1">
             <a:extLst>
               <a:ext uri="{FF2B5EF4-FFF2-40B4-BE49-F238E27FC236}">
-                <a16:creationId xmlns:a16="http://schemas.microsoft.com/office/drawing/2014/main" id="{BB183D5A-9958-655B-9EBA-ACC2FAD2BAD2}"/>
+                <a16:creationId xmlns:a16="http://schemas.microsoft.com/office/drawing/2014/main" id="{8E0CAA63-5C42-F9F6-4547-E3FF1C3016B8}"/>
               </a:ext>
             </a:extLst>
           </p:cNvPr>
-          <p:cNvSpPr>
-            <a:spLocks noGrp="1"/>
-          </p:cNvSpPr>
-          <p:nvPr>
-            <p:ph type="title"/>
-          </p:nvPr>
+          <p:cNvSpPr txBox="1"/>
+          <p:nvPr/>
         </p:nvSpPr>
         <p:spPr>
           <a:xfrm>
-            <a:off x="251520" y="225904"/>
-            <a:ext cx="8375650" cy="423862"/>
-          </a:xfrm>
-        </p:spPr>
-        <p:txBody>
-          <a:bodyPr/>
-          <a:lstStyle/>
-          <a:p>
-            <a:r>
-              <a:rPr lang="en-US" dirty="0"/>
-              <a:t>Ideal likelihood if we had full recall sequences:</a:t>
-            </a:r>
-            <a:br>
-              <a:rPr lang="en-US" dirty="0"/>
-            </a:br>
-            <a:r>
-              <a:rPr lang="en-US" dirty="0"/>
-              <a:t>p(</a:t>
-            </a:r>
-            <a:r>
-              <a:rPr lang="en-US" dirty="0" err="1"/>
-              <a:t>sequence_t</a:t>
-            </a:r>
-            <a:r>
-              <a:rPr lang="en-US" dirty="0"/>
-              <a:t> | model, </a:t>
-            </a:r>
-            <a:r>
-              <a:rPr lang="el-GR" dirty="0"/>
-              <a:t>θ) </a:t>
-            </a:r>
-            <a:r>
-              <a:rPr lang="en-US" dirty="0"/>
-              <a:t>per trial.</a:t>
-            </a:r>
-          </a:p>
-        </p:txBody>
-      </p:sp>
-      <p:pic>
-        <p:nvPicPr>
-          <p:cNvPr id="10" name="Picture 9">
-            <a:extLst>
-              <a:ext uri="{FF2B5EF4-FFF2-40B4-BE49-F238E27FC236}">
-                <a16:creationId xmlns:a16="http://schemas.microsoft.com/office/drawing/2014/main" id="{56235337-7E3C-717E-6D32-1A0231F9045A}"/>
-              </a:ext>
-            </a:extLst>
-          </p:cNvPr>
-          <p:cNvPicPr>
-            <a:picLocks noChangeAspect="1"/>
-          </p:cNvPicPr>
-          <p:nvPr/>
-        </p:nvPicPr>
-        <p:blipFill>
-          <a:blip r:embed="rId3"/>
-          <a:stretch>
-            <a:fillRect/>
-          </a:stretch>
-        </p:blipFill>
-        <p:spPr>
-          <a:xfrm>
-            <a:off x="685800" y="1484784"/>
-            <a:ext cx="7772400" cy="4723450"/>
-          </a:xfrm>
-          <a:prstGeom prst="rect">
-            <a:avLst/>
-          </a:prstGeom>
-        </p:spPr>
-      </p:pic>
-      <p:sp>
-        <p:nvSpPr>
-          <p:cNvPr id="11" name="Rectangle 4">
-            <a:extLst>
-              <a:ext uri="{FF2B5EF4-FFF2-40B4-BE49-F238E27FC236}">
-                <a16:creationId xmlns:a16="http://schemas.microsoft.com/office/drawing/2014/main" id="{90867A8B-95A8-C57E-579E-5F5954FD2581}"/>
-              </a:ext>
-            </a:extLst>
-          </p:cNvPr>
-          <p:cNvSpPr>
-            <a:spLocks noChangeArrowheads="1"/>
-          </p:cNvSpPr>
-          <p:nvPr/>
-        </p:nvSpPr>
-        <p:spPr bwMode="auto">
-          <a:xfrm>
-            <a:off x="2195736" y="6267828"/>
-            <a:ext cx="8374063" cy="261937"/>
+            <a:off x="4775839" y="5660398"/>
+            <a:ext cx="774571" cy="369332"/>
           </a:xfrm>
           <a:prstGeom prst="rect">
             <a:avLst/>
           </a:prstGeom>
           <a:noFill/>
-          <a:ln>
-            <a:noFill/>
-          </a:ln>
-          <a:effectLst/>
-          <a:extLst>
-            <a:ext uri="{909E8E84-426E-40DD-AFC4-6F175D3DCCD1}">
-              <a14:hiddenFill xmlns:a14="http://schemas.microsoft.com/office/drawing/2010/main">
-                <a:solidFill>
-                  <a:schemeClr val="accent1"/>
-                </a:solidFill>
-              </a14:hiddenFill>
-            </a:ext>
-            <a:ext uri="{91240B29-F687-4F45-9708-019B960494DF}">
-              <a14:hiddenLine xmlns:a14="http://schemas.microsoft.com/office/drawing/2010/main" w="127">
-                <a:solidFill>
-                  <a:schemeClr val="tx1"/>
-                </a:solidFill>
-                <a:miter lim="800000"/>
-                <a:headEnd/>
-                <a:tailEnd/>
-              </a14:hiddenLine>
-            </a:ext>
-            <a:ext uri="{AF507438-7753-43E0-B8FC-AC1667EBCBE1}">
-              <a14:hiddenEffects xmlns:a14="http://schemas.microsoft.com/office/drawing/2010/main">
-                <a:effectLst>
-                  <a:outerShdw dist="35921" dir="2700000" algn="ctr" rotWithShape="0">
-                    <a:schemeClr val="bg2"/>
-                  </a:outerShdw>
-                </a:effectLst>
-              </a14:hiddenEffects>
-            </a:ext>
-          </a:extLst>
         </p:spPr>
         <p:txBody>
-          <a:bodyPr wrap="none" lIns="0" tIns="0" rIns="0" bIns="0"/>
-          <a:lstStyle>
-            <a:lvl1pPr eaLnBrk="0" hangingPunct="0">
-              <a:defRPr>
-                <a:solidFill>
-                  <a:schemeClr val="tx1"/>
-                </a:solidFill>
-                <a:latin typeface="Arial" panose="020B0604020202020204" pitchFamily="34" charset="0"/>
-              </a:defRPr>
-            </a:lvl1pPr>
-            <a:lvl2pPr marL="742950" indent="-285750" eaLnBrk="0" hangingPunct="0">
-              <a:defRPr>
-                <a:solidFill>
-                  <a:schemeClr val="tx1"/>
-                </a:solidFill>
-                <a:latin typeface="Arial" panose="020B0604020202020204" pitchFamily="34" charset="0"/>
-              </a:defRPr>
-            </a:lvl2pPr>
-            <a:lvl3pPr marL="1143000" indent="-228600" eaLnBrk="0" hangingPunct="0">
-              <a:defRPr>
-                <a:solidFill>
-                  <a:schemeClr val="tx1"/>
-                </a:solidFill>
-                <a:latin typeface="Arial" panose="020B0604020202020204" pitchFamily="34" charset="0"/>
-              </a:defRPr>
-            </a:lvl3pPr>
-            <a:lvl4pPr marL="1600200" indent="-228600" eaLnBrk="0" hangingPunct="0">
-              <a:defRPr>
-                <a:solidFill>
-                  <a:schemeClr val="tx1"/>
-                </a:solidFill>
-                <a:latin typeface="Arial" panose="020B0604020202020204" pitchFamily="34" charset="0"/>
-              </a:defRPr>
-            </a:lvl4pPr>
-            <a:lvl5pPr marL="2057400" indent="-228600" eaLnBrk="0" hangingPunct="0">
-              <a:defRPr>
-                <a:solidFill>
-                  <a:schemeClr val="tx1"/>
-                </a:solidFill>
-                <a:latin typeface="Arial" panose="020B0604020202020204" pitchFamily="34" charset="0"/>
-              </a:defRPr>
-            </a:lvl5pPr>
-            <a:lvl6pPr marL="2514600" indent="-228600" eaLnBrk="0" fontAlgn="base" hangingPunct="0">
-              <a:spcBef>
-                <a:spcPct val="0"/>
-              </a:spcBef>
-              <a:spcAft>
-                <a:spcPct val="0"/>
-              </a:spcAft>
-              <a:defRPr>
-                <a:solidFill>
-                  <a:schemeClr val="tx1"/>
-                </a:solidFill>
-                <a:latin typeface="Arial" panose="020B0604020202020204" pitchFamily="34" charset="0"/>
-              </a:defRPr>
-            </a:lvl6pPr>
-            <a:lvl7pPr marL="2971800" indent="-228600" eaLnBrk="0" fontAlgn="base" hangingPunct="0">
-              <a:spcBef>
-                <a:spcPct val="0"/>
-              </a:spcBef>
-              <a:spcAft>
-                <a:spcPct val="0"/>
-              </a:spcAft>
-              <a:defRPr>
-                <a:solidFill>
-                  <a:schemeClr val="tx1"/>
-                </a:solidFill>
-                <a:latin typeface="Arial" panose="020B0604020202020204" pitchFamily="34" charset="0"/>
-              </a:defRPr>
-            </a:lvl7pPr>
-            <a:lvl8pPr marL="3429000" indent="-228600" eaLnBrk="0" fontAlgn="base" hangingPunct="0">
-              <a:spcBef>
-                <a:spcPct val="0"/>
-              </a:spcBef>
-              <a:spcAft>
-                <a:spcPct val="0"/>
-              </a:spcAft>
-              <a:defRPr>
-                <a:solidFill>
-                  <a:schemeClr val="tx1"/>
-                </a:solidFill>
-                <a:latin typeface="Arial" panose="020B0604020202020204" pitchFamily="34" charset="0"/>
-              </a:defRPr>
-            </a:lvl8pPr>
-            <a:lvl9pPr marL="3886200" indent="-228600" eaLnBrk="0" fontAlgn="base" hangingPunct="0">
-              <a:spcBef>
-                <a:spcPct val="0"/>
-              </a:spcBef>
-              <a:spcAft>
-                <a:spcPct val="0"/>
-              </a:spcAft>
-              <a:defRPr>
-                <a:solidFill>
-                  <a:schemeClr val="tx1"/>
-                </a:solidFill>
-                <a:latin typeface="Arial" panose="020B0604020202020204" pitchFamily="34" charset="0"/>
-              </a:defRPr>
-            </a:lvl9pPr>
-          </a:lstStyle>
-          <a:p>
-            <a:pPr eaLnBrk="1" hangingPunct="1"/>
-            <a:r>
-              <a:rPr lang="en-GB" altLang="en-US" sz="1600" b="1" dirty="0">
-                <a:solidFill>
-                  <a:schemeClr val="tx2"/>
-                </a:solidFill>
-              </a:rPr>
-              <a:t>Morton &amp; Polyn, 2016. </a:t>
-            </a:r>
-            <a:r>
-              <a:rPr lang="en-GB" altLang="en-US" sz="1600" b="1" i="1" dirty="0">
-                <a:solidFill>
-                  <a:schemeClr val="tx2"/>
-                </a:solidFill>
-              </a:rPr>
-              <a:t>Journal of memory and language.</a:t>
+          <a:bodyPr wrap="none" rtlCol="0">
+            <a:spAutoFit/>
+          </a:bodyPr>
+          <a:lstStyle/>
+          <a:p>
+            <a:r>
+              <a:rPr lang="en-US" dirty="0"/>
+              <a:t>Study</a:t>
             </a:r>
           </a:p>
         </p:txBody>
@@ -12001,7 +12329,7 @@
     </p:spTree>
     <p:extLst>
       <p:ext uri="{BB962C8B-B14F-4D97-AF65-F5344CB8AC3E}">
-        <p14:creationId xmlns:p14="http://schemas.microsoft.com/office/powerpoint/2010/main" val="3416592595"/>
+        <p14:creationId xmlns:p14="http://schemas.microsoft.com/office/powerpoint/2010/main" val="856096487"/>
       </p:ext>
     </p:extLst>
   </p:cSld>

--- a/projects/TalmiEEG/slides.pptx
+++ b/projects/TalmiEEG/slides.pptx
@@ -5,10 +5,10 @@
     <p:sldMasterId id="2147483648" r:id="rId1"/>
   </p:sldMasterIdLst>
   <p:notesMasterIdLst>
-    <p:notesMasterId r:id="rId22"/>
+    <p:notesMasterId r:id="rId25"/>
   </p:notesMasterIdLst>
   <p:handoutMasterIdLst>
-    <p:handoutMasterId r:id="rId23"/>
+    <p:handoutMasterId r:id="rId26"/>
   </p:handoutMasterIdLst>
   <p:sldIdLst>
     <p:sldId id="256" r:id="rId2"/>
@@ -23,14 +23,17 @@
     <p:sldId id="279" r:id="rId11"/>
     <p:sldId id="280" r:id="rId12"/>
     <p:sldId id="281" r:id="rId13"/>
-    <p:sldId id="282" r:id="rId14"/>
-    <p:sldId id="283" r:id="rId15"/>
-    <p:sldId id="284" r:id="rId16"/>
-    <p:sldId id="285" r:id="rId17"/>
+    <p:sldId id="285" r:id="rId14"/>
+    <p:sldId id="290" r:id="rId15"/>
+    <p:sldId id="283" r:id="rId16"/>
+    <p:sldId id="284" r:id="rId17"/>
     <p:sldId id="286" r:id="rId18"/>
     <p:sldId id="288" r:id="rId19"/>
-    <p:sldId id="287" r:id="rId20"/>
-    <p:sldId id="265" r:id="rId21"/>
+    <p:sldId id="291" r:id="rId20"/>
+    <p:sldId id="292" r:id="rId21"/>
+    <p:sldId id="293" r:id="rId22"/>
+    <p:sldId id="287" r:id="rId23"/>
+    <p:sldId id="265" r:id="rId24"/>
   </p:sldIdLst>
   <p:sldSz cx="9144000" cy="6858000" type="screen4x3"/>
   <p:notesSz cx="6858000" cy="9144000"/>
@@ -1353,15 +1356,7 @@
           <a:p>
             <a:r>
               <a:rPr lang="en-US" dirty="0"/>
-              <a:t>Hi, my name is Jordan Gunn and I am a postdoc in Deborah Talmi's group in the Psych department who started here just this past September. This is a tutorial style talk about using cognitive models and likelihood to think about neural and </a:t>
-            </a:r>
-            <a:r>
-              <a:rPr lang="en-US" dirty="0" err="1"/>
-              <a:t>behaviour</a:t>
-            </a:r>
-            <a:r>
-              <a:rPr lang="en-US" dirty="0"/>
-              <a:t> relationships. From afar, cognitive modelling can look like an opaque, overcomplicated exercise in parameter tuning that somehow always fits everything but clarifies very little. When brain data enters the picture, it can be even harder to see how neural signals relate to the mechanisms in the model.</a:t>
+              <a:t>Hi, my name is Jordan Gunn and I am a postdoc in Deborah Talmi's group in the Psych department. This is a tutorial style talk about using cognitive models and likelihood to think about relationships between brain signals and behavior. </a:t>
             </a:r>
           </a:p>
           <a:p>
@@ -1370,7 +1365,16 @@
           <a:p>
             <a:r>
               <a:rPr lang="en-US" dirty="0"/>
-              <a:t>I want to use one concrete example to sketch a more constructive picture where cognitive models help clarify what our data can and cannot say about mechanisms, rather than adding an extra layer of obfuscation.</a:t>
+              <a:t>From a distance cognitive modeling can look like an elaborate parameter-tuning exercise that always seems to fit something. Adding brain data into the mix can make it even harder to tell whether a model is doing any explanatory work, or just putting a computational gloss on a story we already wanted to tell.</a:t>
+            </a:r>
+          </a:p>
+          <a:p>
+            <a:endParaRPr lang="en-US" dirty="0"/>
+          </a:p>
+          <a:p>
+            <a:r>
+              <a:rPr lang="en-US" dirty="0"/>
+              <a:t>Here, I want to use one concrete example to offer a more constructive view of models: as tools for clarifying and testing mechanistic ideas against data.</a:t>
             </a:r>
           </a:p>
         </p:txBody>
@@ -1549,7 +1553,7 @@
             </a:pPr>
             <a:r>
               <a:rPr lang="en-US" dirty="0"/>
-              <a:t>The question then becomes: how do we adapt the ideal sequence likelihood to this situation, where what we observe is just the set S sub t for each list?”</a:t>
+              <a:t>The question then becomes: how do we adapt the ideal sequence likelihood to this situation, where what we observe is just the set of recalled items for each list?”</a:t>
             </a:r>
           </a:p>
           <a:p>
@@ -1558,16 +1562,15 @@
           <a:p>
             <a:r>
               <a:rPr lang="en-US" dirty="0"/>
-              <a:t>“To adapt the idea of likelihood, we define a likelihood over sets. For each trial, we look at the sequences that would result in that recalled set – different orders, maybe repeats – and we aggregate their probabilities under the model.</a:t>
-            </a:r>
-          </a:p>
-          <a:p>
-            <a:endParaRPr lang="en-US" dirty="0"/>
-          </a:p>
-          <a:p>
-            <a:r>
-              <a:rPr lang="en-US" dirty="0"/>
-              <a:t>“In practice, we approximate that sum by sampling random permutations of the recalled set and averaging their sequence probabilities. It’s a Monte Carlo approximation, but it respects the generative structure and gives us a log likelihood for each trial and model.”</a:t>
+              <a:t>To adapt the ideal likelihood idea, we define a likelihood over sets: under a given parameter setting, how probable is it that the model would eventually recall </a:t>
+            </a:r>
+            <a:r>
+              <a:rPr lang="en-US" i="1" dirty="0"/>
+              <a:t>exactly</a:t>
+            </a:r>
+            <a:r>
+              <a:rPr lang="en-US" dirty="0"/>
+              <a:t> that set of items, in some order. In practice we approximate that by sampling different orders of the recalled set, computing the sequence probability for each, and averaging them. It’s a Monte Carlo hack, but it lets us keep using the full generative model despite only having recall sets in the data.”</a:t>
             </a:r>
           </a:p>
           <a:p>
@@ -1670,7 +1673,7 @@
           <a:p>
             <a:r>
               <a:rPr lang="en-US" dirty="0"/>
-              <a:t>“Second, it forces us to use the same encoding and retrieval parameters to both generate and score </a:t>
+              <a:t>Second, it forces us to use the same encoding and retrieval parameters to both generate and score </a:t>
             </a:r>
             <a:r>
               <a:rPr lang="en-US" dirty="0" err="1"/>
@@ -1678,13 +1681,29 @@
             </a:r>
             <a:r>
               <a:rPr lang="en-US" dirty="0"/>
-              <a:t>, which is important if we care about where in the process the effect lives.”</a:t>
-            </a:r>
-          </a:p>
-          <a:p>
-            <a:r>
-              <a:rPr lang="en-US" dirty="0"/>
-              <a:t>“Third, once we have these log likelihoods per subject and model, we can convert them into a simple model-comparison score that accounts for parameter count – AIC – which I’ll come back to later. That will let us say, in a principled way, which of our models are clearly ruled out by the </a:t>
+              <a:t>. If we claim that LPP boosts encoding strength, that same encoding rule has to explain </a:t>
+            </a:r>
+            <a:r>
+              <a:rPr lang="en-US" i="1" dirty="0"/>
+              <a:t>all</a:t>
+            </a:r>
+            <a:r>
+              <a:rPr lang="en-US" dirty="0"/>
+              <a:t> the recall patterns in the likelihood; we can’t quietly use one set of parameters to match the SPC and a different set to match the LPP effect. That is what I mean by ‘respecting the generative structure’.</a:t>
+            </a:r>
+          </a:p>
+          <a:p>
+            <a:r>
+              <a:rPr lang="en-US" dirty="0"/>
+              <a:t>Third, once we have log likelihoods per subject and model, we can turn them into a simple model-comparison score that </a:t>
+            </a:r>
+            <a:r>
+              <a:rPr lang="en-US" dirty="0" err="1"/>
+              <a:t>penalises</a:t>
+            </a:r>
+            <a:r>
+              <a:rPr lang="en-US" dirty="0"/>
+              <a:t> extra parameters – I’ll use AIC – so we can say, in a principled way, which mechanistic stories are clearly ruled out by the </a:t>
             </a:r>
             <a:r>
               <a:rPr lang="en-US" dirty="0" err="1"/>
@@ -1692,7 +1711,7 @@
             </a:r>
             <a:r>
               <a:rPr lang="en-US" dirty="0"/>
-              <a:t> and where two different process stories are effectively tied.”</a:t>
+              <a:t> and where two stories are effectively tied.”</a:t>
             </a:r>
           </a:p>
           <a:p>
@@ -1782,46 +1801,40 @@
           <a:lstStyle/>
           <a:p>
             <a:r>
-              <a:rPr lang="en-US" b="1" dirty="0"/>
-              <a:t>Objective</a:t>
-            </a:r>
-            <a:endParaRPr lang="en-US" dirty="0"/>
-          </a:p>
-          <a:p>
-            <a:r>
-              <a:rPr lang="en-US" dirty="0"/>
-              <a:t>Make Q3 concrete in words: show that there are at least two mechanistic ways to read the GLMM interaction, and that these will become your competing model variants.</a:t>
-            </a:r>
-          </a:p>
-          <a:p>
-            <a:r>
-              <a:rPr lang="en-US" b="1" dirty="0"/>
-              <a:t>Key things to say</a:t>
-            </a:r>
-            <a:endParaRPr lang="en-US" dirty="0"/>
-          </a:p>
-          <a:p>
-            <a:r>
-              <a:rPr lang="en-US" dirty="0"/>
-              <a:t>“The mixed model told us that recall depends on emotion, Early LPP, and their interaction: LPP is more strongly related to recall within negative items than within neutral items.”</a:t>
-            </a:r>
-          </a:p>
-          <a:p>
-            <a:r>
-              <a:rPr lang="en-US" dirty="0"/>
-              <a:t>“The natural story is to say: LPP must have a special, extra impact on the encoding of negative items. That’s Story B, the explicit encoding interaction story.”</a:t>
-            </a:r>
-          </a:p>
-          <a:p>
-            <a:r>
-              <a:rPr lang="en-US" dirty="0"/>
-              <a:t>“But there is another possibility. In Story A, emotion and LPP each add to encoding strength, and the way those strengths feed into a nonlinear competitive recall process creates an effective LPP × emotion interaction at the level of recall probabilities, even without an explicit interaction term in the learning rule.”</a:t>
-            </a:r>
-          </a:p>
-          <a:p>
-            <a:r>
-              <a:rPr lang="en-US" dirty="0"/>
-              <a:t>“Both stories are compatible with the GLMM. The modelling question is whether the full pattern of recall sets forces us towards one of them, or whether, for this dataset, they remain equally plausible.”</a:t>
+              <a:rPr lang="en-US" dirty="0"/>
+              <a:t>“Stepping away from this dataset, what are some general rules of thumb for choosing models to compare?”</a:t>
+            </a:r>
+          </a:p>
+          <a:p>
+            <a:r>
+              <a:rPr lang="en-US" dirty="0"/>
+              <a:t>“First, you want models to differ in focused ways: ideally one mechanistic ingredient at a time. Here, the ingredient we’re playing with is where and how LPP and emotion enter the encoding rule.”</a:t>
+            </a:r>
+          </a:p>
+          <a:p>
+            <a:r>
+              <a:rPr lang="en-US" dirty="0"/>
+              <a:t>“Second, you want a baseline that is psychologically meaningful, not just an obviously bad model. In our case, an emotion-only recall model that never sees LPP is a reasonable baseline.”</a:t>
+            </a:r>
+          </a:p>
+          <a:p>
+            <a:r>
+              <a:rPr lang="en-US" dirty="0"/>
+              <a:t>“Third, you want each model to correspond to a verbal story you could explain to someone in a couple of sentences, because the point is to ask whether that story is clearly ruled out, clearly supported, or simply left underdetermined by the data.”</a:t>
+            </a:r>
+          </a:p>
+          <a:p>
+            <a:r>
+              <a:rPr lang="en-US" dirty="0"/>
+              <a:t>“In the rest of the talk, we’ll see one example of each: an emotion-only model that is clearly ruled out once we look at the fits, and two EEG-aware models where, for this dataset, the </a:t>
+            </a:r>
+            <a:r>
+              <a:rPr lang="en-US" dirty="0" err="1"/>
+              <a:t>behaviour</a:t>
+            </a:r>
+            <a:r>
+              <a:rPr lang="en-US" dirty="0"/>
+              <a:t> effectively ties them.”</a:t>
             </a:r>
           </a:p>
           <a:p>
@@ -1856,7 +1869,7 @@
     </p:spTree>
     <p:extLst>
       <p:ext uri="{BB962C8B-B14F-4D97-AF65-F5344CB8AC3E}">
-        <p14:creationId xmlns:p14="http://schemas.microsoft.com/office/powerpoint/2010/main" val="3375972357"/>
+        <p14:creationId xmlns:p14="http://schemas.microsoft.com/office/powerpoint/2010/main" val="3359169314"/>
       </p:ext>
     </p:extLst>
   </p:cSld>
@@ -1871,7 +1884,13 @@
   <p:cSld>
     <p:spTree>
       <p:nvGrpSpPr>
-        <p:cNvPr id="1" name=""/>
+        <p:cNvPr id="1" name="">
+          <a:extLst>
+            <a:ext uri="{FF2B5EF4-FFF2-40B4-BE49-F238E27FC236}">
+              <a16:creationId xmlns:a16="http://schemas.microsoft.com/office/drawing/2014/main" id="{3F0961B2-27D7-5CEF-03DC-99ADA7AA2D5C}"/>
+            </a:ext>
+          </a:extLst>
+        </p:cNvPr>
         <p:cNvGrpSpPr/>
         <p:nvPr/>
       </p:nvGrpSpPr>
@@ -1885,7 +1904,13 @@
       </p:grpSpPr>
       <p:sp>
         <p:nvSpPr>
-          <p:cNvPr id="2" name="Slide Image Placeholder 1"/>
+          <p:cNvPr id="2" name="Slide Image Placeholder 1">
+            <a:extLst>
+              <a:ext uri="{FF2B5EF4-FFF2-40B4-BE49-F238E27FC236}">
+                <a16:creationId xmlns:a16="http://schemas.microsoft.com/office/drawing/2014/main" id="{590F1573-DB58-B821-4BF3-9B99DC3FEBF1}"/>
+              </a:ext>
+            </a:extLst>
+          </p:cNvPr>
           <p:cNvSpPr>
             <a:spLocks noGrp="1" noRot="1" noChangeAspect="1"/>
           </p:cNvSpPr>
@@ -1897,7 +1922,13 @@
       </p:sp>
       <p:sp>
         <p:nvSpPr>
-          <p:cNvPr id="3" name="Notes Placeholder 2"/>
+          <p:cNvPr id="3" name="Notes Placeholder 2">
+            <a:extLst>
+              <a:ext uri="{FF2B5EF4-FFF2-40B4-BE49-F238E27FC236}">
+                <a16:creationId xmlns:a16="http://schemas.microsoft.com/office/drawing/2014/main" id="{81C55E9D-B160-39ED-DB7F-3A1CFC39D072}"/>
+              </a:ext>
+            </a:extLst>
+          </p:cNvPr>
           <p:cNvSpPr>
             <a:spLocks noGrp="1"/>
           </p:cNvSpPr>
@@ -1912,35 +1943,40 @@
           <a:p>
             <a:r>
               <a:rPr lang="en-US" dirty="0"/>
-              <a:t>“To test these stories we embed them in a simple recall model with two main stages.”</a:t>
-            </a:r>
-          </a:p>
-          <a:p>
-            <a:r>
-              <a:rPr lang="en-US" dirty="0"/>
-              <a:t>“At study, items are encoded with a strength Sᵢ and linked to a context representation. At test, a cue drives a context state that activates items based on their similarity to the cue and their strength, and a competitive choice rule produces recalls or a STOP decision.”</a:t>
-            </a:r>
-          </a:p>
-          <a:p>
-            <a:r>
-              <a:rPr lang="en-US" dirty="0"/>
-              <a:t>“Across all the models I’ll show you, the retrieval stage – context dynamics, similarity, and competition – is the same.”</a:t>
-            </a:r>
-          </a:p>
-          <a:p>
-            <a:r>
-              <a:rPr lang="en-US" dirty="0"/>
-              <a:t>“What we’re going to manipulate is the encoding rule: how emotion and LPP are allowed to feed into the encoding strength Sᵢ.”</a:t>
-            </a:r>
-          </a:p>
-          <a:p>
-            <a:endParaRPr lang="en-US" dirty="0"/>
-          </a:p>
-        </p:txBody>
-      </p:sp>
-      <p:sp>
-        <p:nvSpPr>
-          <p:cNvPr id="4" name="Slide Number Placeholder 3"/>
+              <a:t>Now let’s shift to model specification. We’ve been circling around a basic question about LPP: could it work as a stand-in for emotion in our model?</a:t>
+            </a:r>
+          </a:p>
+          <a:p>
+            <a:r>
+              <a:rPr lang="en-US" dirty="0"/>
+              <a:t>Statistically, what we’ve seen so far is that both the emotion label and Early LPP predict recall. Negative items are recalled more often than neutral even after controlling for LPP, and LPP is highest for recalled negatives and lower for the other groups. LPP is clearly related to emotion and to later recall, but it’s not a pure tag for either one.</a:t>
+            </a:r>
+          </a:p>
+          <a:p>
+            <a:r>
+              <a:rPr lang="en-US" dirty="0"/>
+              <a:t>When we talk about LPP ‘standing in’ for emotion in the model, that could mean a strong claim – drop the emotion labels entirely and let LPP drive the emotional mechanism – or a weaker claim, where LPP is the graded input to that mechanism but the condition labels still carry extra information. The GMM patterns give us reasons to doubt the strong, ‘LPP replaces the label’ story, because emotion still explains variance beyond LPP, but they don’t tell us how a recall model that only sees LPP would actually behave compared to one that also sees the labels. That’s the modelling question we’re going to </a:t>
+            </a:r>
+            <a:r>
+              <a:rPr lang="en-US" dirty="0" err="1"/>
+              <a:t>formalise</a:t>
+            </a:r>
+            <a:r>
+              <a:rPr lang="en-US" dirty="0"/>
+              <a:t> on the next slide.</a:t>
+            </a:r>
+          </a:p>
+        </p:txBody>
+      </p:sp>
+      <p:sp>
+        <p:nvSpPr>
+          <p:cNvPr id="4" name="Slide Number Placeholder 3">
+            <a:extLst>
+              <a:ext uri="{FF2B5EF4-FFF2-40B4-BE49-F238E27FC236}">
+                <a16:creationId xmlns:a16="http://schemas.microsoft.com/office/drawing/2014/main" id="{E2B7385F-457E-AC5A-ADB7-369CB7FD0D90}"/>
+              </a:ext>
+            </a:extLst>
+          </p:cNvPr>
           <p:cNvSpPr>
             <a:spLocks noGrp="1"/>
           </p:cNvSpPr>
@@ -1965,7 +2001,7 @@
     </p:spTree>
     <p:extLst>
       <p:ext uri="{BB962C8B-B14F-4D97-AF65-F5344CB8AC3E}">
-        <p14:creationId xmlns:p14="http://schemas.microsoft.com/office/powerpoint/2010/main" val="1525732320"/>
+        <p14:creationId xmlns:p14="http://schemas.microsoft.com/office/powerpoint/2010/main" val="1061805945"/>
       </p:ext>
     </p:extLst>
   </p:cSld>
@@ -2021,25 +2057,47 @@
           <a:p>
             <a:r>
               <a:rPr lang="en-US" dirty="0"/>
-              <a:t>“The emotion-only model, Model 0, never sees LPP. It just implements a generic emotional boost at encoding plus the standard retrieval dynamics.”</a:t>
-            </a:r>
-          </a:p>
-          <a:p>
-            <a:r>
-              <a:rPr lang="en-US" dirty="0"/>
-              <a:t>“Model 1, the EEG main-effects model, lets emotion and LPP each influence encoding strength Sᵢ additively. In this model, any LPP × emotion interaction in recall has to come from the nonlinearity in the competitive retrieval process.”</a:t>
-            </a:r>
-          </a:p>
-          <a:p>
-            <a:r>
-              <a:rPr lang="en-US" dirty="0"/>
-              <a:t>“Model 2, the EEG interaction model, adds an explicit Emotion × LPP term in the encoding rule, so the interaction is literally in the trace: emotional items with high LPP get a special boost at encoding.”</a:t>
-            </a:r>
-          </a:p>
-          <a:p>
-            <a:r>
-              <a:rPr lang="en-US" dirty="0"/>
-              <a:t>“These three models are the formal counterparts of the stories we just outlined: emotion-only, main-effects plus competition, and explicit encoding interaction.”</a:t>
+              <a:t>“To test these stories we embed them in an established emotional free recall model called the emotional context maintenance and retrieval model, or </a:t>
+            </a:r>
+            <a:r>
+              <a:rPr lang="en-US" dirty="0" err="1"/>
+              <a:t>eCMR</a:t>
+            </a:r>
+            <a:r>
+              <a:rPr lang="en-US" dirty="0"/>
+              <a:t>. </a:t>
+            </a:r>
+          </a:p>
+          <a:p>
+            <a:r>
+              <a:rPr lang="en-US" dirty="0"/>
+              <a:t>We don’t need to get into its details, but it has two main stages.”</a:t>
+            </a:r>
+          </a:p>
+          <a:p>
+            <a:r>
+              <a:rPr lang="en-US" dirty="0"/>
+              <a:t>“At study, items are encoded with a strength Sᵢ and linked to a context representation. At test, a cue drives a context state that activates items based on their similarity to the cue and their strength, and a competitive choice rule produces recalls or a STOP decision.”</a:t>
+            </a:r>
+          </a:p>
+          <a:p>
+            <a:r>
+              <a:rPr lang="en-US" dirty="0"/>
+              <a:t>“Across all the models I’ll show you, the retrieval stage – context dynamics, similarity, and competition – is the same.”</a:t>
+            </a:r>
+          </a:p>
+          <a:p>
+            <a:r>
+              <a:rPr lang="en-US" dirty="0"/>
+              <a:t>“What we’re going to manipulate is the encoding rule: how emotion and LPP are allowed to feed into the encoding strength S sub </a:t>
+            </a:r>
+            <a:r>
+              <a:rPr lang="en-US" dirty="0" err="1"/>
+              <a:t>i</a:t>
+            </a:r>
+            <a:r>
+              <a:rPr lang="en-US" dirty="0"/>
+              <a:t>.”</a:t>
             </a:r>
           </a:p>
           <a:p>
@@ -2074,7 +2132,7 @@
     </p:spTree>
     <p:extLst>
       <p:ext uri="{BB962C8B-B14F-4D97-AF65-F5344CB8AC3E}">
-        <p14:creationId xmlns:p14="http://schemas.microsoft.com/office/powerpoint/2010/main" val="3073078463"/>
+        <p14:creationId xmlns:p14="http://schemas.microsoft.com/office/powerpoint/2010/main" val="1525732320"/>
       </p:ext>
     </p:extLst>
   </p:cSld>
@@ -2113,63 +2171,167 @@
         </p:nvSpPr>
         <p:spPr/>
       </p:sp>
-      <p:sp>
-        <p:nvSpPr>
-          <p:cNvPr id="3" name="Notes Placeholder 2"/>
-          <p:cNvSpPr>
-            <a:spLocks noGrp="1"/>
-          </p:cNvSpPr>
-          <p:nvPr>
-            <p:ph type="body" idx="1"/>
-          </p:nvPr>
-        </p:nvSpPr>
-        <p:spPr/>
-        <p:txBody>
-          <a:bodyPr/>
-          <a:lstStyle/>
-          <a:p>
-            <a:r>
-              <a:rPr lang="en-US" dirty="0"/>
-              <a:t>“Stepping away from this dataset, what are some general rules of thumb for choosing models to compare?”</a:t>
-            </a:r>
-          </a:p>
-          <a:p>
-            <a:r>
-              <a:rPr lang="en-US" dirty="0"/>
-              <a:t>“First, you want models to differ in focused ways: ideally one mechanistic ingredient at a time. Here, the ingredient we’re playing with is where and how LPP and emotion enter the encoding rule.”</a:t>
-            </a:r>
-          </a:p>
-          <a:p>
-            <a:r>
-              <a:rPr lang="en-US" dirty="0"/>
-              <a:t>“Second, you want a baseline that is psychologically meaningful, not just an obviously bad model. In our case, an emotion-only recall model that never sees LPP is a reasonable baseline.”</a:t>
-            </a:r>
-          </a:p>
-          <a:p>
-            <a:r>
-              <a:rPr lang="en-US" dirty="0"/>
-              <a:t>“Third, you want each model to correspond to a verbal story you could explain to someone in a couple of sentences, because the point is to ask whether that story is clearly ruled out, clearly supported, or simply left underdetermined by the data.”</a:t>
-            </a:r>
-          </a:p>
-          <a:p>
-            <a:r>
-              <a:rPr lang="en-US" dirty="0"/>
-              <a:t>“In the rest of the talk, we’ll see one example of each: an emotion-only model that is clearly ruled out once we look at the fits, and two EEG-aware models where, for this dataset, the </a:t>
-            </a:r>
-            <a:r>
-              <a:rPr lang="en-US" dirty="0" err="1"/>
-              <a:t>behaviour</a:t>
-            </a:r>
-            <a:r>
-              <a:rPr lang="en-US" dirty="0"/>
-              <a:t> effectively ties them.”</a:t>
-            </a:r>
-          </a:p>
-          <a:p>
-            <a:endParaRPr lang="en-US" dirty="0"/>
-          </a:p>
-        </p:txBody>
-      </p:sp>
+      <mc:AlternateContent xmlns:mc="http://schemas.openxmlformats.org/markup-compatibility/2006">
+        <mc:Choice xmlns:a14="http://schemas.microsoft.com/office/drawing/2010/main" Requires="a14">
+          <p:sp>
+            <p:nvSpPr>
+              <p:cNvPr id="3" name="Notes Placeholder 2"/>
+              <p:cNvSpPr>
+                <a:spLocks noGrp="1"/>
+              </p:cNvSpPr>
+              <p:nvPr>
+                <p:ph type="body" idx="1"/>
+              </p:nvPr>
+            </p:nvSpPr>
+            <p:spPr/>
+            <p:txBody>
+              <a:bodyPr/>
+              <a:lstStyle/>
+              <a:p>
+                <a:r>
+                  <a:rPr lang="en-US" dirty="0"/>
+                  <a:t>o make those ideas concrete, we’re going to look at three ways of letting the model use emotion and LPP at encoding.</a:t>
+                </a:r>
+              </a:p>
+              <a:p>
+                <a:r>
+                  <a:rPr lang="en-US" dirty="0"/>
+                  <a:t>Model 0 is an emotion-only model: the encoding strength </a:t>
+                </a:r>
+                <a14:m>
+                  <m:oMath xmlns:m="http://schemas.openxmlformats.org/officeDocument/2006/math">
+                    <m:sSub>
+                      <m:sSubPr>
+                        <m:ctrlPr>
+                          <a:rPr lang="ar-AE" sz="1200" kern="1200">
+                            <a:solidFill>
+                              <a:schemeClr val="tx1"/>
+                            </a:solidFill>
+                            <a:latin typeface="Arial" charset="0"/>
+                            <a:ea typeface="+mn-ea"/>
+                            <a:cs typeface="+mn-cs"/>
+                          </a:rPr>
+                        </m:ctrlPr>
+                      </m:sSubPr>
+                      <m:e>
+                        <m:r>
+                          <a:rPr lang="ar-AE" sz="1200" i="1" kern="1200">
+                            <a:solidFill>
+                              <a:schemeClr val="tx1"/>
+                            </a:solidFill>
+                            <a:latin typeface="Arial" charset="0"/>
+                            <a:ea typeface="+mn-ea"/>
+                            <a:cs typeface="+mn-cs"/>
+                          </a:rPr>
+                          <m:t>𝑆</m:t>
+                        </m:r>
+                      </m:e>
+                      <m:sub>
+                        <m:r>
+                          <a:rPr lang="ar-AE" sz="1200" i="1" kern="1200">
+                            <a:solidFill>
+                              <a:schemeClr val="tx1"/>
+                            </a:solidFill>
+                            <a:latin typeface="Arial" charset="0"/>
+                            <a:ea typeface="+mn-ea"/>
+                            <a:cs typeface="+mn-cs"/>
+                          </a:rPr>
+                          <m:t>𝑖</m:t>
+                        </m:r>
+                      </m:sub>
+                    </m:sSub>
+                  </m:oMath>
+                </a14:m>
+                <a:r>
+                  <a:rPr lang="en-US" dirty="0"/>
+                  <a:t>depends only on whether an item is negative or neutral, and LPP is ignored. This is our baseline, where emotion labels are the only ‘emotional’ input.</a:t>
+                </a:r>
+              </a:p>
+              <a:p>
+                <a:r>
+                  <a:rPr lang="en-US" dirty="0"/>
+                  <a:t>Model 1 is an LPP-only model: encoding strength depends only on the item’s Early LPP amplitude, and the model never sees the category labels. This is the strong ‘LPP stands in for emotion’ idea we just talked about.</a:t>
+                </a:r>
+              </a:p>
+              <a:p>
+                <a:r>
+                  <a:rPr lang="en-US" dirty="0"/>
+                  <a:t>Model 2 is an emotion-plus-LPP model: encoding strength depends on both the condition label and LPP, so the model has a binary emotion factor and a graded neural signal. This corresponds to the weaker stand-in idea, where LPP is the graded input to an emotional channel but labels can still carry extra information.</a:t>
+                </a:r>
+              </a:p>
+              <a:p>
+                <a:r>
+                  <a:rPr lang="en-US" dirty="0"/>
+                  <a:t>Across all three models, the retrieval dynamics – context drift, cue–item similarity, competition – are exactly the same; only the encoding rule changes.</a:t>
+                </a:r>
+              </a:p>
+            </p:txBody>
+          </p:sp>
+        </mc:Choice>
+        <mc:Fallback>
+          <p:sp>
+            <p:nvSpPr>
+              <p:cNvPr id="3" name="Notes Placeholder 2"/>
+              <p:cNvSpPr>
+                <a:spLocks noGrp="1"/>
+              </p:cNvSpPr>
+              <p:nvPr>
+                <p:ph type="body" idx="1"/>
+              </p:nvPr>
+            </p:nvSpPr>
+            <p:spPr/>
+            <p:txBody>
+              <a:bodyPr/>
+              <a:lstStyle/>
+              <a:p>
+                <a:r>
+                  <a:rPr lang="en-US" dirty="0"/>
+                  <a:t>o make those ideas concrete, we’re going to look at three ways of letting the model use emotion and LPP at encoding.</a:t>
+                </a:r>
+              </a:p>
+              <a:p>
+                <a:r>
+                  <a:rPr lang="en-US" dirty="0"/>
+                  <a:t>Model 0 is an emotion-only model: the encoding strength </a:t>
+                </a:r>
+                <a:r>
+                  <a:rPr lang="ar-AE" sz="1200" i="0" kern="1200">
+                    <a:solidFill>
+                      <a:schemeClr val="tx1"/>
+                    </a:solidFill>
+                    <a:latin typeface="Arial" charset="0"/>
+                    <a:ea typeface="+mn-ea"/>
+                    <a:cs typeface="+mn-cs"/>
+                  </a:rPr>
+                  <a:t>𝑆_𝑖</a:t>
+                </a:r>
+                <a:r>
+                  <a:rPr lang="en-US" dirty="0"/>
+                  <a:t>depends only on whether an item is negative or neutral, and LPP is ignored. This is our baseline, where emotion labels are the only ‘emotional’ input.</a:t>
+                </a:r>
+              </a:p>
+              <a:p>
+                <a:r>
+                  <a:rPr lang="en-US" dirty="0"/>
+                  <a:t>Model 1 is an LPP-only model: encoding strength depends only on the item’s Early LPP amplitude, and the model never sees the category labels. This is the strong ‘LPP stands in for emotion’ idea we just talked about.</a:t>
+                </a:r>
+              </a:p>
+              <a:p>
+                <a:r>
+                  <a:rPr lang="en-US" dirty="0"/>
+                  <a:t>Model 2 is an emotion-plus-LPP model: encoding strength depends on both the condition label and LPP, so the model has a binary emotion factor and a graded neural signal. This corresponds to the weaker stand-in idea, where LPP is the graded input to an emotional channel but labels can still carry extra information.</a:t>
+                </a:r>
+              </a:p>
+              <a:p>
+                <a:r>
+                  <a:rPr lang="en-US" dirty="0"/>
+                  <a:t>Across all three models, the retrieval dynamics – context drift, cue–item similarity, competition – are exactly the same; only the encoding rule changes.</a:t>
+                </a:r>
+              </a:p>
+            </p:txBody>
+          </p:sp>
+        </mc:Fallback>
+      </mc:AlternateContent>
       <p:sp>
         <p:nvSpPr>
           <p:cNvPr id="4" name="Slide Number Placeholder 3"/>
@@ -2197,7 +2359,7 @@
     </p:spTree>
     <p:extLst>
       <p:ext uri="{BB962C8B-B14F-4D97-AF65-F5344CB8AC3E}">
-        <p14:creationId xmlns:p14="http://schemas.microsoft.com/office/powerpoint/2010/main" val="3359169314"/>
+        <p14:creationId xmlns:p14="http://schemas.microsoft.com/office/powerpoint/2010/main" val="3073078463"/>
       </p:ext>
     </p:extLst>
   </p:cSld>
@@ -2252,26 +2414,6 @@
           <a:lstStyle/>
           <a:p>
             <a:r>
-              <a:rPr lang="en-US" b="1" dirty="0"/>
-              <a:t>Objective</a:t>
-            </a:r>
-            <a:endParaRPr lang="en-US" dirty="0"/>
-          </a:p>
-          <a:p>
-            <a:r>
-              <a:rPr lang="en-US" dirty="0"/>
-              <a:t>Explain how you turn the log-likelihoods you just defined into a comparison score that accounts for parameter count. This answers Q4’s “how do we compare models?” at a high level.</a:t>
-            </a:r>
-          </a:p>
-          <a:p>
-            <a:r>
-              <a:rPr lang="en-US" b="1" dirty="0"/>
-              <a:t>What you say</a:t>
-            </a:r>
-            <a:endParaRPr lang="en-US" dirty="0"/>
-          </a:p>
-          <a:p>
-            <a:r>
               <a:rPr lang="en-US" dirty="0"/>
               <a:t>“For each participant and each model we have a log likelihood from the set-based fit: how probable their recall sets are under that model at its best-fitting parameters.”</a:t>
             </a:r>
@@ -2293,7 +2435,13 @@
           <a:p>
             <a:r>
               <a:rPr lang="en-US" dirty="0"/>
-              <a:t>“Formally, AIC is 2 times the number of parameters minus 2 times the log likelihood; the important part is that lower AIC means better expected predictive performance for that participant, after accounting for model complexity.”</a:t>
+              <a:t>“Formally, AIC is 2 times the number of parameters minus 2 times the log likelihood.</a:t>
+            </a:r>
+          </a:p>
+          <a:p>
+            <a:r>
+              <a:rPr lang="en-US" dirty="0"/>
+              <a:t>Under some mild assumptions, this simple combination gives an estimate of how well the model would predict new data from the same task. Lower AIC means better expected out-of-sample predictive performance, so we’ll use it as a single score to compare our models for each subject.”</a:t>
             </a:r>
           </a:p>
         </p:txBody>
@@ -2380,36 +2528,8 @@
           <a:lstStyle/>
           <a:p>
             <a:r>
-              <a:rPr lang="en-US" b="1" dirty="0"/>
-              <a:t>Objective</a:t>
-            </a:r>
-            <a:endParaRPr lang="en-US" dirty="0"/>
-          </a:p>
-          <a:p>
-            <a:r>
-              <a:rPr lang="en-US" dirty="0"/>
-              <a:t>Deliver the more nuanced conclusion: within the EEG-aware family, the data do </a:t>
-            </a:r>
-            <a:r>
-              <a:rPr lang="en-US" i="1" dirty="0"/>
-              <a:t>not</a:t>
-            </a:r>
-            <a:r>
-              <a:rPr lang="en-US" dirty="0"/>
-              <a:t> provide a clear preference for the explicit encoding interaction over the main-effects-only model. This is where you demonstrate “under-determination” explicitly.</a:t>
-            </a:r>
-          </a:p>
-          <a:p>
-            <a:r>
-              <a:rPr lang="en-US" b="1" dirty="0"/>
-              <a:t>What you say</a:t>
-            </a:r>
-            <a:endParaRPr lang="en-US" dirty="0"/>
-          </a:p>
-          <a:p>
-            <a:r>
-              <a:rPr lang="en-US" dirty="0"/>
-              <a:t>“Now we look at the AIC difference between the EEG main-effects model and the explicit interaction model. Here </a:t>
+              <a:rPr lang="en-US" dirty="0"/>
+              <a:t>“Here are the AIC differences between the three encoding options. </a:t>
             </a:r>
             <a:r>
               <a:rPr lang="el-GR" dirty="0"/>
@@ -2417,7 +2537,23 @@
             </a:r>
             <a:r>
               <a:rPr lang="en-US" dirty="0"/>
-              <a:t>AIC is AIC main-effects minus AIC interaction, so negative values would </a:t>
+              <a:t>AIC here is AIC for the row model minus AIC for the column model, computed separately for each subject. We then bootstrap across subjects to get a confidence interval on the </a:t>
+            </a:r>
+            <a:r>
+              <a:rPr lang="en-US" i="1" dirty="0"/>
+              <a:t>mean</a:t>
+            </a:r>
+            <a:r>
+              <a:rPr lang="en-US" dirty="0"/>
+              <a:t> </a:t>
+            </a:r>
+            <a:r>
+              <a:rPr lang="el-GR" dirty="0"/>
+              <a:t>Δ</a:t>
+            </a:r>
+            <a:r>
+              <a:rPr lang="en-US" dirty="0"/>
+              <a:t>AIC. Negative values </a:t>
             </a:r>
             <a:r>
               <a:rPr lang="en-US" dirty="0" err="1"/>
@@ -2425,7 +2561,7 @@
             </a:r>
             <a:r>
               <a:rPr lang="en-US" dirty="0"/>
-              <a:t> the interaction model; positive values would </a:t>
+              <a:t> the row model; positive values </a:t>
             </a:r>
             <a:r>
               <a:rPr lang="en-US" dirty="0" err="1"/>
@@ -2433,29 +2569,60 @@
             </a:r>
             <a:r>
               <a:rPr lang="en-US" dirty="0"/>
-              <a:t> the main-effects model.”</a:t>
-            </a:r>
-          </a:p>
-          <a:p>
-            <a:r>
-              <a:rPr lang="en-US" dirty="0"/>
-              <a:t>“On average, the interaction model has slightly lower AIC – about half a unit – but the confidence interval crosses zero and sits entirely inside our ±2-unit practical-equivalence band.”</a:t>
-            </a:r>
-          </a:p>
-          <a:p>
-            <a:r>
-              <a:rPr lang="en-US" dirty="0"/>
-              <a:t>“In other words, for this dataset, the two EEG-aware models are effectively tied in AIC terms. The current data do not justify a strong claim that the LPP × emotion effect has to be implemented as an explicit interaction in the learning rule rather than emerging from the nonlinear competition at retrieval.”</a:t>
-            </a:r>
-          </a:p>
-          <a:p>
-            <a:r>
-              <a:rPr lang="en-US" dirty="0"/>
-              <a:t>“From a mechanistic point of view, we’ve learned two things: EEG clearly matters beyond emotion labels, but the GLMM interaction does not uniquely pin down where in the process that effect lives. Both an explicit encoding interaction and a main-effects-plus-competition story are equally compatible with the recall patterns within this model class.”</a:t>
-            </a:r>
-          </a:p>
-          <a:p>
-            <a:endParaRPr lang="en-US" dirty="0"/>
+              <a:t> the column. As a rough rule of thumb, differences smaller than about two AIC units are negligible; larger, consistent differences suggest a real advantage in expected predictive performance.</a:t>
+            </a:r>
+          </a:p>
+          <a:p>
+            <a:r>
+              <a:rPr lang="en-US" dirty="0"/>
+              <a:t>For </a:t>
+            </a:r>
+            <a:r>
+              <a:rPr lang="en-US" dirty="0" err="1"/>
+              <a:t>Emotion+LPP</a:t>
+            </a:r>
+            <a:r>
+              <a:rPr lang="en-US" dirty="0"/>
+              <a:t> versus Emotion-only, the mean </a:t>
+            </a:r>
+            <a:r>
+              <a:rPr lang="el-GR" dirty="0"/>
+              <a:t>Δ</a:t>
+            </a:r>
+            <a:r>
+              <a:rPr lang="en-US" dirty="0"/>
+              <a:t>AIC is around minus four and the bootstrap interval sits below zero. That means that, across subjects, the combined model reliably predicts better than the emotion-only model – letting the model see LPP on top of the labels helps.</a:t>
+            </a:r>
+          </a:p>
+          <a:p>
+            <a:r>
+              <a:rPr lang="en-US" dirty="0"/>
+              <a:t>For </a:t>
+            </a:r>
+            <a:r>
+              <a:rPr lang="en-US" dirty="0" err="1"/>
+              <a:t>Emotion+LPP</a:t>
+            </a:r>
+            <a:r>
+              <a:rPr lang="en-US" dirty="0"/>
+              <a:t> versus LPP-only, the differences are even more negative, so the strong ‘LPP-only’ stand-in idea is in trouble. And when we compare Emotion-only to LPP-only, the differences lean in </a:t>
+            </a:r>
+            <a:r>
+              <a:rPr lang="en-US" dirty="0" err="1"/>
+              <a:t>favour</a:t>
+            </a:r>
+            <a:r>
+              <a:rPr lang="en-US" dirty="0"/>
+              <a:t> of Emotion-only but the interval straddles zero, so we can’t claim a clear win – the LPP-only model is certainly not better than using the labels, and within this class it is clearly worse than the </a:t>
+            </a:r>
+            <a:r>
+              <a:rPr lang="en-US" dirty="0" err="1"/>
+              <a:t>Emotion+LPP</a:t>
+            </a:r>
+            <a:r>
+              <a:rPr lang="en-US" dirty="0"/>
+              <a:t> model.”</a:t>
+            </a:r>
           </a:p>
         </p:txBody>
       </p:sp>
@@ -2542,41 +2709,15 @@
           <a:p>
             <a:r>
               <a:rPr lang="en-US" dirty="0"/>
-              <a:t>“Coming back to the four questions I started with, this example shows both what modelling can and cannot do for us.”</a:t>
-            </a:r>
-          </a:p>
-          <a:p>
-            <a:r>
-              <a:rPr lang="en-US" dirty="0"/>
-              <a:t>“First, it sharpened a regression result into a process-level statement: models that incorporate trial-wise LPP clearly outperform an emotion-only model, which we can now talk about in terms of encoding strength and competition in a recall model.”</a:t>
-            </a:r>
-          </a:p>
-          <a:p>
-            <a:r>
-              <a:rPr lang="en-US" dirty="0"/>
-              <a:t>“Second, it helped us see where our intuitions were not warranted. The GLMM interaction by itself does not tell us whether the effect lives in the learning rule or emerges from retrieval dynamics, because both implementations fit essentially equally well under a principled loss.”</a:t>
-            </a:r>
-          </a:p>
-          <a:p>
-            <a:r>
-              <a:rPr lang="en-US" dirty="0"/>
-              <a:t>“More generally, the modelling workflow we walked through – pick a generative model, choose a loss that matches it to the data, </a:t>
-            </a:r>
-            <a:r>
-              <a:rPr lang="en-US" dirty="0" err="1"/>
-              <a:t>formalise</a:t>
-            </a:r>
-            <a:r>
-              <a:rPr lang="en-US" dirty="0"/>
-              <a:t> competing mechanistic stories as model variants, and compare them carefully – is something you can apply in other tasks and with other signals to see which aspects of your </a:t>
-            </a:r>
-            <a:r>
-              <a:rPr lang="en-US" dirty="0" err="1"/>
-              <a:t>favourite</a:t>
-            </a:r>
-            <a:r>
-              <a:rPr lang="en-US" dirty="0"/>
-              <a:t> stories are actually constrained, and which remain underdetermined.”</a:t>
+              <a:t>Top row is the data; bottom row is the </a:t>
+            </a:r>
+            <a:r>
+              <a:rPr lang="en-US" b="1" dirty="0"/>
+              <a:t>emotion-only</a:t>
+            </a:r>
+            <a:r>
+              <a:rPr lang="en-US" dirty="0"/>
+              <a:t> model. It captures the emotional enhancement of memory on the left, but on the right all four simulated LPP curves overlap. So its AIC disadvantage comes from failing to reproduce the LPP–recall structure, not from basic recall rates.</a:t>
             </a:r>
           </a:p>
         </p:txBody>
@@ -2608,7 +2749,7 @@
     </p:spTree>
     <p:extLst>
       <p:ext uri="{BB962C8B-B14F-4D97-AF65-F5344CB8AC3E}">
-        <p14:creationId xmlns:p14="http://schemas.microsoft.com/office/powerpoint/2010/main" val="3129698994"/>
+        <p14:creationId xmlns:p14="http://schemas.microsoft.com/office/powerpoint/2010/main" val="3565467078"/>
       </p:ext>
     </p:extLst>
   </p:cSld>
@@ -2684,27 +2825,19 @@
             </a:r>
             <a:r>
               <a:rPr lang="en-US" dirty="0"/>
-              <a:t> and use that to define a loss function, and why that’s more informative than just making one summary curve line up.”</a:t>
-            </a:r>
-          </a:p>
-          <a:p>
-            <a:r>
-              <a:rPr lang="en-US" dirty="0"/>
-              <a:t>“Third, how to go from vague hypotheses like ‘maybe the EEG signal is boosting encoding’ to a small set of explicit models that embody different stories. We’ll see that </a:t>
-            </a:r>
-            <a:r>
-              <a:rPr lang="en-US" dirty="0" err="1"/>
-              <a:t>formalising</a:t>
-            </a:r>
-            <a:r>
-              <a:rPr lang="en-US" dirty="0"/>
-              <a:t> those stories is already informative.”</a:t>
-            </a:r>
-          </a:p>
-          <a:p>
-            <a:r>
-              <a:rPr lang="en-US" dirty="0"/>
-              <a:t>“And fourth, how to compare those models in a way that lets us say which stories are clearly ruled out, which are supported, and where the data simply don’t distinguish between them. That, in my mind, is one of the key reasons to do cognitive modelling.”</a:t>
+              <a:t> and use that to define a loss function,.</a:t>
+            </a:r>
+          </a:p>
+          <a:p>
+            <a:r>
+              <a:rPr lang="en-US" dirty="0"/>
+              <a:t>“Third, how to go from vague hypotheses like ‘maybe the EEG signal is boosting encoding’ to a small set of explicit models that embody different stories.</a:t>
+            </a:r>
+          </a:p>
+          <a:p>
+            <a:r>
+              <a:rPr lang="en-US" dirty="0"/>
+              <a:t>“And fourth, how to compare those models in a way that lets us say which stories are clearly ruled out, which are supported, and where the data simply don’t distinguish between them. </a:t>
             </a:r>
           </a:p>
           <a:p>
@@ -2799,6 +2932,298 @@
           <a:bodyPr/>
           <a:lstStyle/>
           <a:p>
+            <a:endParaRPr lang="en-US" dirty="0"/>
+          </a:p>
+        </p:txBody>
+      </p:sp>
+      <p:sp>
+        <p:nvSpPr>
+          <p:cNvPr id="4" name="Slide Number Placeholder 3"/>
+          <p:cNvSpPr>
+            <a:spLocks noGrp="1"/>
+          </p:cNvSpPr>
+          <p:nvPr>
+            <p:ph type="sldNum" sz="quarter" idx="5"/>
+          </p:nvPr>
+        </p:nvSpPr>
+        <p:spPr/>
+        <p:txBody>
+          <a:bodyPr/>
+          <a:lstStyle/>
+          <a:p>
+            <a:fld id="{CEA5AD2E-89E1-4370-8739-344D4E353C41}" type="slidenum">
+              <a:rPr lang="en-GB" altLang="en-US" smtClean="0"/>
+              <a:pPr/>
+              <a:t>20</a:t>
+            </a:fld>
+            <a:endParaRPr lang="en-GB" altLang="en-US"/>
+          </a:p>
+        </p:txBody>
+      </p:sp>
+    </p:spTree>
+    <p:extLst>
+      <p:ext uri="{BB962C8B-B14F-4D97-AF65-F5344CB8AC3E}">
+        <p14:creationId xmlns:p14="http://schemas.microsoft.com/office/powerpoint/2010/main" val="1938990490"/>
+      </p:ext>
+    </p:extLst>
+  </p:cSld>
+  <p:clrMapOvr>
+    <a:masterClrMapping/>
+  </p:clrMapOvr>
+</p:notes>
+</file>
+
+<file path=ppt/notesSlides/notesSlide21.xml><?xml version="1.0" encoding="utf-8"?>
+<p:notes xmlns:a="http://schemas.openxmlformats.org/drawingml/2006/main" xmlns:r="http://schemas.openxmlformats.org/officeDocument/2006/relationships" xmlns:p="http://schemas.openxmlformats.org/presentationml/2006/main">
+  <p:cSld>
+    <p:spTree>
+      <p:nvGrpSpPr>
+        <p:cNvPr id="1" name=""/>
+        <p:cNvGrpSpPr/>
+        <p:nvPr/>
+      </p:nvGrpSpPr>
+      <p:grpSpPr>
+        <a:xfrm>
+          <a:off x="0" y="0"/>
+          <a:ext cx="0" cy="0"/>
+          <a:chOff x="0" y="0"/>
+          <a:chExt cx="0" cy="0"/>
+        </a:xfrm>
+      </p:grpSpPr>
+      <p:sp>
+        <p:nvSpPr>
+          <p:cNvPr id="2" name="Slide Image Placeholder 1"/>
+          <p:cNvSpPr>
+            <a:spLocks noGrp="1" noRot="1" noChangeAspect="1"/>
+          </p:cNvSpPr>
+          <p:nvPr>
+            <p:ph type="sldImg"/>
+          </p:nvPr>
+        </p:nvSpPr>
+        <p:spPr/>
+      </p:sp>
+      <p:sp>
+        <p:nvSpPr>
+          <p:cNvPr id="3" name="Notes Placeholder 2"/>
+          <p:cNvSpPr>
+            <a:spLocks noGrp="1"/>
+          </p:cNvSpPr>
+          <p:nvPr>
+            <p:ph type="body" idx="1"/>
+          </p:nvPr>
+        </p:nvSpPr>
+        <p:spPr/>
+        <p:txBody>
+          <a:bodyPr/>
+          <a:lstStyle/>
+          <a:p>
+            <a:endParaRPr lang="en-US"/>
+          </a:p>
+        </p:txBody>
+      </p:sp>
+      <p:sp>
+        <p:nvSpPr>
+          <p:cNvPr id="4" name="Slide Number Placeholder 3"/>
+          <p:cNvSpPr>
+            <a:spLocks noGrp="1"/>
+          </p:cNvSpPr>
+          <p:nvPr>
+            <p:ph type="sldNum" sz="quarter" idx="5"/>
+          </p:nvPr>
+        </p:nvSpPr>
+        <p:spPr/>
+        <p:txBody>
+          <a:bodyPr/>
+          <a:lstStyle/>
+          <a:p>
+            <a:fld id="{CEA5AD2E-89E1-4370-8739-344D4E353C41}" type="slidenum">
+              <a:rPr lang="en-GB" altLang="en-US" smtClean="0"/>
+              <a:pPr/>
+              <a:t>21</a:t>
+            </a:fld>
+            <a:endParaRPr lang="en-GB" altLang="en-US"/>
+          </a:p>
+        </p:txBody>
+      </p:sp>
+    </p:spTree>
+    <p:extLst>
+      <p:ext uri="{BB962C8B-B14F-4D97-AF65-F5344CB8AC3E}">
+        <p14:creationId xmlns:p14="http://schemas.microsoft.com/office/powerpoint/2010/main" val="4015535989"/>
+      </p:ext>
+    </p:extLst>
+  </p:cSld>
+  <p:clrMapOvr>
+    <a:masterClrMapping/>
+  </p:clrMapOvr>
+</p:notes>
+</file>
+
+<file path=ppt/notesSlides/notesSlide22.xml><?xml version="1.0" encoding="utf-8"?>
+<p:notes xmlns:a="http://schemas.openxmlformats.org/drawingml/2006/main" xmlns:r="http://schemas.openxmlformats.org/officeDocument/2006/relationships" xmlns:p="http://schemas.openxmlformats.org/presentationml/2006/main">
+  <p:cSld>
+    <p:spTree>
+      <p:nvGrpSpPr>
+        <p:cNvPr id="1" name=""/>
+        <p:cNvGrpSpPr/>
+        <p:nvPr/>
+      </p:nvGrpSpPr>
+      <p:grpSpPr>
+        <a:xfrm>
+          <a:off x="0" y="0"/>
+          <a:ext cx="0" cy="0"/>
+          <a:chOff x="0" y="0"/>
+          <a:chExt cx="0" cy="0"/>
+        </a:xfrm>
+      </p:grpSpPr>
+      <p:sp>
+        <p:nvSpPr>
+          <p:cNvPr id="2" name="Slide Image Placeholder 1"/>
+          <p:cNvSpPr>
+            <a:spLocks noGrp="1" noRot="1" noChangeAspect="1"/>
+          </p:cNvSpPr>
+          <p:nvPr>
+            <p:ph type="sldImg"/>
+          </p:nvPr>
+        </p:nvSpPr>
+        <p:spPr/>
+      </p:sp>
+      <p:sp>
+        <p:nvSpPr>
+          <p:cNvPr id="3" name="Notes Placeholder 2"/>
+          <p:cNvSpPr>
+            <a:spLocks noGrp="1"/>
+          </p:cNvSpPr>
+          <p:nvPr>
+            <p:ph type="body" idx="1"/>
+          </p:nvPr>
+        </p:nvSpPr>
+        <p:spPr/>
+        <p:txBody>
+          <a:bodyPr/>
+          <a:lstStyle/>
+          <a:p>
+            <a:r>
+              <a:rPr lang="en-US" dirty="0"/>
+              <a:t>Coming back to the four questions I started with, this example shows both what modelling can and cannot do for us.</a:t>
+            </a:r>
+          </a:p>
+          <a:p>
+            <a:r>
+              <a:rPr lang="en-US" dirty="0"/>
+              <a:t>First, it sharpened the regression result into a process-level statement: in this recall model, the encoding rule that sees both emotion labels and LPP clearly does better than either emotion-only or LPP-only, so LPP helps as a graded signal but cannot replace the labels.</a:t>
+            </a:r>
+          </a:p>
+          <a:p>
+            <a:r>
+              <a:rPr lang="en-US" dirty="0"/>
+              <a:t>Second, it reminded us to be modest: many other ways of combining emotion and LPP at encoding, and many choices about retrieval, would look very similar on a dataset of this size, so modelling narrows the space of stories but does not identify a unique mechanism.</a:t>
+            </a:r>
+          </a:p>
+          <a:p>
+            <a:r>
+              <a:rPr lang="en-US" dirty="0"/>
+              <a:t>More generally, the workflow we walked through – pick a generative model, choose a loss that matches it to the data, </a:t>
+            </a:r>
+            <a:r>
+              <a:rPr lang="en-US" dirty="0" err="1"/>
+              <a:t>formalise</a:t>
+            </a:r>
+            <a:r>
+              <a:rPr lang="en-US" dirty="0"/>
+              <a:t> competing mechanistic ideas as model variants, and compare them carefully – is something you can reuse in other tasks to see which aspects of your </a:t>
+            </a:r>
+            <a:r>
+              <a:rPr lang="en-US" dirty="0" err="1"/>
+              <a:t>favourite</a:t>
+            </a:r>
+            <a:r>
+              <a:rPr lang="en-US" dirty="0"/>
+              <a:t> stories are actually constrained, and which remain underdetermined.</a:t>
+            </a:r>
+          </a:p>
+        </p:txBody>
+      </p:sp>
+      <p:sp>
+        <p:nvSpPr>
+          <p:cNvPr id="4" name="Slide Number Placeholder 3"/>
+          <p:cNvSpPr>
+            <a:spLocks noGrp="1"/>
+          </p:cNvSpPr>
+          <p:nvPr>
+            <p:ph type="sldNum" sz="quarter" idx="5"/>
+          </p:nvPr>
+        </p:nvSpPr>
+        <p:spPr/>
+        <p:txBody>
+          <a:bodyPr/>
+          <a:lstStyle/>
+          <a:p>
+            <a:fld id="{CEA5AD2E-89E1-4370-8739-344D4E353C41}" type="slidenum">
+              <a:rPr lang="en-GB" altLang="en-US" smtClean="0"/>
+              <a:pPr/>
+              <a:t>22</a:t>
+            </a:fld>
+            <a:endParaRPr lang="en-GB" altLang="en-US"/>
+          </a:p>
+        </p:txBody>
+      </p:sp>
+    </p:spTree>
+    <p:extLst>
+      <p:ext uri="{BB962C8B-B14F-4D97-AF65-F5344CB8AC3E}">
+        <p14:creationId xmlns:p14="http://schemas.microsoft.com/office/powerpoint/2010/main" val="3129698994"/>
+      </p:ext>
+    </p:extLst>
+  </p:cSld>
+  <p:clrMapOvr>
+    <a:masterClrMapping/>
+  </p:clrMapOvr>
+</p:notes>
+</file>
+
+<file path=ppt/notesSlides/notesSlide23.xml><?xml version="1.0" encoding="utf-8"?>
+<p:notes xmlns:a="http://schemas.openxmlformats.org/drawingml/2006/main" xmlns:r="http://schemas.openxmlformats.org/officeDocument/2006/relationships" xmlns:p="http://schemas.openxmlformats.org/presentationml/2006/main">
+  <p:cSld>
+    <p:spTree>
+      <p:nvGrpSpPr>
+        <p:cNvPr id="1" name=""/>
+        <p:cNvGrpSpPr/>
+        <p:nvPr/>
+      </p:nvGrpSpPr>
+      <p:grpSpPr>
+        <a:xfrm>
+          <a:off x="0" y="0"/>
+          <a:ext cx="0" cy="0"/>
+          <a:chOff x="0" y="0"/>
+          <a:chExt cx="0" cy="0"/>
+        </a:xfrm>
+      </p:grpSpPr>
+      <p:sp>
+        <p:nvSpPr>
+          <p:cNvPr id="2" name="Slide Image Placeholder 1"/>
+          <p:cNvSpPr>
+            <a:spLocks noGrp="1" noRot="1" noChangeAspect="1"/>
+          </p:cNvSpPr>
+          <p:nvPr>
+            <p:ph type="sldImg"/>
+          </p:nvPr>
+        </p:nvSpPr>
+        <p:spPr/>
+      </p:sp>
+      <p:sp>
+        <p:nvSpPr>
+          <p:cNvPr id="3" name="Notes Placeholder 2"/>
+          <p:cNvSpPr>
+            <a:spLocks noGrp="1"/>
+          </p:cNvSpPr>
+          <p:nvPr>
+            <p:ph type="body" idx="1"/>
+          </p:nvPr>
+        </p:nvSpPr>
+        <p:spPr/>
+        <p:txBody>
+          <a:bodyPr/>
+          <a:lstStyle/>
+          <a:p>
             <a:pPr marL="0" marR="0" lvl="0" indent="0" algn="l" defTabSz="914400" rtl="0" eaLnBrk="0" fontAlgn="base" latinLnBrk="0" hangingPunct="0">
               <a:lnSpc>
                 <a:spcPct val="100000"/>
@@ -3278,7 +3703,7 @@
             <a:fld id="{CEA5AD2E-89E1-4370-8739-344D4E353C41}" type="slidenum">
               <a:rPr lang="en-GB" altLang="en-US" smtClean="0"/>
               <a:pPr/>
-              <a:t>20</a:t>
+              <a:t>23</a:t>
             </a:fld>
             <a:endParaRPr lang="en-GB" altLang="en-US"/>
           </a:p>
@@ -3343,7 +3768,7 @@
           <a:p>
             <a:r>
               <a:rPr lang="en-US" dirty="0"/>
-              <a:t>We use data from a study by Zarubin et al. (2020). In this experiment, participants studied lists of negative and neutral images, then did a short math distractor task, and then freely recalled as many images as they could. This procedure was repeated nine times with twenty-two images per list.</a:t>
+              <a:t>We use data from a study by Zarubin et al. (2020). In this experiment, participants studied lists of negative and neutral images. Some neutral items are related to one other and some aren’t, but we don’t focus on that detail here. </a:t>
             </a:r>
           </a:p>
           <a:p>
@@ -3352,15 +3777,42 @@
           <a:p>
             <a:r>
               <a:rPr lang="en-US" dirty="0"/>
-              <a:t>For the modelling, the key point is that for each list we know, for each item, its emotion label, its Early-LPP amplitude at encoding, and whether it was later recalled. Important for later, we do not know recall order. And in the original analysis the first two </a:t>
-            </a:r>
-            <a:r>
-              <a:rPr lang="en-US" b="1" dirty="0"/>
-              <a:t>studied</a:t>
-            </a:r>
-            <a:r>
-              <a:rPr lang="en-US" dirty="0"/>
-              <a:t> items on each list were treated as buffers and their recall data were dropped, to control for primacy. So we treat each trial as a twenty-item list with a recalled set rather than a full recall sequence.</a:t>
+              <a:t>After study, participants then did a short distractor task, and then freely recalled as many images as they could. This procedure was repeated by 38 participants nine times with twenty-two images per list.</a:t>
+            </a:r>
+          </a:p>
+          <a:p>
+            <a:endParaRPr lang="en-US" dirty="0"/>
+          </a:p>
+          <a:p>
+            <a:pPr marL="0" marR="0" lvl="0" indent="0" algn="l" defTabSz="914400" rtl="0" eaLnBrk="0" fontAlgn="base" latinLnBrk="0" hangingPunct="0">
+              <a:lnSpc>
+                <a:spcPct val="100000"/>
+              </a:lnSpc>
+              <a:spcBef>
+                <a:spcPct val="30000"/>
+              </a:spcBef>
+              <a:spcAft>
+                <a:spcPct val="0"/>
+              </a:spcAft>
+              <a:buClrTx/>
+              <a:buSzTx/>
+              <a:buFontTx/>
+              <a:buNone/>
+              <a:tabLst/>
+              <a:defRPr/>
+            </a:pPr>
+            <a:r>
+              <a:rPr lang="en-US" dirty="0"/>
+              <a:t>During encoding we recorded an ERP component called the Late Positive Potential, or LPP. In this paradigm negative pictures tend to elicit a larger LPP than neutral pictures, so it is often treated as a neural marker of emotional attention.</a:t>
+            </a:r>
+          </a:p>
+          <a:p>
+            <a:endParaRPr lang="en-US" dirty="0"/>
+          </a:p>
+          <a:p>
+            <a:r>
+              <a:rPr lang="en-US" dirty="0"/>
+              <a:t>For the modelling, the key point is that for each list we know, for each item, its emotion label, its Early-LPP amplitude at encoding, and whether it was later recalled. Important for later, we do not know recall order. And response data for the first two items was dropped outright by the authors to control for primacy. For a modeling project, it’s a bit modest in size and a little noisy, but that’s often the kind of data we have, making it a useful example here. </a:t>
             </a:r>
           </a:p>
         </p:txBody>
@@ -3448,21 +3900,13 @@
           <a:p>
             <a:r>
               <a:rPr lang="en-US" dirty="0"/>
-              <a:t>“</a:t>
-            </a:r>
-            <a:r>
-              <a:rPr lang="en-US" dirty="0" err="1"/>
-              <a:t>Behaviourally</a:t>
-            </a:r>
-            <a:r>
-              <a:rPr lang="en-US" dirty="0"/>
-              <a:t> in this dataset, we see the familiar emotional enhancement of memory: negative items are more likely to be recalled than neutral ones across serial position.”</a:t>
-            </a:r>
-          </a:p>
-          <a:p>
-            <a:r>
-              <a:rPr lang="en-US" dirty="0"/>
-              <a:t>“Any model we use later will at least have to capture this basic pattern.</a:t>
+              <a:t>The focal behavioral benchmark exhibited by this dataset is the emotional enhancement of memory: negative items are more likely to be recalled than neutral ones across serial position.”</a:t>
+            </a:r>
+          </a:p>
+          <a:p>
+            <a:r>
+              <a:rPr lang="en-US" dirty="0"/>
+              <a:t>The error bars are 95% bootstrap confidence intervals across subjects, and I’ll use the same convention on the other plots.</a:t>
             </a:r>
           </a:p>
         </p:txBody>
@@ -3568,21 +4012,15 @@
           <a:p>
             <a:r>
               <a:rPr lang="en-US" dirty="0"/>
-              <a:t>“</a:t>
+              <a:t>If we look at the EEG data, we see a parallel pattern: Early LPP is, on average, higher for negative than for neutral items across serial position, although there is substantial overlap and variability. So LPP behaves like a noisy, graded index of emotional attention that any </a:t>
             </a:r>
             <a:r>
               <a:rPr lang="en-US" dirty="0" err="1"/>
-              <a:t>Behaviourally</a:t>
-            </a:r>
-            <a:r>
-              <a:rPr lang="en-US" dirty="0"/>
-              <a:t> in this dataset, we see the familiar emotional enhancement of memory: negative items are more likely to be recalled than neutral ones across serial position.”</a:t>
-            </a:r>
-          </a:p>
-          <a:p>
-            <a:r>
-              <a:rPr lang="en-US" dirty="0"/>
-              <a:t>“Any model we use later will at least have to capture this basic pattern.</a:t>
+              <a:t>neurally</a:t>
+            </a:r>
+            <a:r>
+              <a:rPr lang="en-US" dirty="0"/>
+              <a:t> informed model will need to respect.”</a:t>
             </a:r>
           </a:p>
         </p:txBody>
@@ -3676,7 +4114,7 @@
           <a:p>
             <a:r>
               <a:rPr lang="en-US" dirty="0"/>
-              <a:t>“If we look at the EEG, we see that Early LPP tends to be larger for negative items that are later recalled than for negative items that are not recalled.”</a:t>
+              <a:t>“If we further split by subsequent recall, we see that Early LPP tends to be larger for negative items that are later recalled than for negative items that are not later recalled.”</a:t>
             </a:r>
           </a:p>
           <a:p>
@@ -3688,7 +4126,7 @@
           <a:p>
             <a:r>
               <a:rPr lang="en-US" dirty="0"/>
-              <a:t>“So even before fitting any model, we have this descriptive picture: LPP seems more strongly tied to recall for negative items than for neutral ones.”</a:t>
+              <a:t>“So even before fitting any model, we have this descriptive picture: LPP seems more strongly tied to recall for negative items than for neutral ones, though again with plenty of noise.</a:t>
             </a:r>
           </a:p>
           <a:p>
@@ -3805,9 +4243,12 @@
                 <a:ea typeface="+mn-ea"/>
                 <a:cs typeface="+mn-cs"/>
               </a:rPr>
-              <a:t>Here, we superimpose Early-LPP curves to highlight joint structure. Recalled emotional items have the highest Early LPPs. Unrecalled emotional items overlap with both recalled and unrecalled neutral items. Two simple linking stories are inconsistent with this pattern. First, if LPP simply reflected item type, recalled and unrecalled items of the same type would have similar LPPs; instead, recall status clearly separates Early LPP within the emotional condition. Second, if LPP simply reflected recall probability, recalled items across item types would align; instead, recalled emotional items have higher LPPs than recalled neutral items. Neither pattern holds, convincing us that each factor has separable consequences for memory.</a:t>
-            </a:r>
-            <a:endParaRPr lang="en-US" dirty="0"/>
+              <a:t>Here, we superimpose Early-LPP curves to highlight joint structure. Recalled emotional items have the highest Early LPPs. Unrecalled emotional items sit lower and substantially overlap with both recalled and unrecalled neutral items. </a:t>
+            </a:r>
+            <a:r>
+              <a:rPr lang="en-US" dirty="0"/>
+              <a:t>So Early LPP clearly reflects both emotion and later recall, but it is not a pure tag for either one on its own. That combination – a systematic shift by emotion, plus an extra boost for items that will be recalled – is exactly the sort of mixed signal that will matter for how we think about modelling this dataset later.</a:t>
+            </a:r>
           </a:p>
         </p:txBody>
       </p:sp>
@@ -3904,33 +4345,30 @@
             </a:r>
             <a:r>
               <a:rPr lang="en-US" dirty="0" err="1"/>
-              <a:t>formalise</a:t>
-            </a:r>
-            <a:r>
-              <a:rPr lang="en-US" dirty="0"/>
-              <a:t> the descriptive patterns with a logistic mixed model that predicts recall from emotion, Early LPP, and their interaction.”</a:t>
-            </a:r>
-          </a:p>
-          <a:p>
-            <a:r>
-              <a:rPr lang="en-US" dirty="0"/>
-              <a:t>“All three terms are significant: negative items are recalled more often than neutral ones; higher LPP is associated with higher recall probability; and the LPP–recall slope is steeper within negative items than within neutral ones.”</a:t>
-            </a:r>
-          </a:p>
-          <a:p>
-            <a:r>
-              <a:rPr lang="en-US" dirty="0"/>
-              <a:t>“It’s very natural to read this as ‘LPP has a special, extra impact on the encoding of negative items; the learning rule must have an explicit emotion-by-LPP interaction’.”</a:t>
-            </a:r>
-          </a:p>
-          <a:p>
-            <a:r>
-              <a:rPr lang="en-US" dirty="0"/>
-              <a:t>“The modelling part of the talk is going to ask a more careful question: given this regression result, how many different process-level stories are actually compatible with it? Can we, for example, rule out a simpler story where LPP and emotion have purely additive effects at encoding and the interaction in recall emerges downstream from the way items compete during retrieval?”</a:t>
-            </a:r>
-          </a:p>
-          <a:p>
-            <a:endParaRPr lang="en-US" dirty="0"/>
+              <a:t>summarise</a:t>
+            </a:r>
+            <a:r>
+              <a:rPr lang="en-US" dirty="0"/>
+              <a:t> these patterns with a logistic mixed-effects model that predicts recall from emotion, Early LPP, and their interaction.</a:t>
+            </a:r>
+          </a:p>
+          <a:p>
+            <a:r>
+              <a:rPr lang="en-US" dirty="0"/>
+              <a:t>All three terms are reliable: negative items are recalled more often than neutral, items with higher LPP are more likely to be recalled, and the LPP–recall slope is steeper for negative than for neutral items.</a:t>
+            </a:r>
+          </a:p>
+          <a:p>
+            <a:r>
+              <a:rPr lang="en-US" dirty="0"/>
+              <a:t>So statistically, both the emotion label and LPP carry unique information, and LPP’s relationship with recall depends on emotion.</a:t>
+            </a:r>
+          </a:p>
+          <a:p>
+            <a:r>
+              <a:rPr lang="en-US" dirty="0"/>
+              <a:t>What this analysis doesn’t tell us is how those factors enter the recall process. That’s where the cognitive modelling comes in: we’ll ask whether different ways of using emotion labels and LPP in an encoding rule can all reproduce this pattern, or whether some mechanistic stories can be ruled out.”</a:t>
+            </a:r>
           </a:p>
         </p:txBody>
       </p:sp>
@@ -4017,19 +4455,28 @@
           <a:p>
             <a:r>
               <a:rPr lang="en-US" dirty="0"/>
-              <a:t>“One way to connect a model to data is to pick a few summary curves – a serial-position curve, maybe a binned LPP–recall curve – and tune parameters so those curves line up.”</a:t>
-            </a:r>
-          </a:p>
-          <a:p>
-            <a:r>
-              <a:rPr lang="en-US" dirty="0"/>
-              <a:t>“That approach is very common and often useful, but it forces you to choose which summaries matter and how to weight them, and it ignores a lot of the trial-by-trial structure the model actually predicts.”</a:t>
-            </a:r>
-          </a:p>
-          <a:p>
-            <a:r>
-              <a:rPr lang="en-US" dirty="0"/>
-              <a:t>“Because we care about relatively subtle differences between models in how they treat LPP, we’re going to use a likelihood-based approach instead: treat the model as a generator of recall sets and ask, for each parameter setting, how probable the actually observed recall sets are.”</a:t>
+              <a:t>One way to connect a model to data is to pick a few summary curves – a serial-position curve, maybe a binned LPP–recall curve – and tune parameters so those curves line up.</a:t>
+            </a:r>
+          </a:p>
+          <a:p>
+            <a:r>
+              <a:rPr lang="en-US" dirty="0"/>
+              <a:t>That approach is very common and often useful, but it forces you to choose which summaries matter and how to weight them, and it ignores a lot of the trial-by-trial structure the model actually predicts.</a:t>
+            </a:r>
+          </a:p>
+          <a:p>
+            <a:r>
+              <a:rPr lang="en-US" dirty="0"/>
+              <a:t>If there are patterns in your data not contacted by your summaries, your evaluation totally sidesteps them, providing an incomplete picture of how well your model explains the data.</a:t>
+            </a:r>
+          </a:p>
+          <a:p>
+            <a:endParaRPr lang="en-US" dirty="0"/>
+          </a:p>
+          <a:p>
+            <a:r>
+              <a:rPr lang="en-US" dirty="0"/>
+              <a:t>Because we care about relatively subtle differences in how models treat LPP and want all our data’s structure to contribute to evaluation, we’re going to use a likelihood-based approach instead: treat the model as a generator of recall sets and ask, for each parameter setting, how probable the actually observed recall sets are under that model.</a:t>
             </a:r>
           </a:p>
           <a:p>
@@ -7687,30 +8134,19 @@
             <p:ph idx="1"/>
           </p:nvPr>
         </p:nvSpPr>
-        <p:spPr/>
+        <p:spPr>
+          <a:xfrm>
+            <a:off x="405692" y="1628800"/>
+            <a:ext cx="8374063" cy="4067175"/>
+          </a:xfrm>
+        </p:spPr>
         <p:txBody>
           <a:bodyPr/>
           <a:lstStyle/>
           <a:p>
             <a:r>
               <a:rPr lang="en-US" dirty="0"/>
-              <a:t>In Zarubin et al., for each </a:t>
-            </a:r>
-            <a:r>
-              <a:rPr lang="en-US" b="1" dirty="0"/>
-              <a:t>list</a:t>
-            </a:r>
-            <a:r>
-              <a:rPr lang="en-US" dirty="0"/>
-              <a:t> we know, for each </a:t>
-            </a:r>
-            <a:r>
-              <a:rPr lang="en-US" b="1" dirty="0"/>
-              <a:t>item</a:t>
-            </a:r>
-            <a:r>
-              <a:rPr lang="en-US" dirty="0"/>
-              <a:t>: emotion label, Early LPP at encoding, and whether it was recalled.</a:t>
+              <a:t>In this dataset, for each list and item we know: emotion label, Early LPP at encoding, and whether it was recalled.</a:t>
             </a:r>
           </a:p>
           <a:p>
@@ -7738,13 +8174,13 @@
             </a:r>
             <a:r>
               <a:rPr lang="en-US" dirty="0"/>
-              <a:t> Sₜ, not a full recall sequence.</a:t>
-            </a:r>
-          </a:p>
-          <a:p>
-            <a:r>
-              <a:rPr lang="en-US" dirty="0"/>
-              <a:t>We look at all the sequences that would result in that recalled set – different orders – and we aggregate their probabilities under the model</a:t>
+              <a:t>, not a full recall sequence.</a:t>
+            </a:r>
+          </a:p>
+          <a:p>
+            <a:r>
+              <a:rPr lang="en-US" dirty="0"/>
+              <a:t>To keep using a generative recall model, we look at all the sequences that would result in that recalled set – different orders – and we aggregate their probabilities under the model</a:t>
             </a:r>
           </a:p>
           <a:p>
@@ -7900,7 +8336,7 @@
           <p:cNvPr id="2" name="Title 1">
             <a:extLst>
               <a:ext uri="{FF2B5EF4-FFF2-40B4-BE49-F238E27FC236}">
-                <a16:creationId xmlns:a16="http://schemas.microsoft.com/office/drawing/2014/main" id="{9302793A-6973-82EA-F358-150B476BD30C}"/>
+                <a16:creationId xmlns:a16="http://schemas.microsoft.com/office/drawing/2014/main" id="{5A48283D-F1A4-2844-0580-5439D7DA6E23}"/>
               </a:ext>
             </a:extLst>
           </p:cNvPr>
@@ -7911,19 +8347,14 @@
             <p:ph type="title"/>
           </p:nvPr>
         </p:nvSpPr>
-        <p:spPr>
-          <a:xfrm>
-            <a:off x="382588" y="260648"/>
-            <a:ext cx="8375650" cy="423862"/>
-          </a:xfrm>
-        </p:spPr>
+        <p:spPr/>
         <p:txBody>
           <a:bodyPr/>
           <a:lstStyle/>
           <a:p>
             <a:r>
               <a:rPr lang="en-US" dirty="0"/>
-              <a:t>GLMM: emotion, LPP, and LPP × emotion interaction in recall.</a:t>
+              <a:t>Choosing models: general principles</a:t>
             </a:r>
           </a:p>
         </p:txBody>
@@ -7933,7 +8364,7 @@
           <p:cNvPr id="3" name="Content Placeholder 2">
             <a:extLst>
               <a:ext uri="{FF2B5EF4-FFF2-40B4-BE49-F238E27FC236}">
-                <a16:creationId xmlns:a16="http://schemas.microsoft.com/office/drawing/2014/main" id="{2276FD34-47D6-76E9-1336-FA76E070FEA5}"/>
+                <a16:creationId xmlns:a16="http://schemas.microsoft.com/office/drawing/2014/main" id="{011B9901-D3E5-4DDC-A5B9-0A564BD3FC72}"/>
               </a:ext>
             </a:extLst>
           </p:cNvPr>
@@ -7949,58 +8380,35 @@
           <a:bodyPr/>
           <a:lstStyle/>
           <a:p>
-            <a:pPr lvl="1"/>
-            <a:r>
-              <a:rPr lang="en-US" b="1" dirty="0"/>
-              <a:t>Story A: additive encoding + competition</a:t>
-            </a:r>
-            <a:endParaRPr lang="en-US" dirty="0"/>
-          </a:p>
-          <a:p>
-            <a:pPr lvl="2"/>
-            <a:r>
-              <a:rPr lang="en-US" dirty="0"/>
-              <a:t>Emotion and LPP each contribute to encoding strength.</a:t>
-            </a:r>
-          </a:p>
-          <a:p>
-            <a:pPr lvl="2"/>
-            <a:r>
-              <a:rPr lang="en-US" dirty="0"/>
-              <a:t>Any LPP × emotion interaction in recall emerges from nonlinear competition at retrieval.</a:t>
-            </a:r>
-          </a:p>
-          <a:p>
-            <a:pPr lvl="1"/>
-            <a:r>
-              <a:rPr lang="en-US" b="1" dirty="0"/>
-              <a:t>Story B: explicit encoding interaction</a:t>
-            </a:r>
-            <a:endParaRPr lang="en-US" dirty="0"/>
-          </a:p>
-          <a:p>
-            <a:pPr lvl="2"/>
-            <a:r>
-              <a:rPr lang="en-US" dirty="0"/>
-              <a:t>Encoding strength includes an explicit Emotion × LPP term.</a:t>
-            </a:r>
-          </a:p>
-          <a:p>
-            <a:pPr lvl="2"/>
-            <a:r>
-              <a:rPr lang="en-US" dirty="0"/>
-              <a:t>Emotional items get an extra LPP-dependent boost in the learning rule.</a:t>
-            </a:r>
-          </a:p>
-          <a:p>
-            <a:endParaRPr lang="en-US" dirty="0"/>
+            <a:r>
+              <a:rPr lang="en-US" dirty="0"/>
+              <a:t>Change one mechanistic ingredient at a time (here: how LPP and emotion enter encoding).</a:t>
+            </a:r>
+          </a:p>
+          <a:p>
+            <a:r>
+              <a:rPr lang="en-US" dirty="0"/>
+              <a:t>Include a psychologically meaningful baseline (here: an emotion-only model).</a:t>
+            </a:r>
+          </a:p>
+          <a:p>
+            <a:r>
+              <a:rPr lang="en-US" dirty="0"/>
+              <a:t>Ensure each model corresponds to a verbal story you can explain in a couple of sentences.</a:t>
+            </a:r>
+          </a:p>
+          <a:p>
+            <a:r>
+              <a:rPr lang="en-US" dirty="0"/>
+              <a:t>Aim to ask whether the data clearly disfavor a given ingredient, clearly favor it, or leave it underdetermined.</a:t>
+            </a:r>
           </a:p>
         </p:txBody>
       </p:sp>
     </p:spTree>
     <p:extLst>
       <p:ext uri="{BB962C8B-B14F-4D97-AF65-F5344CB8AC3E}">
-        <p14:creationId xmlns:p14="http://schemas.microsoft.com/office/powerpoint/2010/main" val="3027802869"/>
+        <p14:creationId xmlns:p14="http://schemas.microsoft.com/office/powerpoint/2010/main" val="581430304"/>
       </p:ext>
     </p:extLst>
   </p:cSld>
@@ -8011,6 +8419,178 @@
 </file>
 
 <file path=ppt/slides/slide14.xml><?xml version="1.0" encoding="utf-8"?>
+<p:sld xmlns:a="http://schemas.openxmlformats.org/drawingml/2006/main" xmlns:r="http://schemas.openxmlformats.org/officeDocument/2006/relationships" xmlns:p="http://schemas.openxmlformats.org/presentationml/2006/main">
+  <p:cSld>
+    <p:spTree>
+      <p:nvGrpSpPr>
+        <p:cNvPr id="1" name="">
+          <a:extLst>
+            <a:ext uri="{FF2B5EF4-FFF2-40B4-BE49-F238E27FC236}">
+              <a16:creationId xmlns:a16="http://schemas.microsoft.com/office/drawing/2014/main" id="{BE532CDE-7EA1-C170-99CF-1F82663C4BD8}"/>
+            </a:ext>
+          </a:extLst>
+        </p:cNvPr>
+        <p:cNvGrpSpPr/>
+        <p:nvPr/>
+      </p:nvGrpSpPr>
+      <p:grpSpPr>
+        <a:xfrm>
+          <a:off x="0" y="0"/>
+          <a:ext cx="0" cy="0"/>
+          <a:chOff x="0" y="0"/>
+          <a:chExt cx="0" cy="0"/>
+        </a:xfrm>
+      </p:grpSpPr>
+      <p:sp>
+        <p:nvSpPr>
+          <p:cNvPr id="2" name="Title 1">
+            <a:extLst>
+              <a:ext uri="{FF2B5EF4-FFF2-40B4-BE49-F238E27FC236}">
+                <a16:creationId xmlns:a16="http://schemas.microsoft.com/office/drawing/2014/main" id="{0AC115BF-0EB2-444F-E67A-F7AE65FC147A}"/>
+              </a:ext>
+            </a:extLst>
+          </p:cNvPr>
+          <p:cNvSpPr>
+            <a:spLocks noGrp="1"/>
+          </p:cNvSpPr>
+          <p:nvPr>
+            <p:ph type="title"/>
+          </p:nvPr>
+        </p:nvSpPr>
+        <p:spPr/>
+        <p:txBody>
+          <a:bodyPr/>
+          <a:lstStyle/>
+          <a:p>
+            <a:r>
+              <a:rPr lang="en-US" dirty="0"/>
+              <a:t>What could ‘LPP as a stand-in for emotion’ mean?</a:t>
+            </a:r>
+            <a:endParaRPr lang="en-US" i="1" dirty="0"/>
+          </a:p>
+        </p:txBody>
+      </p:sp>
+      <p:sp>
+        <p:nvSpPr>
+          <p:cNvPr id="3" name="Content Placeholder 2">
+            <a:extLst>
+              <a:ext uri="{FF2B5EF4-FFF2-40B4-BE49-F238E27FC236}">
+                <a16:creationId xmlns:a16="http://schemas.microsoft.com/office/drawing/2014/main" id="{8FFA0C77-D35E-EBD7-D259-F7CA3370AF61}"/>
+              </a:ext>
+            </a:extLst>
+          </p:cNvPr>
+          <p:cNvSpPr>
+            <a:spLocks noGrp="1"/>
+          </p:cNvSpPr>
+          <p:nvPr>
+            <p:ph idx="1"/>
+          </p:nvPr>
+        </p:nvSpPr>
+        <p:spPr>
+          <a:xfrm>
+            <a:off x="361305" y="1395412"/>
+            <a:ext cx="8374063" cy="4067175"/>
+          </a:xfrm>
+        </p:spPr>
+        <p:txBody>
+          <a:bodyPr/>
+          <a:lstStyle/>
+          <a:p>
+            <a:pPr>
+              <a:spcAft>
+                <a:spcPts val="600"/>
+              </a:spcAft>
+            </a:pPr>
+            <a:r>
+              <a:rPr lang="en-US" dirty="0"/>
+              <a:t>Our statistical model and plots so far tell us:</a:t>
+            </a:r>
+          </a:p>
+          <a:p>
+            <a:pPr lvl="1">
+              <a:spcAft>
+                <a:spcPts val="600"/>
+              </a:spcAft>
+            </a:pPr>
+            <a:r>
+              <a:rPr lang="en-US" dirty="0"/>
+              <a:t>Emotion label and Early LPP each predict recall; both matter.</a:t>
+            </a:r>
+          </a:p>
+          <a:p>
+            <a:pPr lvl="1"/>
+            <a:r>
+              <a:rPr lang="en-US" dirty="0"/>
+              <a:t>LPP is higher on average for negative items, and highest for recalled negatives.</a:t>
+            </a:r>
+          </a:p>
+          <a:p>
+            <a:pPr>
+              <a:spcAft>
+                <a:spcPts val="600"/>
+              </a:spcAft>
+            </a:pPr>
+            <a:r>
+              <a:rPr lang="en-US" dirty="0"/>
+              <a:t>“LPP as stand-in for emotion” can mean at least two things:</a:t>
+            </a:r>
+          </a:p>
+          <a:p>
+            <a:pPr marL="728663" lvl="1" indent="-457200">
+              <a:spcAft>
+                <a:spcPts val="600"/>
+              </a:spcAft>
+              <a:buFont typeface="+mj-lt"/>
+              <a:buAutoNum type="arabicPeriod"/>
+            </a:pPr>
+            <a:r>
+              <a:rPr lang="en-US" b="1" dirty="0"/>
+              <a:t>Strong version:</a:t>
+            </a:r>
+            <a:r>
+              <a:rPr lang="en-US" dirty="0"/>
+              <a:t> drop the emotion label; LPP alone drives the “emotional” mechanism.</a:t>
+            </a:r>
+          </a:p>
+          <a:p>
+            <a:pPr marL="728663" lvl="1" indent="-457200">
+              <a:buFont typeface="+mj-lt"/>
+              <a:buAutoNum type="arabicPeriod"/>
+            </a:pPr>
+            <a:r>
+              <a:rPr lang="en-US" b="1" dirty="0"/>
+              <a:t>Weaker version:</a:t>
+            </a:r>
+            <a:r>
+              <a:rPr lang="en-US" dirty="0"/>
+              <a:t> LPP is the graded input to an emotional channel in the model, but condition labels may still carry extra information (e.g., list-level or semantic effects).</a:t>
+            </a:r>
+          </a:p>
+          <a:p>
+            <a:pPr marL="0" indent="0">
+              <a:buNone/>
+            </a:pPr>
+            <a:r>
+              <a:rPr lang="en-US" dirty="0"/>
+              <a:t>Our analyses against the strong “LPP replaces emotion label” story, but do not tell us whether a model that only sees LPP can behave like one that gets explicit emotion labels as an input.</a:t>
+            </a:r>
+          </a:p>
+        </p:txBody>
+      </p:sp>
+    </p:spTree>
+    <p:extLst>
+      <p:ext uri="{BB962C8B-B14F-4D97-AF65-F5344CB8AC3E}">
+        <p14:creationId xmlns:p14="http://schemas.microsoft.com/office/powerpoint/2010/main" val="123372744"/>
+      </p:ext>
+    </p:extLst>
+  </p:cSld>
+  <p:clrMapOvr>
+    <a:masterClrMapping/>
+  </p:clrMapOvr>
+</p:sld>
+</file>
+
+<file path=ppt/slides/slide15.xml><?xml version="1.0" encoding="utf-8"?>
 <p:sld xmlns:a="http://schemas.openxmlformats.org/drawingml/2006/main" xmlns:r="http://schemas.openxmlformats.org/officeDocument/2006/relationships" xmlns:p="http://schemas.openxmlformats.org/presentationml/2006/main">
   <p:cSld>
     <p:spTree>
@@ -8824,209 +9404,6 @@
 </p:sld>
 </file>
 
-<file path=ppt/slides/slide15.xml><?xml version="1.0" encoding="utf-8"?>
-<p:sld xmlns:a="http://schemas.openxmlformats.org/drawingml/2006/main" xmlns:r="http://schemas.openxmlformats.org/officeDocument/2006/relationships" xmlns:p="http://schemas.openxmlformats.org/presentationml/2006/main">
-  <p:cSld>
-    <p:spTree>
-      <p:nvGrpSpPr>
-        <p:cNvPr id="1" name=""/>
-        <p:cNvGrpSpPr/>
-        <p:nvPr/>
-      </p:nvGrpSpPr>
-      <p:grpSpPr>
-        <a:xfrm>
-          <a:off x="0" y="0"/>
-          <a:ext cx="0" cy="0"/>
-          <a:chOff x="0" y="0"/>
-          <a:chExt cx="0" cy="0"/>
-        </a:xfrm>
-      </p:grpSpPr>
-      <p:sp>
-        <p:nvSpPr>
-          <p:cNvPr id="2" name="Title 1">
-            <a:extLst>
-              <a:ext uri="{FF2B5EF4-FFF2-40B4-BE49-F238E27FC236}">
-                <a16:creationId xmlns:a16="http://schemas.microsoft.com/office/drawing/2014/main" id="{AAED3A36-B4BA-EA4C-FAA1-67DC60300172}"/>
-              </a:ext>
-            </a:extLst>
-          </p:cNvPr>
-          <p:cNvSpPr>
-            <a:spLocks noGrp="1"/>
-          </p:cNvSpPr>
-          <p:nvPr>
-            <p:ph type="title"/>
-          </p:nvPr>
-        </p:nvSpPr>
-        <p:spPr>
-          <a:xfrm>
-            <a:off x="353726" y="260648"/>
-            <a:ext cx="8375650" cy="423862"/>
-          </a:xfrm>
-        </p:spPr>
-        <p:txBody>
-          <a:bodyPr/>
-          <a:lstStyle/>
-          <a:p>
-            <a:r>
-              <a:rPr lang="en-US" dirty="0"/>
-              <a:t>Three models: emotion-only, EEG main effects, EEG interaction</a:t>
-            </a:r>
-          </a:p>
-        </p:txBody>
-      </p:sp>
-      <p:sp>
-        <p:nvSpPr>
-          <p:cNvPr id="3" name="Content Placeholder 2">
-            <a:extLst>
-              <a:ext uri="{FF2B5EF4-FFF2-40B4-BE49-F238E27FC236}">
-                <a16:creationId xmlns:a16="http://schemas.microsoft.com/office/drawing/2014/main" id="{1EBA6170-CADA-4996-FD26-2BBD5701E5C5}"/>
-              </a:ext>
-            </a:extLst>
-          </p:cNvPr>
-          <p:cNvSpPr>
-            <a:spLocks noGrp="1"/>
-          </p:cNvSpPr>
-          <p:nvPr>
-            <p:ph idx="1"/>
-          </p:nvPr>
-        </p:nvSpPr>
-        <p:spPr/>
-        <p:txBody>
-          <a:bodyPr/>
-          <a:lstStyle/>
-          <a:p>
-            <a:pPr>
-              <a:spcAft>
-                <a:spcPts val="0"/>
-              </a:spcAft>
-            </a:pPr>
-            <a:r>
-              <a:rPr lang="en-US" b="1" dirty="0"/>
-              <a:t>Model 0 – Emotion-only</a:t>
-            </a:r>
-            <a:endParaRPr lang="en-US" dirty="0"/>
-          </a:p>
-          <a:p>
-            <a:pPr lvl="1">
-              <a:spcAft>
-                <a:spcPts val="0"/>
-              </a:spcAft>
-            </a:pPr>
-            <a:r>
-              <a:rPr lang="en-US" dirty="0"/>
-              <a:t>Encoding: Sᵢ depends on emotion label only (neg vs neutral); LPP is ignored.</a:t>
-            </a:r>
-          </a:p>
-          <a:p>
-            <a:pPr lvl="1">
-              <a:spcAft>
-                <a:spcPts val="0"/>
-              </a:spcAft>
-            </a:pPr>
-            <a:r>
-              <a:rPr lang="en-US" dirty="0"/>
-              <a:t>Retrieval: as in Slide 2.</a:t>
-            </a:r>
-          </a:p>
-          <a:p>
-            <a:pPr>
-              <a:spcAft>
-                <a:spcPts val="0"/>
-              </a:spcAft>
-            </a:pPr>
-            <a:r>
-              <a:rPr lang="en-US" b="1" dirty="0"/>
-              <a:t>Model 1 – EEG main-effects</a:t>
-            </a:r>
-            <a:endParaRPr lang="en-US" dirty="0"/>
-          </a:p>
-          <a:p>
-            <a:pPr lvl="1">
-              <a:spcAft>
-                <a:spcPts val="0"/>
-              </a:spcAft>
-            </a:pPr>
-            <a:r>
-              <a:rPr lang="en-US" dirty="0"/>
-              <a:t>Encoding: Sᵢ = f(emotion, LPP) with additive contributions (no explicit Emotion × LPP term).</a:t>
-            </a:r>
-          </a:p>
-          <a:p>
-            <a:pPr lvl="1">
-              <a:spcAft>
-                <a:spcPts val="0"/>
-              </a:spcAft>
-            </a:pPr>
-            <a:r>
-              <a:rPr lang="en-US" b="1" dirty="0"/>
-              <a:t>Story</a:t>
-            </a:r>
-            <a:r>
-              <a:rPr lang="en-US" dirty="0"/>
-              <a:t>: any LPP × emotion interaction in recall must emerge from the retrieval competition (Story A).</a:t>
-            </a:r>
-          </a:p>
-          <a:p>
-            <a:pPr>
-              <a:spcAft>
-                <a:spcPts val="0"/>
-              </a:spcAft>
-            </a:pPr>
-            <a:r>
-              <a:rPr lang="en-US" b="1" dirty="0"/>
-              <a:t>Model 2 – EEG interaction</a:t>
-            </a:r>
-            <a:endParaRPr lang="en-US" dirty="0"/>
-          </a:p>
-          <a:p>
-            <a:pPr lvl="1">
-              <a:spcAft>
-                <a:spcPts val="0"/>
-              </a:spcAft>
-            </a:pPr>
-            <a:r>
-              <a:rPr lang="en-US" dirty="0"/>
-              <a:t>Encoding: Sᵢ = f(emotion, LPP, emotion × LPP); explicit interaction term.</a:t>
-            </a:r>
-          </a:p>
-          <a:p>
-            <a:pPr lvl="1">
-              <a:spcAft>
-                <a:spcPts val="0"/>
-              </a:spcAft>
-            </a:pPr>
-            <a:r>
-              <a:rPr lang="en-US" b="1" dirty="0"/>
-              <a:t>Story</a:t>
-            </a:r>
-            <a:r>
-              <a:rPr lang="en-US" dirty="0"/>
-              <a:t>: the interaction is present in the learning rule itself (Story B).</a:t>
-            </a:r>
-          </a:p>
-          <a:p>
-            <a:pPr>
-              <a:spcAft>
-                <a:spcPts val="0"/>
-              </a:spcAft>
-            </a:pPr>
-            <a:endParaRPr lang="en-US" dirty="0"/>
-          </a:p>
-        </p:txBody>
-      </p:sp>
-    </p:spTree>
-    <p:extLst>
-      <p:ext uri="{BB962C8B-B14F-4D97-AF65-F5344CB8AC3E}">
-        <p14:creationId xmlns:p14="http://schemas.microsoft.com/office/powerpoint/2010/main" val="1223163322"/>
-      </p:ext>
-    </p:extLst>
-  </p:cSld>
-  <p:clrMapOvr>
-    <a:masterClrMapping/>
-  </p:clrMapOvr>
-</p:sld>
-</file>
-
 <file path=ppt/slides/slide16.xml><?xml version="1.0" encoding="utf-8"?>
 <p:sld xmlns:a="http://schemas.openxmlformats.org/drawingml/2006/main" xmlns:r="http://schemas.openxmlformats.org/officeDocument/2006/relationships" xmlns:p="http://schemas.openxmlformats.org/presentationml/2006/main">
   <p:cSld>
@@ -9049,7 +9426,7 @@
           <p:cNvPr id="2" name="Title 1">
             <a:extLst>
               <a:ext uri="{FF2B5EF4-FFF2-40B4-BE49-F238E27FC236}">
-                <a16:creationId xmlns:a16="http://schemas.microsoft.com/office/drawing/2014/main" id="{5A48283D-F1A4-2844-0580-5439D7DA6E23}"/>
+                <a16:creationId xmlns:a16="http://schemas.microsoft.com/office/drawing/2014/main" id="{AAED3A36-B4BA-EA4C-FAA1-67DC60300172}"/>
               </a:ext>
             </a:extLst>
           </p:cNvPr>
@@ -9060,14 +9437,19 @@
             <p:ph type="title"/>
           </p:nvPr>
         </p:nvSpPr>
-        <p:spPr/>
+        <p:spPr>
+          <a:xfrm>
+            <a:off x="353726" y="260648"/>
+            <a:ext cx="8375650" cy="423862"/>
+          </a:xfrm>
+        </p:spPr>
         <p:txBody>
           <a:bodyPr/>
           <a:lstStyle/>
           <a:p>
             <a:r>
               <a:rPr lang="en-US" dirty="0"/>
-              <a:t>Choosing models: general principles</a:t>
+              <a:t>Three encoding models we’ll test</a:t>
             </a:r>
           </a:p>
         </p:txBody>
@@ -9077,7 +9459,7 @@
           <p:cNvPr id="3" name="Content Placeholder 2">
             <a:extLst>
               <a:ext uri="{FF2B5EF4-FFF2-40B4-BE49-F238E27FC236}">
-                <a16:creationId xmlns:a16="http://schemas.microsoft.com/office/drawing/2014/main" id="{011B9901-D3E5-4DDC-A5B9-0A564BD3FC72}"/>
+                <a16:creationId xmlns:a16="http://schemas.microsoft.com/office/drawing/2014/main" id="{1EBA6170-CADA-4996-FD26-2BBD5701E5C5}"/>
               </a:ext>
             </a:extLst>
           </p:cNvPr>
@@ -9088,32 +9470,144 @@
             <p:ph idx="1"/>
           </p:nvPr>
         </p:nvSpPr>
-        <p:spPr/>
+        <p:spPr>
+          <a:xfrm>
+            <a:off x="343457" y="1395412"/>
+            <a:ext cx="8374063" cy="4067175"/>
+          </a:xfrm>
+        </p:spPr>
         <p:txBody>
           <a:bodyPr/>
           <a:lstStyle/>
           <a:p>
-            <a:r>
-              <a:rPr lang="en-US" dirty="0"/>
-              <a:t>Change one mechanistic ingredient at a time (here: how LPP and emotion enter encoding).</a:t>
-            </a:r>
-          </a:p>
-          <a:p>
-            <a:r>
-              <a:rPr lang="en-US" dirty="0"/>
-              <a:t>Include a psychologically meaningful baseline (here: an emotion-only model).</a:t>
-            </a:r>
-          </a:p>
-          <a:p>
-            <a:r>
-              <a:rPr lang="en-US" dirty="0"/>
-              <a:t>Ensure each model corresponds to a verbal story you can explain in a couple of sentences.</a:t>
-            </a:r>
-          </a:p>
-          <a:p>
-            <a:r>
-              <a:rPr lang="en-US" dirty="0"/>
-              <a:t>Aim to ask whether the data clearly disfavor a given ingredient, clearly favor it, or leave it underdetermined.</a:t>
+            <a:pPr>
+              <a:spcAft>
+                <a:spcPts val="0"/>
+              </a:spcAft>
+            </a:pPr>
+            <a:r>
+              <a:rPr lang="en-US" b="1" dirty="0"/>
+              <a:t>Model 0 – Emotion-only</a:t>
+            </a:r>
+            <a:endParaRPr lang="en-US" dirty="0"/>
+          </a:p>
+          <a:p>
+            <a:pPr lvl="1">
+              <a:spcAft>
+                <a:spcPts val="0"/>
+              </a:spcAft>
+            </a:pPr>
+            <a:r>
+              <a:rPr lang="en-US" dirty="0"/>
+              <a:t>Encoding: Sᵢ depends only on whether the item is negative or neutral</a:t>
+            </a:r>
+          </a:p>
+          <a:p>
+            <a:pPr lvl="1">
+              <a:spcAft>
+                <a:spcPts val="1200"/>
+              </a:spcAft>
+            </a:pPr>
+            <a:r>
+              <a:rPr lang="en-US" dirty="0"/>
+              <a:t>LPP is ignored.</a:t>
+            </a:r>
+          </a:p>
+          <a:p>
+            <a:pPr>
+              <a:spcAft>
+                <a:spcPts val="0"/>
+              </a:spcAft>
+            </a:pPr>
+            <a:r>
+              <a:rPr lang="en-US" b="1" dirty="0"/>
+              <a:t>Model 1 – LPP only</a:t>
+            </a:r>
+            <a:endParaRPr lang="en-US" dirty="0"/>
+          </a:p>
+          <a:p>
+            <a:pPr lvl="1">
+              <a:spcAft>
+                <a:spcPts val="0"/>
+              </a:spcAft>
+            </a:pPr>
+            <a:r>
+              <a:rPr lang="en-US" dirty="0"/>
+              <a:t>Encoding: Sᵢ depends only on the item’s Early LPP amplitude</a:t>
+            </a:r>
+          </a:p>
+          <a:p>
+            <a:pPr lvl="1">
+              <a:spcAft>
+                <a:spcPts val="1200"/>
+              </a:spcAft>
+            </a:pPr>
+            <a:r>
+              <a:rPr lang="en-US" dirty="0"/>
+              <a:t>Emotion labels are ignored</a:t>
+            </a:r>
+          </a:p>
+          <a:p>
+            <a:pPr>
+              <a:spcAft>
+                <a:spcPts val="0"/>
+              </a:spcAft>
+            </a:pPr>
+            <a:r>
+              <a:rPr lang="en-US" b="1" dirty="0"/>
+              <a:t>Model 2 – EEG interaction</a:t>
+            </a:r>
+            <a:endParaRPr lang="en-US" dirty="0"/>
+          </a:p>
+          <a:p>
+            <a:pPr lvl="1">
+              <a:spcAft>
+                <a:spcPts val="0"/>
+              </a:spcAft>
+            </a:pPr>
+            <a:r>
+              <a:rPr lang="en-US" dirty="0"/>
+              <a:t>Encoding: Sᵢ depends only on the item’s Early LPP amplitude</a:t>
+            </a:r>
+          </a:p>
+          <a:p>
+            <a:pPr lvl="1">
+              <a:spcAft>
+                <a:spcPts val="1200"/>
+              </a:spcAft>
+            </a:pPr>
+            <a:r>
+              <a:rPr lang="en-US" dirty="0"/>
+              <a:t>Model sees a binary emotion factor </a:t>
+            </a:r>
+            <a:r>
+              <a:rPr lang="en-US" i="1" dirty="0"/>
+              <a:t>and</a:t>
+            </a:r>
+            <a:r>
+              <a:rPr lang="en-US" dirty="0"/>
+              <a:t> graded neural signal</a:t>
+            </a:r>
+          </a:p>
+          <a:p>
+            <a:pPr marL="271463" lvl="1" indent="0">
+              <a:spcAft>
+                <a:spcPts val="1200"/>
+              </a:spcAft>
+              <a:buNone/>
+            </a:pPr>
+            <a:endParaRPr lang="en-US" dirty="0"/>
+          </a:p>
+          <a:p>
+            <a:pPr marL="271463" lvl="1" indent="0">
+              <a:spcAft>
+                <a:spcPts val="1200"/>
+              </a:spcAft>
+              <a:buNone/>
+            </a:pPr>
+            <a:r>
+              <a:rPr lang="en-US" dirty="0"/>
+              <a:t>Retrieval dynamics (context &amp; competition) are identical in all three models; only the encoding rule changes.</a:t>
             </a:r>
           </a:p>
         </p:txBody>
@@ -9121,7 +9615,7 @@
     </p:spTree>
     <p:extLst>
       <p:ext uri="{BB962C8B-B14F-4D97-AF65-F5344CB8AC3E}">
-        <p14:creationId xmlns:p14="http://schemas.microsoft.com/office/powerpoint/2010/main" val="581430304"/>
+        <p14:creationId xmlns:p14="http://schemas.microsoft.com/office/powerpoint/2010/main" val="1223163322"/>
       </p:ext>
     </p:extLst>
   </p:cSld>
@@ -9198,9 +9692,50 @@
           <a:lstStyle/>
           <a:p>
             <a:r>
-              <a:rPr lang="en-US" dirty="0"/>
-              <a:t>Set-based log likelihood per subject and model -&gt; </a:t>
-            </a:r>
+              <a:rPr lang="en-US" dirty="0" err="1"/>
+              <a:t>logL</a:t>
+            </a:r>
+            <a:r>
+              <a:rPr lang="en-US" baseline="-25000" dirty="0" err="1"/>
+              <a:t>s,m</a:t>
+            </a:r>
+            <a:r>
+              <a:rPr lang="en-US" dirty="0"/>
+              <a:t>: set-based log likelihood for subject </a:t>
+            </a:r>
+            <a:r>
+              <a:rPr lang="en-US" i="1" dirty="0"/>
+              <a:t>s </a:t>
+            </a:r>
+            <a:r>
+              <a:rPr lang="en-US" dirty="0"/>
+              <a:t>under model </a:t>
+            </a:r>
+            <a:r>
+              <a:rPr lang="en-US" i="1" dirty="0"/>
+              <a:t>m</a:t>
+            </a:r>
+          </a:p>
+          <a:p>
+            <a:r>
+              <a:rPr lang="en-US" dirty="0"/>
+              <a:t>k</a:t>
+            </a:r>
+            <a:r>
+              <a:rPr lang="en-US" baseline="-25000" dirty="0"/>
+              <a:t>m</a:t>
+            </a:r>
+            <a:r>
+              <a:rPr lang="en-US" dirty="0"/>
+              <a:t>: number of free parameters in model </a:t>
+            </a:r>
+            <a:r>
+              <a:rPr lang="en-US" i="1" dirty="0"/>
+              <a:t>m</a:t>
+            </a:r>
+            <a:endParaRPr lang="en-US" dirty="0"/>
+          </a:p>
+          <a:p>
             <a:r>
               <a:rPr lang="en-US" dirty="0" err="1"/>
               <a:t>AIC</a:t>
@@ -9209,43 +9744,32 @@
               <a:rPr lang="en-US" baseline="-25000" dirty="0" err="1"/>
               <a:t>s,m</a:t>
             </a:r>
-            <a:endParaRPr lang="en-US" baseline="-25000" dirty="0"/>
-          </a:p>
-          <a:p>
+            <a:r>
+              <a:rPr lang="en-US" dirty="0"/>
+              <a:t> = 2 * k</a:t>
+            </a:r>
+            <a:r>
+              <a:rPr lang="en-US" baseline="-25000" dirty="0"/>
+              <a:t>m</a:t>
+            </a:r>
+            <a:r>
+              <a:rPr lang="en-US" dirty="0"/>
+              <a:t> - 2 * </a:t>
+            </a:r>
             <a:r>
               <a:rPr lang="en-US" dirty="0" err="1"/>
-              <a:t>AIC</a:t>
+              <a:t>logL</a:t>
             </a:r>
             <a:r>
               <a:rPr lang="en-US" baseline="-25000" dirty="0" err="1"/>
               <a:t>s,m</a:t>
             </a:r>
-            <a:r>
-              <a:rPr lang="en-US" dirty="0"/>
-              <a:t> = 2 * k</a:t>
-            </a:r>
-            <a:r>
-              <a:rPr lang="en-US" baseline="-25000" dirty="0"/>
-              <a:t>m</a:t>
-            </a:r>
-            <a:r>
-              <a:rPr lang="en-US" dirty="0"/>
-              <a:t> - 2 * </a:t>
-            </a:r>
-            <a:r>
-              <a:rPr lang="en-US" dirty="0" err="1"/>
-              <a:t>logL</a:t>
-            </a:r>
-            <a:r>
-              <a:rPr lang="en-US" baseline="-25000" dirty="0" err="1"/>
-              <a:t>s,m</a:t>
-            </a:r>
             <a:endParaRPr lang="en-US" baseline="-25000" dirty="0"/>
           </a:p>
           <a:p>
             <a:r>
               <a:rPr lang="en-US" dirty="0"/>
-              <a:t>Lower AIC ~ better expected predictive performance for that subject (fit - complexity penalty).</a:t>
+              <a:t>Lower AIC ≈ better expected predictive performance for that subject (fit - complexity penalty).</a:t>
             </a:r>
           </a:p>
           <a:p>
@@ -9310,8 +9834,12 @@
           <a:lstStyle/>
           <a:p>
             <a:r>
-              <a:rPr lang="en-US" dirty="0"/>
-              <a:t>Main-effects vs interaction: effectively tied on this dataset</a:t>
+              <a:rPr lang="en-US" dirty="0" err="1"/>
+              <a:t>Emotion+LPP</a:t>
+            </a:r>
+            <a:r>
+              <a:rPr lang="en-US" dirty="0"/>
+              <a:t> clearly best; LPP-only clearly worst</a:t>
             </a:r>
           </a:p>
         </p:txBody>
@@ -9332,56 +9860,69 @@
             <p:ph idx="1"/>
           </p:nvPr>
         </p:nvSpPr>
-        <p:spPr/>
+        <p:spPr>
+          <a:xfrm>
+            <a:off x="382754" y="1628800"/>
+            <a:ext cx="8374063" cy="4067175"/>
+          </a:xfrm>
+        </p:spPr>
         <p:txBody>
           <a:bodyPr/>
           <a:lstStyle/>
           <a:p>
             <a:r>
-              <a:rPr lang="en-US" dirty="0"/>
-              <a:t>Comparison	Mean </a:t>
-            </a:r>
-            <a:r>
-              <a:rPr lang="el-GR" dirty="0"/>
+              <a:rPr lang="en-US" sz="2400" dirty="0"/>
+              <a:t>Comparison:	Mean </a:t>
+            </a:r>
+            <a:r>
+              <a:rPr lang="el-GR" sz="2400" dirty="0"/>
               <a:t>Δ</a:t>
             </a:r>
             <a:r>
-              <a:rPr lang="en-US" dirty="0"/>
+              <a:rPr lang="en-US" sz="2400" dirty="0"/>
               <a:t>AIC [95% CI]</a:t>
             </a:r>
           </a:p>
           <a:p>
             <a:r>
-              <a:rPr lang="en-US" dirty="0"/>
-              <a:t>Emotion-only minus EEG main-effects	: 2.22 [1.17, 3.27]</a:t>
-            </a:r>
-          </a:p>
-          <a:p>
-            <a:r>
-              <a:rPr lang="en-US" dirty="0"/>
-              <a:t>Emotion-only minus EEG interaction:	2.73 [1.56, 3.89]</a:t>
-            </a:r>
-          </a:p>
-          <a:p>
-            <a:r>
-              <a:rPr lang="en-US" dirty="0"/>
-              <a:t>EEG main-effects minus EEG interaction:  0.51 [-0.43, 1.44]</a:t>
-            </a:r>
-          </a:p>
-          <a:p>
-            <a:endParaRPr lang="en-US" dirty="0"/>
+              <a:rPr lang="en-US" sz="2400" dirty="0" err="1"/>
+              <a:t>Emotion+LPP</a:t>
+            </a:r>
+            <a:r>
+              <a:rPr lang="en-US" sz="2400" dirty="0"/>
+              <a:t> vs Emotion-only: −3.98 [−5.71, −2.25]</a:t>
+            </a:r>
+          </a:p>
+          <a:p>
+            <a:r>
+              <a:rPr lang="en-US" sz="2400" dirty="0" err="1"/>
+              <a:t>Emotion+LPP</a:t>
+            </a:r>
+            <a:r>
+              <a:rPr lang="en-US" sz="2400" dirty="0"/>
+              <a:t> vs LPP-only: −6.69 [−9.31, −4.07]</a:t>
+            </a:r>
+          </a:p>
+          <a:p>
+            <a:r>
+              <a:rPr lang="en-US" sz="2400" dirty="0"/>
+              <a:t>Emotion-only vs LPP-only: −2.71 [−5.55, 0.13]</a:t>
+            </a:r>
           </a:p>
           <a:p>
             <a:pPr marL="0" indent="0">
               <a:buNone/>
             </a:pPr>
-            <a:r>
-              <a:rPr lang="en-US" dirty="0"/>
-              <a:t>Point plot? </a:t>
-            </a:r>
-          </a:p>
-          <a:p>
-            <a:endParaRPr lang="en-US" dirty="0"/>
+            <a:endParaRPr lang="en-US" sz="2400" dirty="0"/>
+          </a:p>
+          <a:p>
+            <a:pPr marL="0" indent="0">
+              <a:buNone/>
+            </a:pPr>
+            <a:r>
+              <a:rPr lang="en-US" sz="2400" dirty="0"/>
+              <a:t>When bootstrap interval is entirely below zero and comfortably beyond ±2 band, that’s our cue that the left model really is better for most subjects, not just on average.</a:t>
+            </a:r>
           </a:p>
         </p:txBody>
       </p:sp>
@@ -9420,7 +9961,7 @@
           <p:cNvPr id="2" name="Title 1">
             <a:extLst>
               <a:ext uri="{FF2B5EF4-FFF2-40B4-BE49-F238E27FC236}">
-                <a16:creationId xmlns:a16="http://schemas.microsoft.com/office/drawing/2014/main" id="{EA3A6BCC-B5DA-0EAF-F690-399ABCC314EA}"/>
+                <a16:creationId xmlns:a16="http://schemas.microsoft.com/office/drawing/2014/main" id="{AE443E63-3BD8-C22B-14C0-8F3A8D66E8E0}"/>
               </a:ext>
             </a:extLst>
           </p:cNvPr>
@@ -9431,38 +9972,170 @@
             <p:ph type="title"/>
           </p:nvPr>
         </p:nvSpPr>
-        <p:spPr/>
+        <p:spPr>
+          <a:xfrm>
+            <a:off x="382588" y="260648"/>
+            <a:ext cx="8375650" cy="423862"/>
+          </a:xfrm>
+        </p:spPr>
         <p:txBody>
           <a:bodyPr/>
           <a:lstStyle/>
           <a:p>
             <a:r>
               <a:rPr lang="en-US" dirty="0"/>
-              <a:t>What modelling bought us (and what it didn’t)</a:t>
-            </a:r>
-          </a:p>
-        </p:txBody>
-      </p:sp>
-      <p:sp>
-        <p:nvSpPr>
-          <p:cNvPr id="3" name="Content Placeholder 2">
+              <a:t>Interpretation by Simulation: </a:t>
+            </a:r>
+            <a:br>
+              <a:rPr lang="en-US" dirty="0"/>
+            </a:br>
+            <a:r>
+              <a:rPr lang="en-US" dirty="0"/>
+              <a:t>Emotion-Only Model Cannot Capture LPP Patterns</a:t>
+            </a:r>
+          </a:p>
+        </p:txBody>
+      </p:sp>
+      <p:pic>
+        <p:nvPicPr>
+          <p:cNvPr id="4" name="Picture 3">
             <a:extLst>
               <a:ext uri="{FF2B5EF4-FFF2-40B4-BE49-F238E27FC236}">
-                <a16:creationId xmlns:a16="http://schemas.microsoft.com/office/drawing/2014/main" id="{9B771251-185C-D710-D7A2-38B7C8C3122F}"/>
+                <a16:creationId xmlns:a16="http://schemas.microsoft.com/office/drawing/2014/main" id="{B91205B3-76C8-9D3C-3276-EC69DEFB1F0D}"/>
               </a:ext>
             </a:extLst>
           </p:cNvPr>
-          <p:cNvSpPr>
-            <a:spLocks noGrp="1"/>
-          </p:cNvSpPr>
-          <p:nvPr>
-            <p:ph idx="1"/>
-          </p:nvPr>
-        </p:nvSpPr>
+          <p:cNvPicPr>
+            <a:picLocks noChangeAspect="1"/>
+          </p:cNvPicPr>
+          <p:nvPr/>
+        </p:nvPicPr>
+        <p:blipFill>
+          <a:blip r:embed="rId3"/>
+          <a:stretch>
+            <a:fillRect/>
+          </a:stretch>
+        </p:blipFill>
         <p:spPr>
           <a:xfrm>
-            <a:off x="362042" y="1395412"/>
-            <a:ext cx="8374063" cy="4067175"/>
+            <a:off x="2293641" y="1606773"/>
+            <a:ext cx="3011388" cy="2328393"/>
+          </a:xfrm>
+          <a:prstGeom prst="rect">
+            <a:avLst/>
+          </a:prstGeom>
+        </p:spPr>
+      </p:pic>
+      <p:pic>
+        <p:nvPicPr>
+          <p:cNvPr id="5" name="Picture 4">
+            <a:extLst>
+              <a:ext uri="{FF2B5EF4-FFF2-40B4-BE49-F238E27FC236}">
+                <a16:creationId xmlns:a16="http://schemas.microsoft.com/office/drawing/2014/main" id="{5FF939B0-6009-76B0-2A4B-3F958E3F9F88}"/>
+              </a:ext>
+            </a:extLst>
+          </p:cNvPr>
+          <p:cNvPicPr>
+            <a:picLocks noChangeAspect="1"/>
+          </p:cNvPicPr>
+          <p:nvPr/>
+        </p:nvPicPr>
+        <p:blipFill>
+          <a:blip r:embed="rId4"/>
+          <a:stretch>
+            <a:fillRect/>
+          </a:stretch>
+        </p:blipFill>
+        <p:spPr>
+          <a:xfrm>
+            <a:off x="2293641" y="3935166"/>
+            <a:ext cx="3011389" cy="2328393"/>
+          </a:xfrm>
+          <a:prstGeom prst="rect">
+            <a:avLst/>
+          </a:prstGeom>
+        </p:spPr>
+      </p:pic>
+      <p:pic>
+        <p:nvPicPr>
+          <p:cNvPr id="6" name="Picture 5">
+            <a:extLst>
+              <a:ext uri="{FF2B5EF4-FFF2-40B4-BE49-F238E27FC236}">
+                <a16:creationId xmlns:a16="http://schemas.microsoft.com/office/drawing/2014/main" id="{3D8D872D-2649-962B-747D-80EF1C2E75DD}"/>
+              </a:ext>
+            </a:extLst>
+          </p:cNvPr>
+          <p:cNvPicPr>
+            <a:picLocks noChangeAspect="1"/>
+          </p:cNvPicPr>
+          <p:nvPr/>
+        </p:nvPicPr>
+        <p:blipFill>
+          <a:blip r:embed="rId5"/>
+          <a:stretch>
+            <a:fillRect/>
+          </a:stretch>
+        </p:blipFill>
+        <p:spPr>
+          <a:xfrm>
+            <a:off x="5652120" y="1515521"/>
+            <a:ext cx="3397099" cy="2510899"/>
+          </a:xfrm>
+          <a:prstGeom prst="rect">
+            <a:avLst/>
+          </a:prstGeom>
+        </p:spPr>
+      </p:pic>
+      <p:pic>
+        <p:nvPicPr>
+          <p:cNvPr id="7" name="Picture 6">
+            <a:extLst>
+              <a:ext uri="{FF2B5EF4-FFF2-40B4-BE49-F238E27FC236}">
+                <a16:creationId xmlns:a16="http://schemas.microsoft.com/office/drawing/2014/main" id="{CABEBA8B-7717-2833-852D-1A6D9DF1D9BD}"/>
+              </a:ext>
+            </a:extLst>
+          </p:cNvPr>
+          <p:cNvPicPr>
+            <a:picLocks noChangeAspect="1"/>
+          </p:cNvPicPr>
+          <p:nvPr/>
+        </p:nvPicPr>
+        <p:blipFill>
+          <a:blip r:embed="rId6"/>
+          <a:stretch>
+            <a:fillRect/>
+          </a:stretch>
+        </p:blipFill>
+        <p:spPr>
+          <a:xfrm>
+            <a:off x="5652120" y="4113514"/>
+            <a:ext cx="3397099" cy="2510899"/>
+          </a:xfrm>
+          <a:prstGeom prst="rect">
+            <a:avLst/>
+          </a:prstGeom>
+        </p:spPr>
+      </p:pic>
+      <p:sp>
+        <p:nvSpPr>
+          <p:cNvPr id="8" name="Content Placeholder 2">
+            <a:extLst>
+              <a:ext uri="{FF2B5EF4-FFF2-40B4-BE49-F238E27FC236}">
+                <a16:creationId xmlns:a16="http://schemas.microsoft.com/office/drawing/2014/main" id="{6637989F-CF70-C9AE-2F73-F4D365C37634}"/>
+              </a:ext>
+            </a:extLst>
+          </p:cNvPr>
+          <p:cNvSpPr>
+            <a:spLocks noGrp="1"/>
+          </p:cNvSpPr>
+          <p:nvPr>
+            <p:ph idx="1"/>
+          </p:nvPr>
+        </p:nvSpPr>
+        <p:spPr>
+          <a:xfrm>
+            <a:off x="80525" y="1901578"/>
+            <a:ext cx="2198859" cy="4067175"/>
           </a:xfrm>
         </p:spPr>
         <p:txBody>
@@ -9470,65 +10143,34 @@
           <a:lstStyle/>
           <a:p>
             <a:r>
-              <a:rPr lang="en-US" sz="1600" b="1" dirty="0"/>
-              <a:t>Why cognitive models vs stats?</a:t>
-            </a:r>
-            <a:br>
               <a:rPr lang="en-US" sz="1600" dirty="0"/>
-            </a:br>
+              <a:t>Top: Data</a:t>
+            </a:r>
+          </a:p>
+          <a:p>
             <a:r>
               <a:rPr lang="en-US" sz="1600" dirty="0"/>
-              <a:t>The GLMM told us there is an Emotion x LPP interaction in recall; the models showed that an emotion-only process is inadequate, but also that multiple process-level stories are consistent with that interaction.</a:t>
-            </a:r>
-          </a:p>
-          <a:p>
-            <a:r>
-              <a:rPr lang="en-US" sz="1600" b="1" dirty="0"/>
-              <a:t>What does likelihood-based fitting mean and why bother?</a:t>
-            </a:r>
-            <a:br>
-              <a:rPr lang="en-US" sz="1600" b="1" dirty="0"/>
-            </a:br>
+              <a:t>Bottom: Simulations</a:t>
+            </a:r>
+          </a:p>
+          <a:p>
             <a:r>
               <a:rPr lang="en-US" sz="1600" dirty="0"/>
-              <a:t>We used a set-based likelihood over recall sets to evaluate models on the full trial-level pattern, then converted that into AIC scores per subject that balance fit and complexity.</a:t>
-            </a:r>
-          </a:p>
-          <a:p>
-            <a:r>
-              <a:rPr lang="en-US" sz="1600" b="1" dirty="0"/>
-              <a:t>How did we choose models?</a:t>
-            </a:r>
-            <a:br>
+              <a:t>Emotion-only model captures much of the emotional enhancement of memory, but cannot capture LPP effects</a:t>
+            </a:r>
+          </a:p>
+          <a:p>
+            <a:r>
               <a:rPr lang="en-US" sz="1600" dirty="0"/>
-            </a:br>
-            <a:r>
-              <a:rPr lang="en-US" sz="1600" dirty="0"/>
-              <a:t>We built an emotion-only baseline and two EEG-aware models that differed only in where they put the LPP x emotion structure: additive encoding plus competition versus explicit encoding interaction.</a:t>
-            </a:r>
-          </a:p>
-          <a:p>
-            <a:r>
-              <a:rPr lang="en-US" sz="1600" b="1" dirty="0"/>
-              <a:t>How did we compare them and what did we learn?</a:t>
-            </a:r>
-            <a:br>
-              <a:rPr lang="en-US" sz="1600" dirty="0"/>
-            </a:br>
-            <a:r>
-              <a:rPr lang="en-US" sz="1600" dirty="0"/>
-              <a:t>AIC differences showed that adding EEG clearly improves the model over emotion-only, and that within the EEG models the extra interaction term does not buy enough improvement to be clearly preferred; that aspect remains underdetermined by these data.</a:t>
-            </a:r>
-          </a:p>
-          <a:p>
-            <a:endParaRPr lang="en-US" sz="1600" dirty="0"/>
+              <a:t>You can’t explain LPP-recall relationship with emotion and model dynamics alone!</a:t>
+            </a:r>
           </a:p>
         </p:txBody>
       </p:sp>
     </p:spTree>
     <p:extLst>
       <p:ext uri="{BB962C8B-B14F-4D97-AF65-F5344CB8AC3E}">
-        <p14:creationId xmlns:p14="http://schemas.microsoft.com/office/powerpoint/2010/main" val="1058899191"/>
+        <p14:creationId xmlns:p14="http://schemas.microsoft.com/office/powerpoint/2010/main" val="1704872658"/>
       </p:ext>
     </p:extLst>
   </p:cSld>
@@ -9704,6 +10346,675 @@
 </file>
 
 <file path=ppt/slides/slide20.xml><?xml version="1.0" encoding="utf-8"?>
+<p:sld xmlns:a="http://schemas.openxmlformats.org/drawingml/2006/main" xmlns:r="http://schemas.openxmlformats.org/officeDocument/2006/relationships" xmlns:p="http://schemas.openxmlformats.org/presentationml/2006/main">
+  <p:cSld>
+    <p:spTree>
+      <p:nvGrpSpPr>
+        <p:cNvPr id="1" name="">
+          <a:extLst>
+            <a:ext uri="{FF2B5EF4-FFF2-40B4-BE49-F238E27FC236}">
+              <a16:creationId xmlns:a16="http://schemas.microsoft.com/office/drawing/2014/main" id="{CD60C746-1A11-07EA-1CD9-D8D77BCCEE61}"/>
+            </a:ext>
+          </a:extLst>
+        </p:cNvPr>
+        <p:cNvGrpSpPr/>
+        <p:nvPr/>
+      </p:nvGrpSpPr>
+      <p:grpSpPr>
+        <a:xfrm>
+          <a:off x="0" y="0"/>
+          <a:ext cx="0" cy="0"/>
+          <a:chOff x="0" y="0"/>
+          <a:chExt cx="0" cy="0"/>
+        </a:xfrm>
+      </p:grpSpPr>
+      <p:sp>
+        <p:nvSpPr>
+          <p:cNvPr id="2" name="Title 1">
+            <a:extLst>
+              <a:ext uri="{FF2B5EF4-FFF2-40B4-BE49-F238E27FC236}">
+                <a16:creationId xmlns:a16="http://schemas.microsoft.com/office/drawing/2014/main" id="{860542C1-B78A-A4E4-CD8F-AF23191FB387}"/>
+              </a:ext>
+            </a:extLst>
+          </p:cNvPr>
+          <p:cNvSpPr>
+            <a:spLocks noGrp="1"/>
+          </p:cNvSpPr>
+          <p:nvPr>
+            <p:ph type="title"/>
+          </p:nvPr>
+        </p:nvSpPr>
+        <p:spPr>
+          <a:xfrm>
+            <a:off x="382588" y="260648"/>
+            <a:ext cx="8375650" cy="423862"/>
+          </a:xfrm>
+        </p:spPr>
+        <p:txBody>
+          <a:bodyPr/>
+          <a:lstStyle/>
+          <a:p>
+            <a:r>
+              <a:rPr lang="en-US" dirty="0"/>
+              <a:t>Interpretation by Simulation: </a:t>
+            </a:r>
+            <a:br>
+              <a:rPr lang="en-US" dirty="0"/>
+            </a:br>
+            <a:r>
+              <a:rPr lang="en-US" dirty="0"/>
+              <a:t>LPP-Only Model Cannot Stand-In For Emotion</a:t>
+            </a:r>
+          </a:p>
+        </p:txBody>
+      </p:sp>
+      <p:pic>
+        <p:nvPicPr>
+          <p:cNvPr id="4" name="Picture 3">
+            <a:extLst>
+              <a:ext uri="{FF2B5EF4-FFF2-40B4-BE49-F238E27FC236}">
+                <a16:creationId xmlns:a16="http://schemas.microsoft.com/office/drawing/2014/main" id="{87FBF724-BEF3-C912-F844-99212097BFE6}"/>
+              </a:ext>
+            </a:extLst>
+          </p:cNvPr>
+          <p:cNvPicPr>
+            <a:picLocks noChangeAspect="1"/>
+          </p:cNvPicPr>
+          <p:nvPr/>
+        </p:nvPicPr>
+        <p:blipFill>
+          <a:blip r:embed="rId3"/>
+          <a:stretch>
+            <a:fillRect/>
+          </a:stretch>
+        </p:blipFill>
+        <p:spPr>
+          <a:xfrm>
+            <a:off x="2293641" y="1606773"/>
+            <a:ext cx="3011388" cy="2328393"/>
+          </a:xfrm>
+          <a:prstGeom prst="rect">
+            <a:avLst/>
+          </a:prstGeom>
+        </p:spPr>
+      </p:pic>
+      <p:pic>
+        <p:nvPicPr>
+          <p:cNvPr id="6" name="Picture 5">
+            <a:extLst>
+              <a:ext uri="{FF2B5EF4-FFF2-40B4-BE49-F238E27FC236}">
+                <a16:creationId xmlns:a16="http://schemas.microsoft.com/office/drawing/2014/main" id="{24C33DAC-1EDD-8014-12B6-BF51A66D99CB}"/>
+              </a:ext>
+            </a:extLst>
+          </p:cNvPr>
+          <p:cNvPicPr>
+            <a:picLocks noChangeAspect="1"/>
+          </p:cNvPicPr>
+          <p:nvPr/>
+        </p:nvPicPr>
+        <p:blipFill>
+          <a:blip r:embed="rId4"/>
+          <a:stretch>
+            <a:fillRect/>
+          </a:stretch>
+        </p:blipFill>
+        <p:spPr>
+          <a:xfrm>
+            <a:off x="5652120" y="1515521"/>
+            <a:ext cx="3397099" cy="2510899"/>
+          </a:xfrm>
+          <a:prstGeom prst="rect">
+            <a:avLst/>
+          </a:prstGeom>
+        </p:spPr>
+      </p:pic>
+      <p:sp>
+        <p:nvSpPr>
+          <p:cNvPr id="8" name="Content Placeholder 2">
+            <a:extLst>
+              <a:ext uri="{FF2B5EF4-FFF2-40B4-BE49-F238E27FC236}">
+                <a16:creationId xmlns:a16="http://schemas.microsoft.com/office/drawing/2014/main" id="{28392661-0B0B-3DD7-A164-87BE98F48D9C}"/>
+              </a:ext>
+            </a:extLst>
+          </p:cNvPr>
+          <p:cNvSpPr>
+            <a:spLocks noGrp="1"/>
+          </p:cNvSpPr>
+          <p:nvPr>
+            <p:ph idx="1"/>
+          </p:nvPr>
+        </p:nvSpPr>
+        <p:spPr>
+          <a:xfrm>
+            <a:off x="80525" y="1901578"/>
+            <a:ext cx="2198859" cy="4067175"/>
+          </a:xfrm>
+        </p:spPr>
+        <p:txBody>
+          <a:bodyPr/>
+          <a:lstStyle/>
+          <a:p>
+            <a:r>
+              <a:rPr lang="en-US" sz="1600" dirty="0"/>
+              <a:t>Top: Data</a:t>
+            </a:r>
+          </a:p>
+          <a:p>
+            <a:r>
+              <a:rPr lang="en-US" sz="1600" dirty="0"/>
+              <a:t>Bottom: Simulations</a:t>
+            </a:r>
+          </a:p>
+          <a:p>
+            <a:r>
+              <a:rPr lang="en-US" sz="1600" dirty="0"/>
+              <a:t>LPP-only model captures none of the emotional enhancement of memory, and only some LPP patterns</a:t>
+            </a:r>
+          </a:p>
+          <a:p>
+            <a:r>
+              <a:rPr lang="en-US" sz="1600" dirty="0"/>
+              <a:t>Can’t give extra subsequent recall boost to emotional items!</a:t>
+            </a:r>
+          </a:p>
+        </p:txBody>
+      </p:sp>
+      <p:pic>
+        <p:nvPicPr>
+          <p:cNvPr id="3" name="Picture 2">
+            <a:extLst>
+              <a:ext uri="{FF2B5EF4-FFF2-40B4-BE49-F238E27FC236}">
+                <a16:creationId xmlns:a16="http://schemas.microsoft.com/office/drawing/2014/main" id="{551115D5-AC60-D6B1-3C08-6B3533043DF2}"/>
+              </a:ext>
+            </a:extLst>
+          </p:cNvPr>
+          <p:cNvPicPr>
+            <a:picLocks noChangeAspect="1"/>
+          </p:cNvPicPr>
+          <p:nvPr/>
+        </p:nvPicPr>
+        <p:blipFill>
+          <a:blip r:embed="rId5"/>
+          <a:stretch>
+            <a:fillRect/>
+          </a:stretch>
+        </p:blipFill>
+        <p:spPr>
+          <a:xfrm>
+            <a:off x="2293641" y="4026420"/>
+            <a:ext cx="3011388" cy="2328393"/>
+          </a:xfrm>
+          <a:prstGeom prst="rect">
+            <a:avLst/>
+          </a:prstGeom>
+        </p:spPr>
+      </p:pic>
+      <p:pic>
+        <p:nvPicPr>
+          <p:cNvPr id="9" name="Picture 8">
+            <a:extLst>
+              <a:ext uri="{FF2B5EF4-FFF2-40B4-BE49-F238E27FC236}">
+                <a16:creationId xmlns:a16="http://schemas.microsoft.com/office/drawing/2014/main" id="{822FEBD2-AC03-DCB2-F3FD-E90165E098B5}"/>
+              </a:ext>
+            </a:extLst>
+          </p:cNvPr>
+          <p:cNvPicPr>
+            <a:picLocks noChangeAspect="1"/>
+          </p:cNvPicPr>
+          <p:nvPr/>
+        </p:nvPicPr>
+        <p:blipFill>
+          <a:blip r:embed="rId6"/>
+          <a:stretch>
+            <a:fillRect/>
+          </a:stretch>
+        </p:blipFill>
+        <p:spPr>
+          <a:xfrm>
+            <a:off x="5652119" y="4026420"/>
+            <a:ext cx="3397099" cy="2510899"/>
+          </a:xfrm>
+          <a:prstGeom prst="rect">
+            <a:avLst/>
+          </a:prstGeom>
+        </p:spPr>
+      </p:pic>
+    </p:spTree>
+    <p:extLst>
+      <p:ext uri="{BB962C8B-B14F-4D97-AF65-F5344CB8AC3E}">
+        <p14:creationId xmlns:p14="http://schemas.microsoft.com/office/powerpoint/2010/main" val="1560272498"/>
+      </p:ext>
+    </p:extLst>
+  </p:cSld>
+  <p:clrMapOvr>
+    <a:masterClrMapping/>
+  </p:clrMapOvr>
+</p:sld>
+</file>
+
+<file path=ppt/slides/slide21.xml><?xml version="1.0" encoding="utf-8"?>
+<p:sld xmlns:a="http://schemas.openxmlformats.org/drawingml/2006/main" xmlns:r="http://schemas.openxmlformats.org/officeDocument/2006/relationships" xmlns:p="http://schemas.openxmlformats.org/presentationml/2006/main">
+  <p:cSld>
+    <p:spTree>
+      <p:nvGrpSpPr>
+        <p:cNvPr id="1" name="">
+          <a:extLst>
+            <a:ext uri="{FF2B5EF4-FFF2-40B4-BE49-F238E27FC236}">
+              <a16:creationId xmlns:a16="http://schemas.microsoft.com/office/drawing/2014/main" id="{BB1F3B72-BBE7-B831-6A63-77B4B64C7C70}"/>
+            </a:ext>
+          </a:extLst>
+        </p:cNvPr>
+        <p:cNvGrpSpPr/>
+        <p:nvPr/>
+      </p:nvGrpSpPr>
+      <p:grpSpPr>
+        <a:xfrm>
+          <a:off x="0" y="0"/>
+          <a:ext cx="0" cy="0"/>
+          <a:chOff x="0" y="0"/>
+          <a:chExt cx="0" cy="0"/>
+        </a:xfrm>
+      </p:grpSpPr>
+      <p:sp>
+        <p:nvSpPr>
+          <p:cNvPr id="2" name="Title 1">
+            <a:extLst>
+              <a:ext uri="{FF2B5EF4-FFF2-40B4-BE49-F238E27FC236}">
+                <a16:creationId xmlns:a16="http://schemas.microsoft.com/office/drawing/2014/main" id="{D39B9EDD-5F4C-22F0-24F0-2B5762BE9FE2}"/>
+              </a:ext>
+            </a:extLst>
+          </p:cNvPr>
+          <p:cNvSpPr>
+            <a:spLocks noGrp="1"/>
+          </p:cNvSpPr>
+          <p:nvPr>
+            <p:ph type="title"/>
+          </p:nvPr>
+        </p:nvSpPr>
+        <p:spPr>
+          <a:xfrm>
+            <a:off x="382588" y="260648"/>
+            <a:ext cx="8375650" cy="423862"/>
+          </a:xfrm>
+        </p:spPr>
+        <p:txBody>
+          <a:bodyPr/>
+          <a:lstStyle/>
+          <a:p>
+            <a:r>
+              <a:rPr lang="en-US" dirty="0"/>
+              <a:t>Interpretation by Simulation: </a:t>
+            </a:r>
+            <a:br>
+              <a:rPr lang="en-US" dirty="0"/>
+            </a:br>
+            <a:r>
+              <a:rPr lang="en-US" dirty="0" err="1"/>
+              <a:t>Emotion+LPP</a:t>
+            </a:r>
+            <a:r>
+              <a:rPr lang="en-US" dirty="0"/>
+              <a:t> Model Helps Capture Both!</a:t>
+            </a:r>
+          </a:p>
+        </p:txBody>
+      </p:sp>
+      <p:pic>
+        <p:nvPicPr>
+          <p:cNvPr id="4" name="Picture 3">
+            <a:extLst>
+              <a:ext uri="{FF2B5EF4-FFF2-40B4-BE49-F238E27FC236}">
+                <a16:creationId xmlns:a16="http://schemas.microsoft.com/office/drawing/2014/main" id="{6FBC5C87-9D1D-E021-D677-6827FB0F977A}"/>
+              </a:ext>
+            </a:extLst>
+          </p:cNvPr>
+          <p:cNvPicPr>
+            <a:picLocks noChangeAspect="1"/>
+          </p:cNvPicPr>
+          <p:nvPr/>
+        </p:nvPicPr>
+        <p:blipFill>
+          <a:blip r:embed="rId3"/>
+          <a:stretch>
+            <a:fillRect/>
+          </a:stretch>
+        </p:blipFill>
+        <p:spPr>
+          <a:xfrm>
+            <a:off x="2293641" y="1606773"/>
+            <a:ext cx="3011388" cy="2328393"/>
+          </a:xfrm>
+          <a:prstGeom prst="rect">
+            <a:avLst/>
+          </a:prstGeom>
+        </p:spPr>
+      </p:pic>
+      <p:pic>
+        <p:nvPicPr>
+          <p:cNvPr id="6" name="Picture 5">
+            <a:extLst>
+              <a:ext uri="{FF2B5EF4-FFF2-40B4-BE49-F238E27FC236}">
+                <a16:creationId xmlns:a16="http://schemas.microsoft.com/office/drawing/2014/main" id="{44A9F70A-5CF5-CD42-BF3E-398A893863B5}"/>
+              </a:ext>
+            </a:extLst>
+          </p:cNvPr>
+          <p:cNvPicPr>
+            <a:picLocks noChangeAspect="1"/>
+          </p:cNvPicPr>
+          <p:nvPr/>
+        </p:nvPicPr>
+        <p:blipFill>
+          <a:blip r:embed="rId4"/>
+          <a:stretch>
+            <a:fillRect/>
+          </a:stretch>
+        </p:blipFill>
+        <p:spPr>
+          <a:xfrm>
+            <a:off x="5652120" y="1515521"/>
+            <a:ext cx="3397099" cy="2510899"/>
+          </a:xfrm>
+          <a:prstGeom prst="rect">
+            <a:avLst/>
+          </a:prstGeom>
+        </p:spPr>
+      </p:pic>
+      <p:sp>
+        <p:nvSpPr>
+          <p:cNvPr id="8" name="Content Placeholder 2">
+            <a:extLst>
+              <a:ext uri="{FF2B5EF4-FFF2-40B4-BE49-F238E27FC236}">
+                <a16:creationId xmlns:a16="http://schemas.microsoft.com/office/drawing/2014/main" id="{8299FE1D-23D5-D634-3EAD-D0205496E518}"/>
+              </a:ext>
+            </a:extLst>
+          </p:cNvPr>
+          <p:cNvSpPr>
+            <a:spLocks noGrp="1"/>
+          </p:cNvSpPr>
+          <p:nvPr>
+            <p:ph idx="1"/>
+          </p:nvPr>
+        </p:nvSpPr>
+        <p:spPr>
+          <a:xfrm>
+            <a:off x="80525" y="1901578"/>
+            <a:ext cx="2198859" cy="4067175"/>
+          </a:xfrm>
+        </p:spPr>
+        <p:txBody>
+          <a:bodyPr/>
+          <a:lstStyle/>
+          <a:p>
+            <a:r>
+              <a:rPr lang="en-US" sz="1600" dirty="0"/>
+              <a:t>Top: Data</a:t>
+            </a:r>
+          </a:p>
+          <a:p>
+            <a:r>
+              <a:rPr lang="en-US" sz="1600" dirty="0"/>
+              <a:t>Bottom: Simulations</a:t>
+            </a:r>
+          </a:p>
+          <a:p>
+            <a:r>
+              <a:rPr lang="en-US" sz="1600" dirty="0" err="1"/>
+              <a:t>Emotion+LPP</a:t>
+            </a:r>
+            <a:r>
+              <a:rPr lang="en-US" sz="1600" dirty="0"/>
+              <a:t> model predicts emotion-dependent encoding boost from LPP</a:t>
+            </a:r>
+          </a:p>
+          <a:p>
+            <a:r>
+              <a:rPr lang="en-US" sz="1600" dirty="0"/>
+              <a:t>Improves prediction of emotional enhancement of memory AND emotion x LPP interaction effect</a:t>
+            </a:r>
+          </a:p>
+        </p:txBody>
+      </p:sp>
+      <p:pic>
+        <p:nvPicPr>
+          <p:cNvPr id="5" name="Picture 4">
+            <a:extLst>
+              <a:ext uri="{FF2B5EF4-FFF2-40B4-BE49-F238E27FC236}">
+                <a16:creationId xmlns:a16="http://schemas.microsoft.com/office/drawing/2014/main" id="{B30B9876-5CA3-4121-1090-F6A9C8A15082}"/>
+              </a:ext>
+            </a:extLst>
+          </p:cNvPr>
+          <p:cNvPicPr>
+            <a:picLocks noChangeAspect="1"/>
+          </p:cNvPicPr>
+          <p:nvPr/>
+        </p:nvPicPr>
+        <p:blipFill>
+          <a:blip r:embed="rId5"/>
+          <a:stretch>
+            <a:fillRect/>
+          </a:stretch>
+        </p:blipFill>
+        <p:spPr>
+          <a:xfrm>
+            <a:off x="2293641" y="3935165"/>
+            <a:ext cx="3011388" cy="2328393"/>
+          </a:xfrm>
+          <a:prstGeom prst="rect">
+            <a:avLst/>
+          </a:prstGeom>
+        </p:spPr>
+      </p:pic>
+      <p:pic>
+        <p:nvPicPr>
+          <p:cNvPr id="7" name="Picture 6">
+            <a:extLst>
+              <a:ext uri="{FF2B5EF4-FFF2-40B4-BE49-F238E27FC236}">
+                <a16:creationId xmlns:a16="http://schemas.microsoft.com/office/drawing/2014/main" id="{6DC98983-8EC3-5490-E2AB-1C64D8D103D0}"/>
+              </a:ext>
+            </a:extLst>
+          </p:cNvPr>
+          <p:cNvPicPr>
+            <a:picLocks noChangeAspect="1"/>
+          </p:cNvPicPr>
+          <p:nvPr/>
+        </p:nvPicPr>
+        <p:blipFill>
+          <a:blip r:embed="rId6"/>
+          <a:stretch>
+            <a:fillRect/>
+          </a:stretch>
+        </p:blipFill>
+        <p:spPr>
+          <a:xfrm>
+            <a:off x="5652119" y="4086452"/>
+            <a:ext cx="3397100" cy="2510900"/>
+          </a:xfrm>
+          <a:prstGeom prst="rect">
+            <a:avLst/>
+          </a:prstGeom>
+        </p:spPr>
+      </p:pic>
+    </p:spTree>
+    <p:extLst>
+      <p:ext uri="{BB962C8B-B14F-4D97-AF65-F5344CB8AC3E}">
+        <p14:creationId xmlns:p14="http://schemas.microsoft.com/office/powerpoint/2010/main" val="3710364408"/>
+      </p:ext>
+    </p:extLst>
+  </p:cSld>
+  <p:clrMapOvr>
+    <a:masterClrMapping/>
+  </p:clrMapOvr>
+</p:sld>
+</file>
+
+<file path=ppt/slides/slide22.xml><?xml version="1.0" encoding="utf-8"?>
+<p:sld xmlns:a="http://schemas.openxmlformats.org/drawingml/2006/main" xmlns:r="http://schemas.openxmlformats.org/officeDocument/2006/relationships" xmlns:p="http://schemas.openxmlformats.org/presentationml/2006/main">
+  <p:cSld>
+    <p:spTree>
+      <p:nvGrpSpPr>
+        <p:cNvPr id="1" name=""/>
+        <p:cNvGrpSpPr/>
+        <p:nvPr/>
+      </p:nvGrpSpPr>
+      <p:grpSpPr>
+        <a:xfrm>
+          <a:off x="0" y="0"/>
+          <a:ext cx="0" cy="0"/>
+          <a:chOff x="0" y="0"/>
+          <a:chExt cx="0" cy="0"/>
+        </a:xfrm>
+      </p:grpSpPr>
+      <p:sp>
+        <p:nvSpPr>
+          <p:cNvPr id="2" name="Title 1">
+            <a:extLst>
+              <a:ext uri="{FF2B5EF4-FFF2-40B4-BE49-F238E27FC236}">
+                <a16:creationId xmlns:a16="http://schemas.microsoft.com/office/drawing/2014/main" id="{EA3A6BCC-B5DA-0EAF-F690-399ABCC314EA}"/>
+              </a:ext>
+            </a:extLst>
+          </p:cNvPr>
+          <p:cNvSpPr>
+            <a:spLocks noGrp="1"/>
+          </p:cNvSpPr>
+          <p:nvPr>
+            <p:ph type="title"/>
+          </p:nvPr>
+        </p:nvSpPr>
+        <p:spPr/>
+        <p:txBody>
+          <a:bodyPr/>
+          <a:lstStyle/>
+          <a:p>
+            <a:r>
+              <a:rPr lang="en-US" dirty="0"/>
+              <a:t>What modelling bought us (and what it didn’t)</a:t>
+            </a:r>
+          </a:p>
+        </p:txBody>
+      </p:sp>
+      <p:sp>
+        <p:nvSpPr>
+          <p:cNvPr id="3" name="Content Placeholder 2">
+            <a:extLst>
+              <a:ext uri="{FF2B5EF4-FFF2-40B4-BE49-F238E27FC236}">
+                <a16:creationId xmlns:a16="http://schemas.microsoft.com/office/drawing/2014/main" id="{9B771251-185C-D710-D7A2-38B7C8C3122F}"/>
+              </a:ext>
+            </a:extLst>
+          </p:cNvPr>
+          <p:cNvSpPr>
+            <a:spLocks noGrp="1"/>
+          </p:cNvSpPr>
+          <p:nvPr>
+            <p:ph idx="1"/>
+          </p:nvPr>
+        </p:nvSpPr>
+        <p:spPr>
+          <a:xfrm>
+            <a:off x="362042" y="1395412"/>
+            <a:ext cx="8374063" cy="4067175"/>
+          </a:xfrm>
+        </p:spPr>
+        <p:txBody>
+          <a:bodyPr/>
+          <a:lstStyle/>
+          <a:p>
+            <a:r>
+              <a:rPr lang="en-US" sz="1600" b="1" dirty="0"/>
+              <a:t>Why cognitive models vs stats?</a:t>
+            </a:r>
+            <a:br>
+              <a:rPr lang="en-US" sz="1600" dirty="0"/>
+            </a:br>
+            <a:r>
+              <a:rPr lang="en-US" sz="1600" dirty="0"/>
+              <a:t>The GLMM told us there is an Emotion × LPP interaction in recall and that both factors matter; the models showed that an emotion-only process and an LPP-only process are both inadequate in this recall framework.</a:t>
+            </a:r>
+          </a:p>
+          <a:p>
+            <a:r>
+              <a:rPr lang="en-US" sz="1600" b="1" dirty="0"/>
+              <a:t>What does likelihood-based fitting mean and why bother?</a:t>
+            </a:r>
+            <a:br>
+              <a:rPr lang="en-US" sz="1600" b="1" dirty="0"/>
+            </a:br>
+            <a:r>
+              <a:rPr lang="en-US" sz="1600" dirty="0"/>
+              <a:t>We used a set-based likelihood over recall sets to evaluate models on the full trial-level pattern, then converted that into AIC scores per subject that balance fit and complexity.</a:t>
+            </a:r>
+          </a:p>
+          <a:p>
+            <a:r>
+              <a:rPr lang="en-US" sz="1600" b="1" dirty="0"/>
+              <a:t>How did we choose models?</a:t>
+            </a:r>
+            <a:br>
+              <a:rPr lang="en-US" sz="1600" dirty="0"/>
+            </a:br>
+            <a:r>
+              <a:rPr lang="en-US" sz="1600" dirty="0"/>
+              <a:t>We built three encoding variants that differed only in which signals drive encoding strength: an emotion-only baseline, an LPP-only “strong stand-in” model, and an </a:t>
+            </a:r>
+            <a:r>
+              <a:rPr lang="en-US" sz="1600" dirty="0" err="1"/>
+              <a:t>emotion+LPP</a:t>
+            </a:r>
+            <a:r>
+              <a:rPr lang="en-US" sz="1600" dirty="0"/>
+              <a:t> model corresponding to the weaker stand-in idea; retrieval dynamics were held fixed.</a:t>
+            </a:r>
+          </a:p>
+          <a:p>
+            <a:r>
+              <a:rPr lang="en-US" sz="1600" b="1" dirty="0"/>
+              <a:t>How did we compare them and what did we learn?</a:t>
+            </a:r>
+            <a:br>
+              <a:rPr lang="en-US" sz="1600" dirty="0"/>
+            </a:br>
+            <a:r>
+              <a:rPr lang="en-US" sz="1600" dirty="0"/>
+              <a:t>AIC differences showed that the </a:t>
+            </a:r>
+            <a:r>
+              <a:rPr lang="en-US" sz="1600" dirty="0" err="1"/>
+              <a:t>emotion+LPP</a:t>
+            </a:r>
+            <a:r>
+              <a:rPr lang="en-US" sz="1600" dirty="0"/>
+              <a:t> model clearly outperforms emotion-only and LPP-only, that the LPP-only model is clearly inferior to </a:t>
+            </a:r>
+            <a:r>
+              <a:rPr lang="en-US" sz="1600" dirty="0" err="1"/>
+              <a:t>emotion+LPP</a:t>
+            </a:r>
+            <a:r>
+              <a:rPr lang="en-US" sz="1600" dirty="0"/>
+              <a:t> and never better than emotion-only, and that the strong “LPP can fully replace the emotion label” story is not supported in this model class.</a:t>
+            </a:r>
+          </a:p>
+          <a:p>
+            <a:endParaRPr lang="en-US" sz="1600" dirty="0"/>
+          </a:p>
+          <a:p>
+            <a:endParaRPr lang="en-US" sz="1600" dirty="0"/>
+          </a:p>
+        </p:txBody>
+      </p:sp>
+    </p:spTree>
+    <p:extLst>
+      <p:ext uri="{BB962C8B-B14F-4D97-AF65-F5344CB8AC3E}">
+        <p14:creationId xmlns:p14="http://schemas.microsoft.com/office/powerpoint/2010/main" val="1058899191"/>
+      </p:ext>
+    </p:extLst>
+  </p:cSld>
+  <p:clrMapOvr>
+    <a:masterClrMapping/>
+  </p:clrMapOvr>
+</p:sld>
+</file>
+
+<file path=ppt/slides/slide23.xml><?xml version="1.0" encoding="utf-8"?>
 <p:sld xmlns:a="http://schemas.openxmlformats.org/drawingml/2006/main" xmlns:r="http://schemas.openxmlformats.org/officeDocument/2006/relationships" xmlns:p="http://schemas.openxmlformats.org/presentationml/2006/main">
   <p:cSld>
     <p:spTree>
@@ -10510,7 +11821,7 @@
         </p:nvSpPr>
         <p:spPr>
           <a:xfrm>
-            <a:off x="127566" y="1355188"/>
+            <a:off x="52615" y="1493250"/>
             <a:ext cx="5086624" cy="1150272"/>
           </a:xfrm>
         </p:spPr>
@@ -10741,7 +12052,7 @@
         </p:nvSpPr>
         <p:spPr>
           <a:xfrm>
-            <a:off x="382588" y="2568575"/>
+            <a:off x="301825" y="2066850"/>
             <a:ext cx="2232248" cy="1720850"/>
           </a:xfrm>
         </p:spPr>
@@ -10755,6 +12066,15 @@
             <a:r>
               <a:rPr lang="en-US" dirty="0"/>
               <a:t>Negative items are recalled more often than neutral items across positions.</a:t>
+            </a:r>
+          </a:p>
+          <a:p>
+            <a:pPr marL="0" indent="0">
+              <a:buNone/>
+            </a:pPr>
+            <a:r>
+              <a:rPr lang="en-US" dirty="0"/>
+              <a:t>Error bars reflect 95% bootstrap confidence intervals over subjects</a:t>
             </a:r>
           </a:p>
         </p:txBody>
@@ -10870,14 +12190,14 @@
           <a:p>
             <a:r>
               <a:rPr lang="en-US" dirty="0"/>
-              <a:t>Key Behavioral Result: </a:t>
+              <a:t>Key Neural Result: </a:t>
             </a:r>
             <a:br>
               <a:rPr lang="en-US" dirty="0"/>
             </a:br>
             <a:r>
               <a:rPr lang="en-US" dirty="0"/>
-              <a:t>The Emotional Enhancement of LPP</a:t>
+              <a:t>Early LPP is Higher for Emotional Items</a:t>
             </a:r>
           </a:p>
         </p:txBody>
@@ -10900,7 +12220,7 @@
         </p:nvSpPr>
         <p:spPr>
           <a:xfrm>
-            <a:off x="382588" y="2568575"/>
+            <a:off x="382588" y="2045222"/>
             <a:ext cx="2232248" cy="1720850"/>
           </a:xfrm>
         </p:spPr>
@@ -10913,56 +12233,48 @@
             </a:pPr>
             <a:r>
               <a:rPr lang="en-US" dirty="0"/>
-              <a:t>Negative items are recalled more often than neutral items across positions.</a:t>
+              <a:t>Early-window LPP is on average higher for negative than neutral items across positions.</a:t>
+            </a:r>
+          </a:p>
+          <a:p>
+            <a:pPr marL="0" indent="0">
+              <a:buNone/>
+            </a:pPr>
+            <a:r>
+              <a:rPr lang="en-US" dirty="0"/>
+              <a:t>Substantial overlap and variability: LPP is a noisy, graded correlate of emotion.</a:t>
             </a:r>
           </a:p>
         </p:txBody>
       </p:sp>
       <p:pic>
         <p:nvPicPr>
-          <p:cNvPr id="3074" name="Picture 2">
+          <p:cNvPr id="4" name="Picture 3">
             <a:extLst>
               <a:ext uri="{FF2B5EF4-FFF2-40B4-BE49-F238E27FC236}">
-                <a16:creationId xmlns:a16="http://schemas.microsoft.com/office/drawing/2014/main" id="{218DA8AE-0C24-069C-84B8-54F6FE018FEC}"/>
+                <a16:creationId xmlns:a16="http://schemas.microsoft.com/office/drawing/2014/main" id="{7B0986DD-1C4C-E1D7-CED9-47C061E1F356}"/>
               </a:ext>
             </a:extLst>
           </p:cNvPr>
           <p:cNvPicPr>
-            <a:picLocks noChangeAspect="1" noChangeArrowheads="1"/>
+            <a:picLocks noChangeAspect="1"/>
           </p:cNvPicPr>
           <p:nvPr/>
         </p:nvPicPr>
         <p:blipFill>
-          <a:blip r:embed="rId3">
-            <a:extLst>
-              <a:ext uri="{28A0092B-C50C-407E-A947-70E740481C1C}">
-                <a14:useLocalDpi xmlns:a14="http://schemas.microsoft.com/office/drawing/2010/main" val="0"/>
-              </a:ext>
-            </a:extLst>
-          </a:blip>
-          <a:srcRect/>
+          <a:blip r:embed="rId3"/>
           <a:stretch>
             <a:fillRect/>
           </a:stretch>
         </p:blipFill>
-        <p:spPr bwMode="auto">
+        <p:spPr>
           <a:xfrm>
-            <a:off x="2722346" y="1412776"/>
-            <a:ext cx="6119829" cy="4749849"/>
+            <a:off x="3159820" y="1490303"/>
+            <a:ext cx="5960914" cy="4551537"/>
           </a:xfrm>
           <a:prstGeom prst="rect">
             <a:avLst/>
           </a:prstGeom>
-          <a:noFill/>
-          <a:extLst>
-            <a:ext uri="{909E8E84-426E-40DD-AFC4-6F175D3DCCD1}">
-              <a14:hiddenFill xmlns:a14="http://schemas.microsoft.com/office/drawing/2010/main">
-                <a:solidFill>
-                  <a:srgbClr val="FFFFFF"/>
-                </a:solidFill>
-              </a14:hiddenFill>
-            </a:ext>
-          </a:extLst>
         </p:spPr>
       </p:pic>
     </p:spTree>
@@ -11258,7 +12570,7 @@
           <a:p>
             <a:r>
               <a:rPr lang="en-US" dirty="0"/>
-              <a:t>LPP a Poor Index of Emotionality or Recall Alone</a:t>
+              <a:t>LPP Reflects Both Emotion and Later Recall</a:t>
             </a:r>
           </a:p>
         </p:txBody>
